--- a/Fase2/03_results/Evaluación AgenteRL_F2– Plataforma plana  .pptx
+++ b/Fase2/03_results/Evaluación AgenteRL_F2– Plataforma plana  .pptx
@@ -113,6 +113,11 @@
       </a:defRPr>
     </a:lvl9pPr>
   </p:defaultTextStyle>
+  <p:extLst>
+    <p:ext uri="{EFAFB233-063F-42B5-8137-9DF3F51BA10A}">
+      <p15:sldGuideLst xmlns:p15="http://schemas.microsoft.com/office/powerpoint/2012/main"/>
+    </p:ext>
+  </p:extLst>
 </p:presentation>
 </file>
 
@@ -198,7 +203,7 @@
           <a:p>
             <a:fld id="{7EB23FEB-A005-1141-BD8A-A9EA313772FF}" type="datetimeFigureOut">
               <a:rPr lang="es-ES_tradnl" smtClean="0"/>
-              <a:t>28/3/26</a:t>
+              <a:t>6/4/26</a:t>
             </a:fld>
             <a:endParaRPr lang="es-ES_tradnl"/>
           </a:p>
@@ -4583,38 +4588,6 @@
           </a:p>
         </p:txBody>
       </p:sp>
-      <p:pic>
-        <p:nvPicPr>
-          <p:cNvPr id="6" name="Onlinebild-Platzhalter 4">
-            <a:extLst>
-              <a:ext uri="{FF2B5EF4-FFF2-40B4-BE49-F238E27FC236}">
-                <a16:creationId xmlns:a16="http://schemas.microsoft.com/office/drawing/2014/main" id="{1B685973-FFEF-BBAB-4511-952289A389C2}"/>
-              </a:ext>
-            </a:extLst>
-          </p:cNvPr>
-          <p:cNvPicPr>
-            <a:picLocks noGrp="1" noChangeAspect="1"/>
-          </p:cNvPicPr>
-          <p:nvPr>
-            <p:ph type="clipArt" sz="quarter" idx="15"/>
-          </p:nvPr>
-        </p:nvPicPr>
-        <p:blipFill>
-          <a:blip r:embed="rId2"/>
-          <a:stretch>
-            <a:fillRect/>
-          </a:stretch>
-        </p:blipFill>
-        <p:spPr>
-          <a:xfrm>
-            <a:off x="583920" y="2151063"/>
-            <a:ext cx="5239310" cy="4008437"/>
-          </a:xfrm>
-          <a:prstGeom prst="rect">
-            <a:avLst/>
-          </a:prstGeom>
-        </p:spPr>
-      </p:pic>
       <p:sp>
         <p:nvSpPr>
           <p:cNvPr id="7" name="Inhaltsplatzhalter 7">
@@ -4808,6 +4781,38 @@
           </a:p>
         </p:txBody>
       </p:sp>
+      <p:pic>
+        <p:nvPicPr>
+          <p:cNvPr id="9" name="Onlinebild-Platzhalter 7">
+            <a:extLst>
+              <a:ext uri="{FF2B5EF4-FFF2-40B4-BE49-F238E27FC236}">
+                <a16:creationId xmlns:a16="http://schemas.microsoft.com/office/drawing/2014/main" id="{38F572DF-42F3-374D-BF6C-B44374243D35}"/>
+              </a:ext>
+            </a:extLst>
+          </p:cNvPr>
+          <p:cNvPicPr>
+            <a:picLocks noGrp="1" noChangeAspect="1"/>
+          </p:cNvPicPr>
+          <p:nvPr>
+            <p:ph type="clipArt" sz="quarter" idx="15"/>
+          </p:nvPr>
+        </p:nvPicPr>
+        <p:blipFill>
+          <a:blip r:embed="rId2"/>
+          <a:stretch>
+            <a:fillRect/>
+          </a:stretch>
+        </p:blipFill>
+        <p:spPr>
+          <a:xfrm>
+            <a:off x="639591" y="2151063"/>
+            <a:ext cx="5127968" cy="4008437"/>
+          </a:xfrm>
+          <a:prstGeom prst="rect">
+            <a:avLst/>
+          </a:prstGeom>
+        </p:spPr>
+      </p:pic>
     </p:spTree>
     <p:extLst>
       <p:ext uri="{BB962C8B-B14F-4D97-AF65-F5344CB8AC3E}">
@@ -4892,14 +4897,14 @@
             <p:ph sz="quarter" idx="14"/>
             <p:extLst>
               <p:ext uri="{D42A27DB-BD31-4B8C-83A1-F6EECF244321}">
-                <p14:modId xmlns:p14="http://schemas.microsoft.com/office/powerpoint/2010/main" val="3451762586"/>
+                <p14:modId xmlns:p14="http://schemas.microsoft.com/office/powerpoint/2010/main" val="1690616870"/>
               </p:ext>
             </p:extLst>
           </p:nvPr>
         </p:nvGraphicFramePr>
         <p:xfrm>
           <a:off x="561487" y="4616188"/>
-          <a:ext cx="10532960" cy="1590040"/>
+          <a:ext cx="10532960" cy="1299845"/>
         </p:xfrm>
         <a:graphic>
           <a:graphicData uri="http://schemas.openxmlformats.org/drawingml/2006/table">
@@ -5031,7 +5036,7 @@
                         <a:buNone/>
                       </a:pPr>
                       <a:r>
-                        <a:rPr lang="es-ES_tradnl" sz="1000" noProof="1">
+                        <a:rPr lang="es-ES_tradnl" sz="900" noProof="1">
                           <a:solidFill>
                             <a:schemeClr val="tx1"/>
                           </a:solidFill>
@@ -5041,7 +5046,7 @@
                         </a:rPr>
                         <a:t>Rank</a:t>
                       </a:r>
-                      <a:endParaRPr lang="es-ES_tradnl" sz="1000" noProof="1">
+                      <a:endParaRPr lang="es-ES_tradnl" sz="900" noProof="1">
                         <a:solidFill>
                           <a:schemeClr val="tx1"/>
                         </a:solidFill>
@@ -5083,7 +5088,7 @@
                         <a:buNone/>
                       </a:pPr>
                       <a:r>
-                        <a:rPr lang="es-ES_tradnl" sz="1000" noProof="1">
+                        <a:rPr lang="es-ES_tradnl" sz="900" noProof="1">
                           <a:solidFill>
                             <a:schemeClr val="tx1"/>
                           </a:solidFill>
@@ -5093,7 +5098,7 @@
                         </a:rPr>
                         <a:t>Sweep Val</a:t>
                       </a:r>
-                      <a:endParaRPr lang="es-ES_tradnl" sz="1000" noProof="1">
+                      <a:endParaRPr lang="es-ES_tradnl" sz="900" noProof="1">
                         <a:solidFill>
                           <a:schemeClr val="tx1"/>
                         </a:solidFill>
@@ -5135,7 +5140,7 @@
                         <a:buNone/>
                       </a:pPr>
                       <a:r>
-                        <a:rPr lang="es-ES_tradnl" sz="1000" noProof="1">
+                        <a:rPr lang="es-ES_tradnl" sz="900" noProof="1">
                           <a:solidFill>
                             <a:schemeClr val="tx1"/>
                           </a:solidFill>
@@ -5145,7 +5150,7 @@
                         </a:rPr>
                         <a:t>O1_final</a:t>
                       </a:r>
-                      <a:endParaRPr lang="es-ES_tradnl" sz="1000" noProof="1">
+                      <a:endParaRPr lang="es-ES_tradnl" sz="900" noProof="1">
                         <a:solidFill>
                           <a:schemeClr val="tx1"/>
                         </a:solidFill>
@@ -5190,7 +5195,7 @@
                         <a:buNone/>
                       </a:pPr>
                       <a:r>
-                        <a:rPr lang="es-ES_tradnl" sz="1000" noProof="1">
+                        <a:rPr lang="es-ES_tradnl" sz="900" noProof="1">
                           <a:solidFill>
                             <a:schemeClr val="tx1"/>
                           </a:solidFill>
@@ -5200,7 +5205,7 @@
                         </a:rPr>
                         <a:t>Mp [°]</a:t>
                       </a:r>
-                      <a:endParaRPr lang="es-ES_tradnl" sz="1000" noProof="1">
+                      <a:endParaRPr lang="es-ES_tradnl" sz="900" noProof="1">
                         <a:solidFill>
                           <a:schemeClr val="tx1"/>
                         </a:solidFill>
@@ -5242,7 +5247,7 @@
                         <a:buNone/>
                       </a:pPr>
                       <a:r>
-                        <a:rPr lang="es-ES_tradnl" sz="1000" noProof="1">
+                        <a:rPr lang="es-ES_tradnl" sz="900" noProof="1">
                           <a:solidFill>
                             <a:schemeClr val="tx1"/>
                           </a:solidFill>
@@ -5252,7 +5257,7 @@
                         </a:rPr>
                         <a:t>Mp[%]</a:t>
                       </a:r>
-                      <a:endParaRPr lang="es-ES_tradnl" sz="1000" noProof="1">
+                      <a:endParaRPr lang="es-ES_tradnl" sz="900" noProof="1">
                         <a:solidFill>
                           <a:schemeClr val="tx1"/>
                         </a:solidFill>
@@ -5297,7 +5302,7 @@
                         <a:buNone/>
                       </a:pPr>
                       <a:r>
-                        <a:rPr lang="es-ES_tradnl" sz="1000" noProof="1">
+                        <a:rPr lang="es-ES_tradnl" sz="900" noProof="1">
                           <a:solidFill>
                             <a:schemeClr val="tx1"/>
                           </a:solidFill>
@@ -5307,7 +5312,7 @@
                         </a:rPr>
                         <a:t>T[s]</a:t>
                       </a:r>
-                      <a:endParaRPr lang="es-ES_tradnl" sz="1000" noProof="1">
+                      <a:endParaRPr lang="es-ES_tradnl" sz="900" noProof="1">
                         <a:solidFill>
                           <a:schemeClr val="tx1"/>
                         </a:solidFill>
@@ -5352,7 +5357,7 @@
                         <a:buNone/>
                       </a:pPr>
                       <a:r>
-                        <a:rPr lang="es-ES_tradnl" sz="1000" noProof="1">
+                        <a:rPr lang="es-ES_tradnl" sz="900" noProof="1">
                           <a:solidFill>
                             <a:schemeClr val="tx1"/>
                           </a:solidFill>
@@ -5362,7 +5367,7 @@
                         </a:rPr>
                         <a:t>e_ss_abs[°]</a:t>
                       </a:r>
-                      <a:endParaRPr lang="es-ES_tradnl" sz="1000" noProof="1">
+                      <a:endParaRPr lang="es-ES_tradnl" sz="900" noProof="1">
                         <a:solidFill>
                           <a:schemeClr val="tx1"/>
                         </a:solidFill>
@@ -5404,7 +5409,7 @@
                         <a:buNone/>
                       </a:pPr>
                       <a:r>
-                        <a:rPr lang="es-ES_tradnl" sz="1000" noProof="1">
+                        <a:rPr lang="es-ES_tradnl" sz="900" noProof="1">
                           <a:solidFill>
                             <a:schemeClr val="tx1"/>
                           </a:solidFill>
@@ -5414,7 +5419,7 @@
                         </a:rPr>
                         <a:t>RMSE[°]</a:t>
                       </a:r>
-                      <a:endParaRPr lang="es-ES_tradnl" sz="1000" noProof="1">
+                      <a:endParaRPr lang="es-ES_tradnl" sz="900" noProof="1">
                         <a:solidFill>
                           <a:schemeClr val="tx1"/>
                         </a:solidFill>
@@ -5456,7 +5461,7 @@
                         <a:buNone/>
                       </a:pPr>
                       <a:r>
-                        <a:rPr lang="es-ES_tradnl" sz="1000" noProof="1">
+                        <a:rPr lang="es-ES_tradnl" sz="900" noProof="1">
                           <a:solidFill>
                             <a:schemeClr val="tx1"/>
                           </a:solidFill>
@@ -5466,7 +5471,7 @@
                         </a:rPr>
                         <a:t>ITAE[°s]</a:t>
                       </a:r>
-                      <a:endParaRPr lang="es-ES_tradnl" sz="1000" noProof="1">
+                      <a:endParaRPr lang="es-ES_tradnl" sz="900" noProof="1">
                         <a:solidFill>
                           <a:schemeClr val="tx1"/>
                         </a:solidFill>
@@ -5508,7 +5513,7 @@
                         <a:buNone/>
                       </a:pPr>
                       <a:r>
-                        <a:rPr lang="es-ES_tradnl" sz="1000" noProof="1">
+                        <a:rPr lang="es-ES_tradnl" sz="900" noProof="1">
                           <a:solidFill>
                             <a:schemeClr val="tx1"/>
                           </a:solidFill>
@@ -5518,7 +5523,7 @@
                         </a:rPr>
                         <a:t>Tr[s]</a:t>
                       </a:r>
-                      <a:endParaRPr lang="es-ES_tradnl" sz="1000" noProof="1">
+                      <a:endParaRPr lang="es-ES_tradnl" sz="900" noProof="1">
                         <a:solidFill>
                           <a:schemeClr val="tx1"/>
                         </a:solidFill>
@@ -5560,7 +5565,7 @@
                         <a:buNone/>
                       </a:pPr>
                       <a:r>
-                        <a:rPr lang="es-ES_tradnl" sz="1000" noProof="1">
+                        <a:rPr lang="es-ES_tradnl" sz="900" noProof="1">
                           <a:solidFill>
                             <a:schemeClr val="tx1"/>
                           </a:solidFill>
@@ -5570,7 +5575,7 @@
                         </a:rPr>
                         <a:t>Iosc</a:t>
                       </a:r>
-                      <a:endParaRPr lang="es-ES_tradnl" sz="1000" noProof="1">
+                      <a:endParaRPr lang="es-ES_tradnl" sz="900" noProof="1">
                         <a:solidFill>
                           <a:schemeClr val="tx1"/>
                         </a:solidFill>
@@ -5612,7 +5617,7 @@
                         <a:buNone/>
                       </a:pPr>
                       <a:r>
-                        <a:rPr lang="es-ES_tradnl" sz="1000" noProof="1">
+                        <a:rPr lang="es-ES_tradnl" sz="900" noProof="1">
                           <a:solidFill>
                             <a:schemeClr val="tx1"/>
                           </a:solidFill>
@@ -5622,7 +5627,7 @@
                         </a:rPr>
                         <a:t>U_peak</a:t>
                       </a:r>
-                      <a:endParaRPr lang="es-ES_tradnl" sz="1000" noProof="1">
+                      <a:endParaRPr lang="es-ES_tradnl" sz="900" noProof="1">
                         <a:solidFill>
                           <a:schemeClr val="tx1"/>
                         </a:solidFill>
@@ -5664,7 +5669,7 @@
                         <a:buNone/>
                       </a:pPr>
                       <a:r>
-                        <a:rPr lang="es-ES_tradnl" sz="1000" noProof="1">
+                        <a:rPr lang="es-ES_tradnl" sz="900" noProof="1">
                           <a:solidFill>
                             <a:schemeClr val="tx1"/>
                           </a:solidFill>
@@ -5674,7 +5679,7 @@
                         </a:rPr>
                         <a:t>U_rms</a:t>
                       </a:r>
-                      <a:endParaRPr lang="es-ES_tradnl" sz="1000" noProof="1">
+                      <a:endParaRPr lang="es-ES_tradnl" sz="900" noProof="1">
                         <a:solidFill>
                           <a:schemeClr val="tx1"/>
                         </a:solidFill>
@@ -5716,7 +5721,7 @@
                         <a:buNone/>
                       </a:pPr>
                       <a:r>
-                        <a:rPr lang="es-ES_tradnl" sz="1000" noProof="1">
+                        <a:rPr lang="es-ES_tradnl" sz="900" noProof="1">
                           <a:solidFill>
                             <a:schemeClr val="tx1"/>
                           </a:solidFill>
@@ -5726,7 +5731,7 @@
                         </a:rPr>
                         <a:t>U_energy</a:t>
                       </a:r>
-                      <a:endParaRPr lang="es-ES_tradnl" sz="1000" noProof="1">
+                      <a:endParaRPr lang="es-ES_tradnl" sz="900" noProof="1">
                         <a:solidFill>
                           <a:schemeClr val="tx1"/>
                         </a:solidFill>
@@ -5768,7 +5773,7 @@
                         <a:buNone/>
                       </a:pPr>
                       <a:r>
-                        <a:rPr lang="es-ES_tradnl" sz="1000" noProof="1">
+                        <a:rPr lang="es-ES_tradnl" sz="900" noProof="1">
                           <a:solidFill>
                             <a:schemeClr val="tx1"/>
                           </a:solidFill>
@@ -5778,7 +5783,7 @@
                         </a:rPr>
                         <a:t>U_abs</a:t>
                       </a:r>
-                      <a:endParaRPr lang="es-ES_tradnl" sz="1000" noProof="1">
+                      <a:endParaRPr lang="es-ES_tradnl" sz="900" noProof="1">
                         <a:solidFill>
                           <a:schemeClr val="tx1"/>
                         </a:solidFill>
@@ -5820,7 +5825,7 @@
                         <a:buNone/>
                       </a:pPr>
                       <a:r>
-                        <a:rPr lang="es-ES_tradnl" sz="1000" noProof="1">
+                        <a:rPr lang="es-ES_tradnl" sz="900" noProof="1">
                           <a:solidFill>
                             <a:schemeClr val="tx1"/>
                           </a:solidFill>
@@ -5830,7 +5835,7 @@
                         </a:rPr>
                         <a:t>U_TV</a:t>
                       </a:r>
-                      <a:endParaRPr lang="es-ES_tradnl" sz="1000" noProof="1">
+                      <a:endParaRPr lang="es-ES_tradnl" sz="900" noProof="1">
                         <a:solidFill>
                           <a:schemeClr val="tx1"/>
                         </a:solidFill>
@@ -5879,7 +5884,7 @@
                         <a:buNone/>
                       </a:pPr>
                       <a:r>
-                        <a:rPr lang="es-ES_tradnl" sz="1000" b="0" noProof="1">
+                        <a:rPr lang="es-ES_tradnl" sz="900" b="0" noProof="1">
                           <a:solidFill>
                             <a:schemeClr val="tx1"/>
                           </a:solidFill>
@@ -5889,7 +5894,7 @@
                         </a:rPr>
                         <a:t>1</a:t>
                       </a:r>
-                      <a:endParaRPr lang="es-ES_tradnl" sz="1000" b="0" noProof="1">
+                      <a:endParaRPr lang="es-ES_tradnl" sz="900" b="0" noProof="1">
                         <a:solidFill>
                           <a:schemeClr val="tx1"/>
                         </a:solidFill>
@@ -5922,7 +5927,7 @@
                         <a:buNone/>
                       </a:pPr>
                       <a:r>
-                        <a:rPr lang="es-ES_tradnl" sz="1000" dirty="0">
+                        <a:rPr lang="es-ES_tradnl" sz="900" dirty="0">
                           <a:effectLst/>
                           <a:latin typeface="Times New Roman" panose="02020603050405020304" pitchFamily="18" charset="0"/>
                           <a:ea typeface="Times New Roman" panose="02020603050405020304" pitchFamily="18" charset="0"/>
@@ -5954,7 +5959,7 @@
                         <a:buNone/>
                       </a:pPr>
                       <a:r>
-                        <a:rPr lang="es-ES_tradnl" sz="1000" dirty="0">
+                        <a:rPr lang="es-ES_tradnl" sz="900" dirty="0">
                           <a:effectLst/>
                           <a:latin typeface="Times New Roman" panose="02020603050405020304" pitchFamily="18" charset="0"/>
                           <a:ea typeface="Times New Roman" panose="02020603050405020304" pitchFamily="18" charset="0"/>
@@ -5986,7 +5991,7 @@
                         <a:buNone/>
                       </a:pPr>
                       <a:r>
-                        <a:rPr lang="es-ES_tradnl" sz="1000" dirty="0">
+                        <a:rPr lang="es-ES_tradnl" sz="900" dirty="0">
                           <a:effectLst/>
                           <a:latin typeface="Times New Roman" panose="02020603050405020304" pitchFamily="18" charset="0"/>
                           <a:ea typeface="Times New Roman" panose="02020603050405020304" pitchFamily="18" charset="0"/>
@@ -6018,7 +6023,7 @@
                         <a:buNone/>
                       </a:pPr>
                       <a:r>
-                        <a:rPr lang="es-ES_tradnl" sz="1000" dirty="0">
+                        <a:rPr lang="es-ES_tradnl" sz="900" dirty="0">
                           <a:effectLst/>
                           <a:latin typeface="Times New Roman" panose="02020603050405020304" pitchFamily="18" charset="0"/>
                           <a:ea typeface="Times New Roman" panose="02020603050405020304" pitchFamily="18" charset="0"/>
@@ -6050,7 +6055,7 @@
                         <a:buNone/>
                       </a:pPr>
                       <a:r>
-                        <a:rPr lang="es-ES_tradnl" sz="1000" dirty="0">
+                        <a:rPr lang="es-ES_tradnl" sz="900" dirty="0">
                           <a:effectLst/>
                           <a:latin typeface="Times New Roman" panose="02020603050405020304" pitchFamily="18" charset="0"/>
                           <a:ea typeface="Times New Roman" panose="02020603050405020304" pitchFamily="18" charset="0"/>
@@ -6082,7 +6087,7 @@
                         <a:buNone/>
                       </a:pPr>
                       <a:r>
-                        <a:rPr lang="es-ES_tradnl" sz="1000" dirty="0">
+                        <a:rPr lang="es-ES_tradnl" sz="900" dirty="0">
                           <a:effectLst/>
                           <a:latin typeface="Times New Roman" panose="02020603050405020304" pitchFamily="18" charset="0"/>
                           <a:ea typeface="Times New Roman" panose="02020603050405020304" pitchFamily="18" charset="0"/>
@@ -6114,7 +6119,7 @@
                         <a:buNone/>
                       </a:pPr>
                       <a:r>
-                        <a:rPr lang="es-ES_tradnl" sz="1000" dirty="0">
+                        <a:rPr lang="es-ES_tradnl" sz="900" dirty="0">
                           <a:effectLst/>
                           <a:latin typeface="Times New Roman" panose="02020603050405020304" pitchFamily="18" charset="0"/>
                           <a:ea typeface="Times New Roman" panose="02020603050405020304" pitchFamily="18" charset="0"/>
@@ -6146,7 +6151,7 @@
                         <a:buNone/>
                       </a:pPr>
                       <a:r>
-                        <a:rPr lang="es-ES_tradnl" sz="1000" dirty="0">
+                        <a:rPr lang="es-ES_tradnl" sz="900" dirty="0">
                           <a:effectLst/>
                           <a:latin typeface="Times New Roman" panose="02020603050405020304" pitchFamily="18" charset="0"/>
                           <a:ea typeface="Times New Roman" panose="02020603050405020304" pitchFamily="18" charset="0"/>
@@ -6178,7 +6183,7 @@
                         <a:buNone/>
                       </a:pPr>
                       <a:r>
-                        <a:rPr lang="es-ES_tradnl" sz="1000" dirty="0">
+                        <a:rPr lang="es-ES_tradnl" sz="900" dirty="0">
                           <a:effectLst/>
                           <a:latin typeface="Times New Roman" panose="02020603050405020304" pitchFamily="18" charset="0"/>
                           <a:ea typeface="Times New Roman" panose="02020603050405020304" pitchFamily="18" charset="0"/>
@@ -6210,7 +6215,7 @@
                         <a:buNone/>
                       </a:pPr>
                       <a:r>
-                        <a:rPr lang="es-ES_tradnl" sz="1000" dirty="0">
+                        <a:rPr lang="es-ES_tradnl" sz="900" dirty="0">
                           <a:effectLst/>
                           <a:latin typeface="Times New Roman" panose="02020603050405020304" pitchFamily="18" charset="0"/>
                           <a:ea typeface="Times New Roman" panose="02020603050405020304" pitchFamily="18" charset="0"/>
@@ -6242,17 +6247,23 @@
                         <a:buNone/>
                       </a:pPr>
                       <a:r>
-                        <a:rPr lang="es-ES_tradnl" sz="1000" dirty="0">
+                        <a:rPr lang="es-ES" sz="900">
                           <a:effectLst/>
                           <a:latin typeface="Times New Roman" panose="02020603050405020304" pitchFamily="18" charset="0"/>
                           <a:ea typeface="Times New Roman" panose="02020603050405020304" pitchFamily="18" charset="0"/>
                           <a:cs typeface="Times New Roman" panose="02020603050405020304" pitchFamily="18" charset="0"/>
                         </a:rPr>
-                        <a:t>9.92</a:t>
-                      </a:r>
-                    </a:p>
-                  </a:txBody>
-                  <a:tcPr marL="68580" marR="68580" marT="0" marB="0" anchor="ctr">
+                        <a:t>6.00</a:t>
+                      </a:r>
+                      <a:endParaRPr lang="de-DE" sz="900">
+                        <a:effectLst/>
+                        <a:latin typeface="Times New Roman" panose="02020603050405020304" pitchFamily="18" charset="0"/>
+                        <a:ea typeface="Times New Roman" panose="02020603050405020304" pitchFamily="18" charset="0"/>
+                        <a:cs typeface="Times New Roman" panose="02020603050405020304" pitchFamily="18" charset="0"/>
+                      </a:endParaRPr>
+                    </a:p>
+                  </a:txBody>
+                  <a:tcPr marL="68580" marR="68580" marT="0" marB="0">
                     <a:lnT w="12700" cap="flat" cmpd="sng" algn="ctr">
                       <a:solidFill>
                         <a:schemeClr val="tx1"/>
@@ -6274,17 +6285,23 @@
                         <a:buNone/>
                       </a:pPr>
                       <a:r>
-                        <a:rPr lang="es-ES_tradnl" sz="1000" dirty="0">
+                        <a:rPr lang="es-ES" sz="900">
                           <a:effectLst/>
                           <a:latin typeface="Times New Roman" panose="02020603050405020304" pitchFamily="18" charset="0"/>
                           <a:ea typeface="Times New Roman" panose="02020603050405020304" pitchFamily="18" charset="0"/>
                           <a:cs typeface="Times New Roman" panose="02020603050405020304" pitchFamily="18" charset="0"/>
                         </a:rPr>
-                        <a:t>2.57</a:t>
-                      </a:r>
-                    </a:p>
-                  </a:txBody>
-                  <a:tcPr marL="68580" marR="68580" marT="0" marB="0" anchor="ctr">
+                        <a:t>2.07</a:t>
+                      </a:r>
+                      <a:endParaRPr lang="de-DE" sz="900">
+                        <a:effectLst/>
+                        <a:latin typeface="Times New Roman" panose="02020603050405020304" pitchFamily="18" charset="0"/>
+                        <a:ea typeface="Times New Roman" panose="02020603050405020304" pitchFamily="18" charset="0"/>
+                        <a:cs typeface="Times New Roman" panose="02020603050405020304" pitchFamily="18" charset="0"/>
+                      </a:endParaRPr>
+                    </a:p>
+                  </a:txBody>
+                  <a:tcPr marL="68580" marR="68580" marT="0" marB="0">
                     <a:lnT w="12700" cap="flat" cmpd="sng" algn="ctr">
                       <a:solidFill>
                         <a:schemeClr val="tx1"/>
@@ -6306,17 +6323,23 @@
                         <a:buNone/>
                       </a:pPr>
                       <a:r>
-                        <a:rPr lang="es-ES_tradnl" sz="1000" dirty="0">
+                        <a:rPr lang="es-ES" sz="900">
                           <a:effectLst/>
                           <a:latin typeface="Times New Roman" panose="02020603050405020304" pitchFamily="18" charset="0"/>
                           <a:ea typeface="Times New Roman" panose="02020603050405020304" pitchFamily="18" charset="0"/>
                           <a:cs typeface="Times New Roman" panose="02020603050405020304" pitchFamily="18" charset="0"/>
                         </a:rPr>
-                        <a:t>33.25</a:t>
-                      </a:r>
-                    </a:p>
-                  </a:txBody>
-                  <a:tcPr marL="68580" marR="68580" marT="0" marB="0" anchor="ctr">
+                        <a:t>25.11</a:t>
+                      </a:r>
+                      <a:endParaRPr lang="de-DE" sz="900">
+                        <a:effectLst/>
+                        <a:latin typeface="Times New Roman" panose="02020603050405020304" pitchFamily="18" charset="0"/>
+                        <a:ea typeface="Times New Roman" panose="02020603050405020304" pitchFamily="18" charset="0"/>
+                        <a:cs typeface="Times New Roman" panose="02020603050405020304" pitchFamily="18" charset="0"/>
+                      </a:endParaRPr>
+                    </a:p>
+                  </a:txBody>
+                  <a:tcPr marL="68580" marR="68580" marT="0" marB="0">
                     <a:lnT w="12700" cap="flat" cmpd="sng" algn="ctr">
                       <a:solidFill>
                         <a:schemeClr val="tx1"/>
@@ -6338,17 +6361,23 @@
                         <a:buNone/>
                       </a:pPr>
                       <a:r>
-                        <a:rPr lang="es-ES_tradnl" sz="1000" dirty="0">
+                        <a:rPr lang="es-ES" sz="900">
                           <a:effectLst/>
                           <a:latin typeface="Times New Roman" panose="02020603050405020304" pitchFamily="18" charset="0"/>
                           <a:ea typeface="Times New Roman" panose="02020603050405020304" pitchFamily="18" charset="0"/>
                           <a:cs typeface="Times New Roman" panose="02020603050405020304" pitchFamily="18" charset="0"/>
                         </a:rPr>
-                        <a:t>5.21</a:t>
-                      </a:r>
-                    </a:p>
-                  </a:txBody>
-                  <a:tcPr marL="68580" marR="68580" marT="0" marB="0" anchor="ctr">
+                        <a:t>4.75</a:t>
+                      </a:r>
+                      <a:endParaRPr lang="de-DE" sz="900">
+                        <a:effectLst/>
+                        <a:latin typeface="Times New Roman" panose="02020603050405020304" pitchFamily="18" charset="0"/>
+                        <a:ea typeface="Times New Roman" panose="02020603050405020304" pitchFamily="18" charset="0"/>
+                        <a:cs typeface="Times New Roman" panose="02020603050405020304" pitchFamily="18" charset="0"/>
+                      </a:endParaRPr>
+                    </a:p>
+                  </a:txBody>
+                  <a:tcPr marL="68580" marR="68580" marT="0" marB="0">
                     <a:lnT w="12700" cap="flat" cmpd="sng" algn="ctr">
                       <a:solidFill>
                         <a:schemeClr val="tx1"/>
@@ -6370,17 +6399,23 @@
                         <a:buNone/>
                       </a:pPr>
                       <a:r>
-                        <a:rPr lang="es-ES_tradnl" sz="1000" dirty="0">
+                        <a:rPr lang="es-ES" sz="900">
                           <a:effectLst/>
                           <a:latin typeface="Times New Roman" panose="02020603050405020304" pitchFamily="18" charset="0"/>
                           <a:ea typeface="Times New Roman" panose="02020603050405020304" pitchFamily="18" charset="0"/>
                           <a:cs typeface="Times New Roman" panose="02020603050405020304" pitchFamily="18" charset="0"/>
                         </a:rPr>
-                        <a:t>42.86</a:t>
-                      </a:r>
-                    </a:p>
-                  </a:txBody>
-                  <a:tcPr marL="68580" marR="68580" marT="0" marB="0" anchor="ctr">
+                        <a:t>18.56</a:t>
+                      </a:r>
+                      <a:endParaRPr lang="de-DE" sz="900">
+                        <a:effectLst/>
+                        <a:latin typeface="Times New Roman" panose="02020603050405020304" pitchFamily="18" charset="0"/>
+                        <a:ea typeface="Times New Roman" panose="02020603050405020304" pitchFamily="18" charset="0"/>
+                        <a:cs typeface="Times New Roman" panose="02020603050405020304" pitchFamily="18" charset="0"/>
+                      </a:endParaRPr>
+                    </a:p>
+                  </a:txBody>
+                  <a:tcPr marL="68580" marR="68580" marT="0" marB="0">
                     <a:lnT w="12700" cap="flat" cmpd="sng" algn="ctr">
                       <a:solidFill>
                         <a:schemeClr val="tx1"/>
@@ -6409,7 +6444,7 @@
                         <a:buNone/>
                       </a:pPr>
                       <a:r>
-                        <a:rPr lang="es-ES_tradnl" sz="1000" b="0" noProof="1">
+                        <a:rPr lang="es-ES_tradnl" sz="900" b="0" noProof="1">
                           <a:solidFill>
                             <a:schemeClr val="tx1"/>
                           </a:solidFill>
@@ -6435,7 +6470,7 @@
                         <a:buNone/>
                       </a:pPr>
                       <a:r>
-                        <a:rPr lang="es-ES_tradnl" sz="1000" dirty="0">
+                        <a:rPr lang="es-ES_tradnl" sz="900" dirty="0">
                           <a:effectLst/>
                           <a:latin typeface="Times New Roman" panose="02020603050405020304" pitchFamily="18" charset="0"/>
                           <a:ea typeface="Times New Roman" panose="02020603050405020304" pitchFamily="18" charset="0"/>
@@ -6458,7 +6493,7 @@
                         <a:buNone/>
                       </a:pPr>
                       <a:r>
-                        <a:rPr lang="es-ES_tradnl" sz="1000" dirty="0">
+                        <a:rPr lang="es-ES_tradnl" sz="900" dirty="0">
                           <a:effectLst/>
                           <a:latin typeface="Times New Roman" panose="02020603050405020304" pitchFamily="18" charset="0"/>
                           <a:ea typeface="Times New Roman" panose="02020603050405020304" pitchFamily="18" charset="0"/>
@@ -6481,7 +6516,7 @@
                         <a:buNone/>
                       </a:pPr>
                       <a:r>
-                        <a:rPr lang="es-ES_tradnl" sz="1000" dirty="0">
+                        <a:rPr lang="es-ES_tradnl" sz="900" dirty="0">
                           <a:effectLst/>
                           <a:latin typeface="Times New Roman" panose="02020603050405020304" pitchFamily="18" charset="0"/>
                           <a:ea typeface="Times New Roman" panose="02020603050405020304" pitchFamily="18" charset="0"/>
@@ -6504,7 +6539,7 @@
                         <a:buNone/>
                       </a:pPr>
                       <a:r>
-                        <a:rPr lang="es-ES_tradnl" sz="1000" dirty="0">
+                        <a:rPr lang="es-ES_tradnl" sz="900" dirty="0">
                           <a:effectLst/>
                           <a:latin typeface="Times New Roman" panose="02020603050405020304" pitchFamily="18" charset="0"/>
                           <a:ea typeface="Times New Roman" panose="02020603050405020304" pitchFamily="18" charset="0"/>
@@ -6527,7 +6562,7 @@
                         <a:buNone/>
                       </a:pPr>
                       <a:r>
-                        <a:rPr lang="es-ES_tradnl" sz="1000" dirty="0">
+                        <a:rPr lang="es-ES_tradnl" sz="900" dirty="0">
                           <a:effectLst/>
                           <a:latin typeface="Times New Roman" panose="02020603050405020304" pitchFamily="18" charset="0"/>
                           <a:ea typeface="Times New Roman" panose="02020603050405020304" pitchFamily="18" charset="0"/>
@@ -6550,7 +6585,7 @@
                         <a:buNone/>
                       </a:pPr>
                       <a:r>
-                        <a:rPr lang="es-ES_tradnl" sz="1000" dirty="0">
+                        <a:rPr lang="es-ES_tradnl" sz="900" dirty="0">
                           <a:effectLst/>
                           <a:latin typeface="Times New Roman" panose="02020603050405020304" pitchFamily="18" charset="0"/>
                           <a:ea typeface="Times New Roman" panose="02020603050405020304" pitchFamily="18" charset="0"/>
@@ -6573,7 +6608,7 @@
                         <a:buNone/>
                       </a:pPr>
                       <a:r>
-                        <a:rPr lang="es-ES_tradnl" sz="1000" dirty="0">
+                        <a:rPr lang="es-ES_tradnl" sz="900" dirty="0">
                           <a:effectLst/>
                           <a:latin typeface="Times New Roman" panose="02020603050405020304" pitchFamily="18" charset="0"/>
                           <a:ea typeface="Times New Roman" panose="02020603050405020304" pitchFamily="18" charset="0"/>
@@ -6596,7 +6631,7 @@
                         <a:buNone/>
                       </a:pPr>
                       <a:r>
-                        <a:rPr lang="es-ES_tradnl" sz="1000" dirty="0">
+                        <a:rPr lang="es-ES_tradnl" sz="900" dirty="0">
                           <a:effectLst/>
                           <a:latin typeface="Times New Roman" panose="02020603050405020304" pitchFamily="18" charset="0"/>
                           <a:ea typeface="Times New Roman" panose="02020603050405020304" pitchFamily="18" charset="0"/>
@@ -6619,7 +6654,7 @@
                         <a:buNone/>
                       </a:pPr>
                       <a:r>
-                        <a:rPr lang="es-ES_tradnl" sz="1000" dirty="0">
+                        <a:rPr lang="es-ES_tradnl" sz="900" dirty="0">
                           <a:effectLst/>
                           <a:latin typeface="Times New Roman" panose="02020603050405020304" pitchFamily="18" charset="0"/>
                           <a:ea typeface="Times New Roman" panose="02020603050405020304" pitchFamily="18" charset="0"/>
@@ -6642,7 +6677,7 @@
                         <a:buNone/>
                       </a:pPr>
                       <a:r>
-                        <a:rPr lang="es-ES_tradnl" sz="1000" dirty="0">
+                        <a:rPr lang="es-ES_tradnl" sz="900" dirty="0">
                           <a:effectLst/>
                           <a:latin typeface="Times New Roman" panose="02020603050405020304" pitchFamily="18" charset="0"/>
                           <a:ea typeface="Times New Roman" panose="02020603050405020304" pitchFamily="18" charset="0"/>
@@ -6665,109 +6700,139 @@
                         <a:buNone/>
                       </a:pPr>
                       <a:r>
-                        <a:rPr lang="es-ES_tradnl" sz="1000" dirty="0">
+                        <a:rPr lang="es-ES" sz="900">
                           <a:effectLst/>
                           <a:latin typeface="Times New Roman" panose="02020603050405020304" pitchFamily="18" charset="0"/>
                           <a:ea typeface="Times New Roman" panose="02020603050405020304" pitchFamily="18" charset="0"/>
                           <a:cs typeface="Times New Roman" panose="02020603050405020304" pitchFamily="18" charset="0"/>
                         </a:rPr>
-                        <a:t>10.00</a:t>
-                      </a:r>
-                    </a:p>
-                  </a:txBody>
-                  <a:tcPr marL="68580" marR="68580" marT="0" marB="0" anchor="ctr">
-                    <a:noFill/>
-                  </a:tcPr>
-                </a:tc>
-                <a:tc>
-                  <a:txBody>
-                    <a:bodyPr/>
-                    <a:lstStyle/>
-                    <a:p>
-                      <a:pPr algn="ctr">
-                        <a:buNone/>
-                      </a:pPr>
-                      <a:r>
-                        <a:rPr lang="es-ES_tradnl" sz="1000" dirty="0">
+                        <a:t>6.00</a:t>
+                      </a:r>
+                      <a:endParaRPr lang="de-DE" sz="900">
+                        <a:effectLst/>
+                        <a:latin typeface="Times New Roman" panose="02020603050405020304" pitchFamily="18" charset="0"/>
+                        <a:ea typeface="Times New Roman" panose="02020603050405020304" pitchFamily="18" charset="0"/>
+                        <a:cs typeface="Times New Roman" panose="02020603050405020304" pitchFamily="18" charset="0"/>
+                      </a:endParaRPr>
+                    </a:p>
+                  </a:txBody>
+                  <a:tcPr marL="68580" marR="68580" marT="0" marB="0">
+                    <a:noFill/>
+                  </a:tcPr>
+                </a:tc>
+                <a:tc>
+                  <a:txBody>
+                    <a:bodyPr/>
+                    <a:lstStyle/>
+                    <a:p>
+                      <a:pPr algn="ctr">
+                        <a:buNone/>
+                      </a:pPr>
+                      <a:r>
+                        <a:rPr lang="es-ES" sz="900">
                           <a:effectLst/>
                           <a:latin typeface="Times New Roman" panose="02020603050405020304" pitchFamily="18" charset="0"/>
                           <a:ea typeface="Times New Roman" panose="02020603050405020304" pitchFamily="18" charset="0"/>
                           <a:cs typeface="Times New Roman" panose="02020603050405020304" pitchFamily="18" charset="0"/>
                         </a:rPr>
-                        <a:t>2.06</a:t>
-                      </a:r>
-                    </a:p>
-                  </a:txBody>
-                  <a:tcPr marL="68580" marR="68580" marT="0" marB="0" anchor="ctr">
-                    <a:noFill/>
-                  </a:tcPr>
-                </a:tc>
-                <a:tc>
-                  <a:txBody>
-                    <a:bodyPr/>
-                    <a:lstStyle/>
-                    <a:p>
-                      <a:pPr algn="ctr">
-                        <a:buNone/>
-                      </a:pPr>
-                      <a:r>
-                        <a:rPr lang="es-ES_tradnl" sz="1000" dirty="0">
+                        <a:t>0.65</a:t>
+                      </a:r>
+                      <a:endParaRPr lang="de-DE" sz="900">
+                        <a:effectLst/>
+                        <a:latin typeface="Times New Roman" panose="02020603050405020304" pitchFamily="18" charset="0"/>
+                        <a:ea typeface="Times New Roman" panose="02020603050405020304" pitchFamily="18" charset="0"/>
+                        <a:cs typeface="Times New Roman" panose="02020603050405020304" pitchFamily="18" charset="0"/>
+                      </a:endParaRPr>
+                    </a:p>
+                  </a:txBody>
+                  <a:tcPr marL="68580" marR="68580" marT="0" marB="0">
+                    <a:noFill/>
+                  </a:tcPr>
+                </a:tc>
+                <a:tc>
+                  <a:txBody>
+                    <a:bodyPr/>
+                    <a:lstStyle/>
+                    <a:p>
+                      <a:pPr algn="ctr">
+                        <a:buNone/>
+                      </a:pPr>
+                      <a:r>
+                        <a:rPr lang="es-ES" sz="900">
                           <a:effectLst/>
                           <a:latin typeface="Times New Roman" panose="02020603050405020304" pitchFamily="18" charset="0"/>
                           <a:ea typeface="Times New Roman" panose="02020603050405020304" pitchFamily="18" charset="0"/>
                           <a:cs typeface="Times New Roman" panose="02020603050405020304" pitchFamily="18" charset="0"/>
                         </a:rPr>
-                        <a:t>18.33</a:t>
-                      </a:r>
-                    </a:p>
-                  </a:txBody>
-                  <a:tcPr marL="68580" marR="68580" marT="0" marB="0" anchor="ctr">
-                    <a:noFill/>
-                  </a:tcPr>
-                </a:tc>
-                <a:tc>
-                  <a:txBody>
-                    <a:bodyPr/>
-                    <a:lstStyle/>
-                    <a:p>
-                      <a:pPr algn="ctr">
-                        <a:buNone/>
-                      </a:pPr>
-                      <a:r>
-                        <a:rPr lang="es-ES_tradnl" sz="1000" dirty="0">
+                        <a:t>4.14</a:t>
+                      </a:r>
+                      <a:endParaRPr lang="de-DE" sz="900">
+                        <a:effectLst/>
+                        <a:latin typeface="Times New Roman" panose="02020603050405020304" pitchFamily="18" charset="0"/>
+                        <a:ea typeface="Times New Roman" panose="02020603050405020304" pitchFamily="18" charset="0"/>
+                        <a:cs typeface="Times New Roman" panose="02020603050405020304" pitchFamily="18" charset="0"/>
+                      </a:endParaRPr>
+                    </a:p>
+                  </a:txBody>
+                  <a:tcPr marL="68580" marR="68580" marT="0" marB="0">
+                    <a:noFill/>
+                  </a:tcPr>
+                </a:tc>
+                <a:tc>
+                  <a:txBody>
+                    <a:bodyPr/>
+                    <a:lstStyle/>
+                    <a:p>
+                      <a:pPr algn="ctr">
+                        <a:buNone/>
+                      </a:pPr>
+                      <a:r>
+                        <a:rPr lang="es-ES" sz="900">
                           <a:effectLst/>
                           <a:latin typeface="Times New Roman" panose="02020603050405020304" pitchFamily="18" charset="0"/>
                           <a:ea typeface="Times New Roman" panose="02020603050405020304" pitchFamily="18" charset="0"/>
                           <a:cs typeface="Times New Roman" panose="02020603050405020304" pitchFamily="18" charset="0"/>
                         </a:rPr>
-                        <a:t>3.39</a:t>
-                      </a:r>
-                    </a:p>
-                  </a:txBody>
-                  <a:tcPr marL="68580" marR="68580" marT="0" marB="0" anchor="ctr">
-                    <a:noFill/>
-                  </a:tcPr>
-                </a:tc>
-                <a:tc>
-                  <a:txBody>
-                    <a:bodyPr/>
-                    <a:lstStyle/>
-                    <a:p>
-                      <a:pPr algn="ctr">
-                        <a:buNone/>
-                      </a:pPr>
-                      <a:r>
-                        <a:rPr lang="es-ES_tradnl" sz="1000" dirty="0">
+                        <a:t>2.00</a:t>
+                      </a:r>
+                      <a:endParaRPr lang="de-DE" sz="900">
+                        <a:effectLst/>
+                        <a:latin typeface="Times New Roman" panose="02020603050405020304" pitchFamily="18" charset="0"/>
+                        <a:ea typeface="Times New Roman" panose="02020603050405020304" pitchFamily="18" charset="0"/>
+                        <a:cs typeface="Times New Roman" panose="02020603050405020304" pitchFamily="18" charset="0"/>
+                      </a:endParaRPr>
+                    </a:p>
+                  </a:txBody>
+                  <a:tcPr marL="68580" marR="68580" marT="0" marB="0">
+                    <a:noFill/>
+                  </a:tcPr>
+                </a:tc>
+                <a:tc>
+                  <a:txBody>
+                    <a:bodyPr/>
+                    <a:lstStyle/>
+                    <a:p>
+                      <a:pPr algn="ctr">
+                        <a:buNone/>
+                      </a:pPr>
+                      <a:r>
+                        <a:rPr lang="es-ES" sz="900">
                           <a:effectLst/>
                           <a:latin typeface="Times New Roman" panose="02020603050405020304" pitchFamily="18" charset="0"/>
                           <a:ea typeface="Times New Roman" panose="02020603050405020304" pitchFamily="18" charset="0"/>
                           <a:cs typeface="Times New Roman" panose="02020603050405020304" pitchFamily="18" charset="0"/>
                         </a:rPr>
-                        <a:t>24.03</a:t>
-                      </a:r>
-                    </a:p>
-                  </a:txBody>
-                  <a:tcPr marL="68580" marR="68580" marT="0" marB="0" anchor="ctr">
+                        <a:t>37.51</a:t>
+                      </a:r>
+                      <a:endParaRPr lang="de-DE" sz="900">
+                        <a:effectLst/>
+                        <a:latin typeface="Times New Roman" panose="02020603050405020304" pitchFamily="18" charset="0"/>
+                        <a:ea typeface="Times New Roman" panose="02020603050405020304" pitchFamily="18" charset="0"/>
+                        <a:cs typeface="Times New Roman" panose="02020603050405020304" pitchFamily="18" charset="0"/>
+                      </a:endParaRPr>
+                    </a:p>
+                  </a:txBody>
+                  <a:tcPr marL="68580" marR="68580" marT="0" marB="0">
                     <a:noFill/>
                   </a:tcPr>
                 </a:tc>
@@ -6787,7 +6852,7 @@
                         <a:buNone/>
                       </a:pPr>
                       <a:r>
-                        <a:rPr lang="es-ES_tradnl" sz="1000" b="0" noProof="1">
+                        <a:rPr lang="es-ES_tradnl" sz="900" b="0" noProof="1">
                           <a:solidFill>
                             <a:schemeClr val="tx1"/>
                           </a:solidFill>
@@ -6813,7 +6878,7 @@
                         <a:buNone/>
                       </a:pPr>
                       <a:r>
-                        <a:rPr lang="es-ES_tradnl" sz="1000" dirty="0">
+                        <a:rPr lang="es-ES_tradnl" sz="900" dirty="0">
                           <a:effectLst/>
                           <a:latin typeface="Times New Roman" panose="02020603050405020304" pitchFamily="18" charset="0"/>
                           <a:ea typeface="Times New Roman" panose="02020603050405020304" pitchFamily="18" charset="0"/>
@@ -6836,7 +6901,7 @@
                         <a:buNone/>
                       </a:pPr>
                       <a:r>
-                        <a:rPr lang="es-ES_tradnl" sz="1000" dirty="0">
+                        <a:rPr lang="es-ES_tradnl" sz="900" dirty="0">
                           <a:effectLst/>
                           <a:latin typeface="Times New Roman" panose="02020603050405020304" pitchFamily="18" charset="0"/>
                           <a:ea typeface="Times New Roman" panose="02020603050405020304" pitchFamily="18" charset="0"/>
@@ -6859,7 +6924,7 @@
                         <a:buNone/>
                       </a:pPr>
                       <a:r>
-                        <a:rPr lang="es-ES_tradnl" sz="1000" dirty="0">
+                        <a:rPr lang="es-ES_tradnl" sz="900" dirty="0">
                           <a:effectLst/>
                           <a:latin typeface="Times New Roman" panose="02020603050405020304" pitchFamily="18" charset="0"/>
                           <a:ea typeface="Times New Roman" panose="02020603050405020304" pitchFamily="18" charset="0"/>
@@ -6882,7 +6947,7 @@
                         <a:buNone/>
                       </a:pPr>
                       <a:r>
-                        <a:rPr lang="es-ES_tradnl" sz="1000" dirty="0">
+                        <a:rPr lang="es-ES_tradnl" sz="900" dirty="0">
                           <a:effectLst/>
                           <a:latin typeface="Times New Roman" panose="02020603050405020304" pitchFamily="18" charset="0"/>
                           <a:ea typeface="Times New Roman" panose="02020603050405020304" pitchFamily="18" charset="0"/>
@@ -6905,7 +6970,7 @@
                         <a:buNone/>
                       </a:pPr>
                       <a:r>
-                        <a:rPr lang="es-ES_tradnl" sz="1000" dirty="0">
+                        <a:rPr lang="es-ES_tradnl" sz="900" dirty="0">
                           <a:effectLst/>
                           <a:latin typeface="Times New Roman" panose="02020603050405020304" pitchFamily="18" charset="0"/>
                           <a:ea typeface="Times New Roman" panose="02020603050405020304" pitchFamily="18" charset="0"/>
@@ -6928,7 +6993,7 @@
                         <a:buNone/>
                       </a:pPr>
                       <a:r>
-                        <a:rPr lang="es-ES_tradnl" sz="1000" dirty="0">
+                        <a:rPr lang="es-ES_tradnl" sz="900" dirty="0">
                           <a:effectLst/>
                           <a:latin typeface="Times New Roman" panose="02020603050405020304" pitchFamily="18" charset="0"/>
                           <a:ea typeface="Times New Roman" panose="02020603050405020304" pitchFamily="18" charset="0"/>
@@ -6951,7 +7016,7 @@
                         <a:buNone/>
                       </a:pPr>
                       <a:r>
-                        <a:rPr lang="es-ES_tradnl" sz="1000" dirty="0">
+                        <a:rPr lang="es-ES_tradnl" sz="900" dirty="0">
                           <a:effectLst/>
                           <a:latin typeface="Times New Roman" panose="02020603050405020304" pitchFamily="18" charset="0"/>
                           <a:ea typeface="Times New Roman" panose="02020603050405020304" pitchFamily="18" charset="0"/>
@@ -6974,7 +7039,7 @@
                         <a:buNone/>
                       </a:pPr>
                       <a:r>
-                        <a:rPr lang="es-ES_tradnl" sz="1000" dirty="0">
+                        <a:rPr lang="es-ES_tradnl" sz="900" dirty="0">
                           <a:effectLst/>
                           <a:latin typeface="Times New Roman" panose="02020603050405020304" pitchFamily="18" charset="0"/>
                           <a:ea typeface="Times New Roman" panose="02020603050405020304" pitchFamily="18" charset="0"/>
@@ -6997,7 +7062,7 @@
                         <a:buNone/>
                       </a:pPr>
                       <a:r>
-                        <a:rPr lang="es-ES_tradnl" sz="1000" dirty="0">
+                        <a:rPr lang="es-ES_tradnl" sz="900" dirty="0">
                           <a:effectLst/>
                           <a:latin typeface="Times New Roman" panose="02020603050405020304" pitchFamily="18" charset="0"/>
                           <a:ea typeface="Times New Roman" panose="02020603050405020304" pitchFamily="18" charset="0"/>
@@ -7020,7 +7085,7 @@
                         <a:buNone/>
                       </a:pPr>
                       <a:r>
-                        <a:rPr lang="es-ES_tradnl" sz="1000" dirty="0">
+                        <a:rPr lang="es-ES_tradnl" sz="900" dirty="0">
                           <a:effectLst/>
                           <a:latin typeface="Times New Roman" panose="02020603050405020304" pitchFamily="18" charset="0"/>
                           <a:ea typeface="Times New Roman" panose="02020603050405020304" pitchFamily="18" charset="0"/>
@@ -7043,99 +7108,123 @@
                         <a:buNone/>
                       </a:pPr>
                       <a:r>
-                        <a:rPr lang="es-ES_tradnl" sz="1000" dirty="0">
+                        <a:rPr lang="es-ES" sz="900">
                           <a:effectLst/>
                           <a:latin typeface="Times New Roman" panose="02020603050405020304" pitchFamily="18" charset="0"/>
                           <a:ea typeface="Times New Roman" panose="02020603050405020304" pitchFamily="18" charset="0"/>
                           <a:cs typeface="Times New Roman" panose="02020603050405020304" pitchFamily="18" charset="0"/>
                         </a:rPr>
-                        <a:t>5.44</a:t>
-                      </a:r>
-                    </a:p>
-                  </a:txBody>
-                  <a:tcPr marL="68580" marR="68580" marT="0" marB="0" anchor="ctr">
-                    <a:noFill/>
-                  </a:tcPr>
-                </a:tc>
-                <a:tc>
-                  <a:txBody>
-                    <a:bodyPr/>
-                    <a:lstStyle/>
-                    <a:p>
-                      <a:pPr algn="ctr">
-                        <a:buNone/>
-                      </a:pPr>
-                      <a:r>
-                        <a:rPr lang="es-ES_tradnl" sz="1000" dirty="0">
+                        <a:t>3.30</a:t>
+                      </a:r>
+                      <a:endParaRPr lang="de-DE" sz="900">
+                        <a:effectLst/>
+                        <a:latin typeface="Times New Roman" panose="02020603050405020304" pitchFamily="18" charset="0"/>
+                        <a:ea typeface="Times New Roman" panose="02020603050405020304" pitchFamily="18" charset="0"/>
+                        <a:cs typeface="Times New Roman" panose="02020603050405020304" pitchFamily="18" charset="0"/>
+                      </a:endParaRPr>
+                    </a:p>
+                  </a:txBody>
+                  <a:tcPr marL="68580" marR="68580" marT="0" marB="0">
+                    <a:noFill/>
+                  </a:tcPr>
+                </a:tc>
+                <a:tc>
+                  <a:txBody>
+                    <a:bodyPr/>
+                    <a:lstStyle/>
+                    <a:p>
+                      <a:pPr algn="ctr">
+                        <a:buNone/>
+                      </a:pPr>
+                      <a:r>
+                        <a:rPr lang="es-ES" sz="900">
                           <a:effectLst/>
                           <a:latin typeface="Times New Roman" panose="02020603050405020304" pitchFamily="18" charset="0"/>
                           <a:ea typeface="Times New Roman" panose="02020603050405020304" pitchFamily="18" charset="0"/>
                           <a:cs typeface="Times New Roman" panose="02020603050405020304" pitchFamily="18" charset="0"/>
                         </a:rPr>
-                        <a:t>167.70</a:t>
-                      </a:r>
-                    </a:p>
-                  </a:txBody>
-                  <a:tcPr marL="68580" marR="68580" marT="0" marB="0" anchor="ctr">
-                    <a:noFill/>
-                  </a:tcPr>
-                </a:tc>
-                <a:tc>
-                  <a:txBody>
-                    <a:bodyPr/>
-                    <a:lstStyle/>
-                    <a:p>
-                      <a:pPr algn="ctr">
-                        <a:buNone/>
-                      </a:pPr>
-                      <a:r>
-                        <a:rPr lang="es-ES_tradnl" sz="1000" dirty="0">
+                        <a:t>65.22</a:t>
+                      </a:r>
+                      <a:endParaRPr lang="de-DE" sz="900">
+                        <a:effectLst/>
+                        <a:latin typeface="Times New Roman" panose="02020603050405020304" pitchFamily="18" charset="0"/>
+                        <a:ea typeface="Times New Roman" panose="02020603050405020304" pitchFamily="18" charset="0"/>
+                        <a:cs typeface="Times New Roman" panose="02020603050405020304" pitchFamily="18" charset="0"/>
+                      </a:endParaRPr>
+                    </a:p>
+                  </a:txBody>
+                  <a:tcPr marL="68580" marR="68580" marT="0" marB="0">
+                    <a:noFill/>
+                  </a:tcPr>
+                </a:tc>
+                <a:tc>
+                  <a:txBody>
+                    <a:bodyPr/>
+                    <a:lstStyle/>
+                    <a:p>
+                      <a:pPr algn="ctr">
+                        <a:buNone/>
+                      </a:pPr>
+                      <a:r>
+                        <a:rPr lang="es-ES" sz="900">
                           <a:effectLst/>
                           <a:latin typeface="Times New Roman" panose="02020603050405020304" pitchFamily="18" charset="0"/>
                           <a:ea typeface="Times New Roman" panose="02020603050405020304" pitchFamily="18" charset="0"/>
                           <a:cs typeface="Times New Roman" panose="02020603050405020304" pitchFamily="18" charset="0"/>
                         </a:rPr>
-                        <a:t>18.34</a:t>
-                      </a:r>
-                    </a:p>
-                  </a:txBody>
-                  <a:tcPr marL="68580" marR="68580" marT="0" marB="0" anchor="ctr">
-                    <a:noFill/>
-                  </a:tcPr>
-                </a:tc>
-                <a:tc>
-                  <a:txBody>
-                    <a:bodyPr/>
-                    <a:lstStyle/>
-                    <a:p>
-                      <a:pPr algn="ctr">
-                        <a:buNone/>
-                      </a:pPr>
-                      <a:r>
-                        <a:rPr lang="es-ES_tradnl" sz="1000" dirty="0">
+                        <a:t>12.62</a:t>
+                      </a:r>
+                      <a:endParaRPr lang="de-DE" sz="900">
+                        <a:effectLst/>
+                        <a:latin typeface="Times New Roman" panose="02020603050405020304" pitchFamily="18" charset="0"/>
+                        <a:ea typeface="Times New Roman" panose="02020603050405020304" pitchFamily="18" charset="0"/>
+                        <a:cs typeface="Times New Roman" panose="02020603050405020304" pitchFamily="18" charset="0"/>
+                      </a:endParaRPr>
+                    </a:p>
+                  </a:txBody>
+                  <a:tcPr marL="68580" marR="68580" marT="0" marB="0">
+                    <a:noFill/>
+                  </a:tcPr>
+                </a:tc>
+                <a:tc>
+                  <a:txBody>
+                    <a:bodyPr/>
+                    <a:lstStyle/>
+                    <a:p>
+                      <a:pPr algn="ctr">
+                        <a:buNone/>
+                      </a:pPr>
+                      <a:r>
+                        <a:rPr lang="es-ES" sz="900">
                           <a:effectLst/>
                           <a:latin typeface="Times New Roman" panose="02020603050405020304" pitchFamily="18" charset="0"/>
                           <a:ea typeface="Times New Roman" panose="02020603050405020304" pitchFamily="18" charset="0"/>
                           <a:cs typeface="Times New Roman" panose="02020603050405020304" pitchFamily="18" charset="0"/>
                         </a:rPr>
-                        <a:t>64.84</a:t>
-                      </a:r>
-                    </a:p>
-                  </a:txBody>
-                  <a:tcPr marL="68580" marR="68580" marT="0" marB="0" anchor="ctr">
-                    <a:noFill/>
-                  </a:tcPr>
-                </a:tc>
-                <a:tc>
-                  <a:txBody>
-                    <a:bodyPr/>
-                    <a:lstStyle/>
-                    <a:p>
-                      <a:pPr algn="ctr">
-                        <a:buNone/>
-                      </a:pPr>
-                      <a:r>
-                        <a:rPr lang="es-ES_tradnl" sz="1000" dirty="0">
+                        <a:t>36.89</a:t>
+                      </a:r>
+                      <a:endParaRPr lang="de-DE" sz="900">
+                        <a:effectLst/>
+                        <a:latin typeface="Times New Roman" panose="02020603050405020304" pitchFamily="18" charset="0"/>
+                        <a:ea typeface="Times New Roman" panose="02020603050405020304" pitchFamily="18" charset="0"/>
+                        <a:cs typeface="Times New Roman" panose="02020603050405020304" pitchFamily="18" charset="0"/>
+                      </a:endParaRPr>
+                    </a:p>
+                  </a:txBody>
+                  <a:tcPr marL="68580" marR="68580" marT="0" marB="0">
+                    <a:noFill/>
+                  </a:tcPr>
+                </a:tc>
+                <a:tc>
+                  <a:txBody>
+                    <a:bodyPr/>
+                    <a:lstStyle/>
+                    <a:p>
+                      <a:pPr algn="ctr">
+                        <a:buNone/>
+                      </a:pPr>
+                      <a:r>
+                        <a:rPr lang="es-ES" sz="900" dirty="0">
                           <a:effectLst/>
                           <a:latin typeface="Times New Roman" panose="02020603050405020304" pitchFamily="18" charset="0"/>
                           <a:ea typeface="Times New Roman" panose="02020603050405020304" pitchFamily="18" charset="0"/>
@@ -7143,9 +7232,15 @@
                         </a:rPr>
                         <a:t>NaN</a:t>
                       </a:r>
-                    </a:p>
-                  </a:txBody>
-                  <a:tcPr marL="68580" marR="68580" marT="0" marB="0" anchor="ctr">
+                      <a:endParaRPr lang="de-DE" sz="900" dirty="0">
+                        <a:effectLst/>
+                        <a:latin typeface="Times New Roman" panose="02020603050405020304" pitchFamily="18" charset="0"/>
+                        <a:ea typeface="Times New Roman" panose="02020603050405020304" pitchFamily="18" charset="0"/>
+                        <a:cs typeface="Times New Roman" panose="02020603050405020304" pitchFamily="18" charset="0"/>
+                      </a:endParaRPr>
+                    </a:p>
+                  </a:txBody>
+                  <a:tcPr marL="68580" marR="68580" marT="0" marB="0">
                     <a:noFill/>
                   </a:tcPr>
                 </a:tc>
@@ -7164,7 +7259,7 @@
                       <a:pPr algn="ctr">
                         <a:buNone/>
                       </a:pPr>
-                      <a:endParaRPr lang="es-ES_tradnl" sz="1000" b="0" noProof="1">
+                      <a:endParaRPr lang="es-ES_tradnl" sz="900" b="0" noProof="1">
                         <a:solidFill>
                           <a:schemeClr val="tx1"/>
                         </a:solidFill>
@@ -7187,287 +7282,287 @@
                       <a:pPr algn="ctr">
                         <a:buNone/>
                       </a:pPr>
-                      <a:endParaRPr lang="es-ES_tradnl" sz="1000" dirty="0">
-                        <a:effectLst/>
-                        <a:latin typeface="Times New Roman" panose="02020603050405020304" pitchFamily="18" charset="0"/>
-                        <a:ea typeface="Times New Roman" panose="02020603050405020304" pitchFamily="18" charset="0"/>
-                        <a:cs typeface="Times New Roman" panose="02020603050405020304" pitchFamily="18" charset="0"/>
-                      </a:endParaRPr>
-                    </a:p>
-                  </a:txBody>
-                  <a:tcPr marL="68580" marR="68580" marT="0" marB="0" anchor="ctr">
-                    <a:noFill/>
-                  </a:tcPr>
-                </a:tc>
-                <a:tc>
-                  <a:txBody>
-                    <a:bodyPr/>
-                    <a:lstStyle/>
-                    <a:p>
-                      <a:pPr algn="ctr">
-                        <a:buNone/>
-                      </a:pPr>
-                      <a:endParaRPr lang="es-ES_tradnl" sz="1000" dirty="0">
-                        <a:effectLst/>
-                        <a:latin typeface="Times New Roman" panose="02020603050405020304" pitchFamily="18" charset="0"/>
-                        <a:ea typeface="Times New Roman" panose="02020603050405020304" pitchFamily="18" charset="0"/>
-                        <a:cs typeface="Times New Roman" panose="02020603050405020304" pitchFamily="18" charset="0"/>
-                      </a:endParaRPr>
-                    </a:p>
-                  </a:txBody>
-                  <a:tcPr marL="68580" marR="68580" marT="0" marB="0" anchor="ctr">
-                    <a:noFill/>
-                  </a:tcPr>
-                </a:tc>
-                <a:tc>
-                  <a:txBody>
-                    <a:bodyPr/>
-                    <a:lstStyle/>
-                    <a:p>
-                      <a:pPr algn="ctr">
-                        <a:buNone/>
-                      </a:pPr>
-                      <a:endParaRPr lang="es-ES_tradnl" sz="1000" dirty="0">
-                        <a:effectLst/>
-                        <a:latin typeface="Times New Roman" panose="02020603050405020304" pitchFamily="18" charset="0"/>
-                        <a:ea typeface="Times New Roman" panose="02020603050405020304" pitchFamily="18" charset="0"/>
-                        <a:cs typeface="Times New Roman" panose="02020603050405020304" pitchFamily="18" charset="0"/>
-                      </a:endParaRPr>
-                    </a:p>
-                  </a:txBody>
-                  <a:tcPr marL="68580" marR="68580" marT="0" marB="0" anchor="ctr">
-                    <a:noFill/>
-                  </a:tcPr>
-                </a:tc>
-                <a:tc>
-                  <a:txBody>
-                    <a:bodyPr/>
-                    <a:lstStyle/>
-                    <a:p>
-                      <a:pPr algn="ctr">
-                        <a:buNone/>
-                      </a:pPr>
-                      <a:endParaRPr lang="es-ES_tradnl" sz="1000" dirty="0">
-                        <a:effectLst/>
-                        <a:latin typeface="Times New Roman" panose="02020603050405020304" pitchFamily="18" charset="0"/>
-                        <a:ea typeface="Times New Roman" panose="02020603050405020304" pitchFamily="18" charset="0"/>
-                        <a:cs typeface="Times New Roman" panose="02020603050405020304" pitchFamily="18" charset="0"/>
-                      </a:endParaRPr>
-                    </a:p>
-                  </a:txBody>
-                  <a:tcPr marL="68580" marR="68580" marT="0" marB="0" anchor="ctr">
-                    <a:noFill/>
-                  </a:tcPr>
-                </a:tc>
-                <a:tc>
-                  <a:txBody>
-                    <a:bodyPr/>
-                    <a:lstStyle/>
-                    <a:p>
-                      <a:pPr algn="ctr">
-                        <a:buNone/>
-                      </a:pPr>
-                      <a:endParaRPr lang="es-ES_tradnl" sz="1000" dirty="0">
-                        <a:effectLst/>
-                        <a:latin typeface="Times New Roman" panose="02020603050405020304" pitchFamily="18" charset="0"/>
-                        <a:ea typeface="Times New Roman" panose="02020603050405020304" pitchFamily="18" charset="0"/>
-                        <a:cs typeface="Times New Roman" panose="02020603050405020304" pitchFamily="18" charset="0"/>
-                      </a:endParaRPr>
-                    </a:p>
-                  </a:txBody>
-                  <a:tcPr marL="68580" marR="68580" marT="0" marB="0" anchor="ctr">
-                    <a:noFill/>
-                  </a:tcPr>
-                </a:tc>
-                <a:tc>
-                  <a:txBody>
-                    <a:bodyPr/>
-                    <a:lstStyle/>
-                    <a:p>
-                      <a:pPr algn="ctr">
-                        <a:buNone/>
-                      </a:pPr>
-                      <a:endParaRPr lang="es-ES_tradnl" sz="1000" dirty="0">
-                        <a:effectLst/>
-                        <a:latin typeface="Times New Roman" panose="02020603050405020304" pitchFamily="18" charset="0"/>
-                        <a:ea typeface="Times New Roman" panose="02020603050405020304" pitchFamily="18" charset="0"/>
-                        <a:cs typeface="Times New Roman" panose="02020603050405020304" pitchFamily="18" charset="0"/>
-                      </a:endParaRPr>
-                    </a:p>
-                  </a:txBody>
-                  <a:tcPr marL="68580" marR="68580" marT="0" marB="0" anchor="ctr">
-                    <a:noFill/>
-                  </a:tcPr>
-                </a:tc>
-                <a:tc>
-                  <a:txBody>
-                    <a:bodyPr/>
-                    <a:lstStyle/>
-                    <a:p>
-                      <a:pPr algn="ctr">
-                        <a:buNone/>
-                      </a:pPr>
-                      <a:endParaRPr lang="es-ES_tradnl" sz="1000" dirty="0">
-                        <a:effectLst/>
-                        <a:latin typeface="Times New Roman" panose="02020603050405020304" pitchFamily="18" charset="0"/>
-                        <a:ea typeface="Times New Roman" panose="02020603050405020304" pitchFamily="18" charset="0"/>
-                        <a:cs typeface="Times New Roman" panose="02020603050405020304" pitchFamily="18" charset="0"/>
-                      </a:endParaRPr>
-                    </a:p>
-                  </a:txBody>
-                  <a:tcPr marL="68580" marR="68580" marT="0" marB="0" anchor="ctr">
-                    <a:noFill/>
-                  </a:tcPr>
-                </a:tc>
-                <a:tc>
-                  <a:txBody>
-                    <a:bodyPr/>
-                    <a:lstStyle/>
-                    <a:p>
-                      <a:pPr algn="ctr">
-                        <a:buNone/>
-                      </a:pPr>
-                      <a:endParaRPr lang="es-ES_tradnl" sz="1000" dirty="0">
-                        <a:effectLst/>
-                        <a:latin typeface="Times New Roman" panose="02020603050405020304" pitchFamily="18" charset="0"/>
-                        <a:ea typeface="Times New Roman" panose="02020603050405020304" pitchFamily="18" charset="0"/>
-                        <a:cs typeface="Times New Roman" panose="02020603050405020304" pitchFamily="18" charset="0"/>
-                      </a:endParaRPr>
-                    </a:p>
-                  </a:txBody>
-                  <a:tcPr marL="68580" marR="68580" marT="0" marB="0" anchor="ctr">
-                    <a:noFill/>
-                  </a:tcPr>
-                </a:tc>
-                <a:tc>
-                  <a:txBody>
-                    <a:bodyPr/>
-                    <a:lstStyle/>
-                    <a:p>
-                      <a:pPr algn="ctr">
-                        <a:buNone/>
-                      </a:pPr>
-                      <a:endParaRPr lang="es-ES_tradnl" sz="1000" dirty="0">
-                        <a:effectLst/>
-                        <a:latin typeface="Times New Roman" panose="02020603050405020304" pitchFamily="18" charset="0"/>
-                        <a:ea typeface="Times New Roman" panose="02020603050405020304" pitchFamily="18" charset="0"/>
-                        <a:cs typeface="Times New Roman" panose="02020603050405020304" pitchFamily="18" charset="0"/>
-                      </a:endParaRPr>
-                    </a:p>
-                  </a:txBody>
-                  <a:tcPr marL="68580" marR="68580" marT="0" marB="0" anchor="ctr">
-                    <a:noFill/>
-                  </a:tcPr>
-                </a:tc>
-                <a:tc>
-                  <a:txBody>
-                    <a:bodyPr/>
-                    <a:lstStyle/>
-                    <a:p>
-                      <a:pPr algn="ctr">
-                        <a:buNone/>
-                      </a:pPr>
-                      <a:endParaRPr lang="es-ES_tradnl" sz="1000" dirty="0">
-                        <a:effectLst/>
-                        <a:latin typeface="Times New Roman" panose="02020603050405020304" pitchFamily="18" charset="0"/>
-                        <a:ea typeface="Times New Roman" panose="02020603050405020304" pitchFamily="18" charset="0"/>
-                        <a:cs typeface="Times New Roman" panose="02020603050405020304" pitchFamily="18" charset="0"/>
-                      </a:endParaRPr>
-                    </a:p>
-                  </a:txBody>
-                  <a:tcPr marL="68580" marR="68580" marT="0" marB="0" anchor="ctr">
-                    <a:noFill/>
-                  </a:tcPr>
-                </a:tc>
-                <a:tc>
-                  <a:txBody>
-                    <a:bodyPr/>
-                    <a:lstStyle/>
-                    <a:p>
-                      <a:pPr algn="ctr">
-                        <a:buNone/>
-                      </a:pPr>
-                      <a:endParaRPr lang="es-ES_tradnl" sz="1000" dirty="0">
-                        <a:effectLst/>
-                        <a:latin typeface="Times New Roman" panose="02020603050405020304" pitchFamily="18" charset="0"/>
-                        <a:ea typeface="Times New Roman" panose="02020603050405020304" pitchFamily="18" charset="0"/>
-                        <a:cs typeface="Times New Roman" panose="02020603050405020304" pitchFamily="18" charset="0"/>
-                      </a:endParaRPr>
-                    </a:p>
-                  </a:txBody>
-                  <a:tcPr marL="68580" marR="68580" marT="0" marB="0" anchor="ctr">
-                    <a:noFill/>
-                  </a:tcPr>
-                </a:tc>
-                <a:tc>
-                  <a:txBody>
-                    <a:bodyPr/>
-                    <a:lstStyle/>
-                    <a:p>
-                      <a:pPr algn="ctr">
-                        <a:buNone/>
-                      </a:pPr>
-                      <a:endParaRPr lang="es-ES_tradnl" sz="1000" dirty="0">
-                        <a:effectLst/>
-                        <a:latin typeface="Times New Roman" panose="02020603050405020304" pitchFamily="18" charset="0"/>
-                        <a:ea typeface="Times New Roman" panose="02020603050405020304" pitchFamily="18" charset="0"/>
-                        <a:cs typeface="Times New Roman" panose="02020603050405020304" pitchFamily="18" charset="0"/>
-                      </a:endParaRPr>
-                    </a:p>
-                  </a:txBody>
-                  <a:tcPr marL="68580" marR="68580" marT="0" marB="0" anchor="ctr">
-                    <a:noFill/>
-                  </a:tcPr>
-                </a:tc>
-                <a:tc>
-                  <a:txBody>
-                    <a:bodyPr/>
-                    <a:lstStyle/>
-                    <a:p>
-                      <a:pPr algn="ctr">
-                        <a:buNone/>
-                      </a:pPr>
-                      <a:endParaRPr lang="es-ES_tradnl" sz="1000" dirty="0">
-                        <a:effectLst/>
-                        <a:latin typeface="Times New Roman" panose="02020603050405020304" pitchFamily="18" charset="0"/>
-                        <a:ea typeface="Times New Roman" panose="02020603050405020304" pitchFamily="18" charset="0"/>
-                        <a:cs typeface="Times New Roman" panose="02020603050405020304" pitchFamily="18" charset="0"/>
-                      </a:endParaRPr>
-                    </a:p>
-                  </a:txBody>
-                  <a:tcPr marL="68580" marR="68580" marT="0" marB="0" anchor="ctr">
-                    <a:noFill/>
-                  </a:tcPr>
-                </a:tc>
-                <a:tc>
-                  <a:txBody>
-                    <a:bodyPr/>
-                    <a:lstStyle/>
-                    <a:p>
-                      <a:pPr algn="ctr">
-                        <a:buNone/>
-                      </a:pPr>
-                      <a:endParaRPr lang="es-ES_tradnl" sz="1000" dirty="0">
-                        <a:effectLst/>
-                        <a:latin typeface="Times New Roman" panose="02020603050405020304" pitchFamily="18" charset="0"/>
-                        <a:ea typeface="Times New Roman" panose="02020603050405020304" pitchFamily="18" charset="0"/>
-                        <a:cs typeface="Times New Roman" panose="02020603050405020304" pitchFamily="18" charset="0"/>
-                      </a:endParaRPr>
-                    </a:p>
-                  </a:txBody>
-                  <a:tcPr marL="68580" marR="68580" marT="0" marB="0" anchor="ctr">
-                    <a:noFill/>
-                  </a:tcPr>
-                </a:tc>
-                <a:tc>
-                  <a:txBody>
-                    <a:bodyPr/>
-                    <a:lstStyle/>
-                    <a:p>
-                      <a:pPr algn="ctr">
-                        <a:buNone/>
-                      </a:pPr>
-                      <a:endParaRPr lang="es-ES_tradnl" sz="1000" dirty="0">
+                      <a:endParaRPr lang="es-ES_tradnl" sz="900" dirty="0">
+                        <a:effectLst/>
+                        <a:latin typeface="Times New Roman" panose="02020603050405020304" pitchFamily="18" charset="0"/>
+                        <a:ea typeface="Times New Roman" panose="02020603050405020304" pitchFamily="18" charset="0"/>
+                        <a:cs typeface="Times New Roman" panose="02020603050405020304" pitchFamily="18" charset="0"/>
+                      </a:endParaRPr>
+                    </a:p>
+                  </a:txBody>
+                  <a:tcPr marL="68580" marR="68580" marT="0" marB="0" anchor="ctr">
+                    <a:noFill/>
+                  </a:tcPr>
+                </a:tc>
+                <a:tc>
+                  <a:txBody>
+                    <a:bodyPr/>
+                    <a:lstStyle/>
+                    <a:p>
+                      <a:pPr algn="ctr">
+                        <a:buNone/>
+                      </a:pPr>
+                      <a:endParaRPr lang="es-ES_tradnl" sz="900" dirty="0">
+                        <a:effectLst/>
+                        <a:latin typeface="Times New Roman" panose="02020603050405020304" pitchFamily="18" charset="0"/>
+                        <a:ea typeface="Times New Roman" panose="02020603050405020304" pitchFamily="18" charset="0"/>
+                        <a:cs typeface="Times New Roman" panose="02020603050405020304" pitchFamily="18" charset="0"/>
+                      </a:endParaRPr>
+                    </a:p>
+                  </a:txBody>
+                  <a:tcPr marL="68580" marR="68580" marT="0" marB="0" anchor="ctr">
+                    <a:noFill/>
+                  </a:tcPr>
+                </a:tc>
+                <a:tc>
+                  <a:txBody>
+                    <a:bodyPr/>
+                    <a:lstStyle/>
+                    <a:p>
+                      <a:pPr algn="ctr">
+                        <a:buNone/>
+                      </a:pPr>
+                      <a:endParaRPr lang="es-ES_tradnl" sz="900" dirty="0">
+                        <a:effectLst/>
+                        <a:latin typeface="Times New Roman" panose="02020603050405020304" pitchFamily="18" charset="0"/>
+                        <a:ea typeface="Times New Roman" panose="02020603050405020304" pitchFamily="18" charset="0"/>
+                        <a:cs typeface="Times New Roman" panose="02020603050405020304" pitchFamily="18" charset="0"/>
+                      </a:endParaRPr>
+                    </a:p>
+                  </a:txBody>
+                  <a:tcPr marL="68580" marR="68580" marT="0" marB="0" anchor="ctr">
+                    <a:noFill/>
+                  </a:tcPr>
+                </a:tc>
+                <a:tc>
+                  <a:txBody>
+                    <a:bodyPr/>
+                    <a:lstStyle/>
+                    <a:p>
+                      <a:pPr algn="ctr">
+                        <a:buNone/>
+                      </a:pPr>
+                      <a:endParaRPr lang="es-ES_tradnl" sz="900" dirty="0">
+                        <a:effectLst/>
+                        <a:latin typeface="Times New Roman" panose="02020603050405020304" pitchFamily="18" charset="0"/>
+                        <a:ea typeface="Times New Roman" panose="02020603050405020304" pitchFamily="18" charset="0"/>
+                        <a:cs typeface="Times New Roman" panose="02020603050405020304" pitchFamily="18" charset="0"/>
+                      </a:endParaRPr>
+                    </a:p>
+                  </a:txBody>
+                  <a:tcPr marL="68580" marR="68580" marT="0" marB="0" anchor="ctr">
+                    <a:noFill/>
+                  </a:tcPr>
+                </a:tc>
+                <a:tc>
+                  <a:txBody>
+                    <a:bodyPr/>
+                    <a:lstStyle/>
+                    <a:p>
+                      <a:pPr algn="ctr">
+                        <a:buNone/>
+                      </a:pPr>
+                      <a:endParaRPr lang="es-ES_tradnl" sz="900" dirty="0">
+                        <a:effectLst/>
+                        <a:latin typeface="Times New Roman" panose="02020603050405020304" pitchFamily="18" charset="0"/>
+                        <a:ea typeface="Times New Roman" panose="02020603050405020304" pitchFamily="18" charset="0"/>
+                        <a:cs typeface="Times New Roman" panose="02020603050405020304" pitchFamily="18" charset="0"/>
+                      </a:endParaRPr>
+                    </a:p>
+                  </a:txBody>
+                  <a:tcPr marL="68580" marR="68580" marT="0" marB="0" anchor="ctr">
+                    <a:noFill/>
+                  </a:tcPr>
+                </a:tc>
+                <a:tc>
+                  <a:txBody>
+                    <a:bodyPr/>
+                    <a:lstStyle/>
+                    <a:p>
+                      <a:pPr algn="ctr">
+                        <a:buNone/>
+                      </a:pPr>
+                      <a:endParaRPr lang="es-ES_tradnl" sz="900" dirty="0">
+                        <a:effectLst/>
+                        <a:latin typeface="Times New Roman" panose="02020603050405020304" pitchFamily="18" charset="0"/>
+                        <a:ea typeface="Times New Roman" panose="02020603050405020304" pitchFamily="18" charset="0"/>
+                        <a:cs typeface="Times New Roman" panose="02020603050405020304" pitchFamily="18" charset="0"/>
+                      </a:endParaRPr>
+                    </a:p>
+                  </a:txBody>
+                  <a:tcPr marL="68580" marR="68580" marT="0" marB="0" anchor="ctr">
+                    <a:noFill/>
+                  </a:tcPr>
+                </a:tc>
+                <a:tc>
+                  <a:txBody>
+                    <a:bodyPr/>
+                    <a:lstStyle/>
+                    <a:p>
+                      <a:pPr algn="ctr">
+                        <a:buNone/>
+                      </a:pPr>
+                      <a:endParaRPr lang="es-ES_tradnl" sz="900" dirty="0">
+                        <a:effectLst/>
+                        <a:latin typeface="Times New Roman" panose="02020603050405020304" pitchFamily="18" charset="0"/>
+                        <a:ea typeface="Times New Roman" panose="02020603050405020304" pitchFamily="18" charset="0"/>
+                        <a:cs typeface="Times New Roman" panose="02020603050405020304" pitchFamily="18" charset="0"/>
+                      </a:endParaRPr>
+                    </a:p>
+                  </a:txBody>
+                  <a:tcPr marL="68580" marR="68580" marT="0" marB="0" anchor="ctr">
+                    <a:noFill/>
+                  </a:tcPr>
+                </a:tc>
+                <a:tc>
+                  <a:txBody>
+                    <a:bodyPr/>
+                    <a:lstStyle/>
+                    <a:p>
+                      <a:pPr algn="ctr">
+                        <a:buNone/>
+                      </a:pPr>
+                      <a:endParaRPr lang="es-ES_tradnl" sz="900" dirty="0">
+                        <a:effectLst/>
+                        <a:latin typeface="Times New Roman" panose="02020603050405020304" pitchFamily="18" charset="0"/>
+                        <a:ea typeface="Times New Roman" panose="02020603050405020304" pitchFamily="18" charset="0"/>
+                        <a:cs typeface="Times New Roman" panose="02020603050405020304" pitchFamily="18" charset="0"/>
+                      </a:endParaRPr>
+                    </a:p>
+                  </a:txBody>
+                  <a:tcPr marL="68580" marR="68580" marT="0" marB="0" anchor="ctr">
+                    <a:noFill/>
+                  </a:tcPr>
+                </a:tc>
+                <a:tc>
+                  <a:txBody>
+                    <a:bodyPr/>
+                    <a:lstStyle/>
+                    <a:p>
+                      <a:pPr algn="ctr">
+                        <a:buNone/>
+                      </a:pPr>
+                      <a:endParaRPr lang="es-ES_tradnl" sz="900" dirty="0">
+                        <a:effectLst/>
+                        <a:latin typeface="Times New Roman" panose="02020603050405020304" pitchFamily="18" charset="0"/>
+                        <a:ea typeface="Times New Roman" panose="02020603050405020304" pitchFamily="18" charset="0"/>
+                        <a:cs typeface="Times New Roman" panose="02020603050405020304" pitchFamily="18" charset="0"/>
+                      </a:endParaRPr>
+                    </a:p>
+                  </a:txBody>
+                  <a:tcPr marL="68580" marR="68580" marT="0" marB="0" anchor="ctr">
+                    <a:noFill/>
+                  </a:tcPr>
+                </a:tc>
+                <a:tc>
+                  <a:txBody>
+                    <a:bodyPr/>
+                    <a:lstStyle/>
+                    <a:p>
+                      <a:pPr algn="ctr">
+                        <a:buNone/>
+                      </a:pPr>
+                      <a:endParaRPr lang="es-ES_tradnl" sz="900" dirty="0">
+                        <a:effectLst/>
+                        <a:latin typeface="Times New Roman" panose="02020603050405020304" pitchFamily="18" charset="0"/>
+                        <a:ea typeface="Times New Roman" panose="02020603050405020304" pitchFamily="18" charset="0"/>
+                        <a:cs typeface="Times New Roman" panose="02020603050405020304" pitchFamily="18" charset="0"/>
+                      </a:endParaRPr>
+                    </a:p>
+                  </a:txBody>
+                  <a:tcPr marL="68580" marR="68580" marT="0" marB="0" anchor="ctr">
+                    <a:noFill/>
+                  </a:tcPr>
+                </a:tc>
+                <a:tc>
+                  <a:txBody>
+                    <a:bodyPr/>
+                    <a:lstStyle/>
+                    <a:p>
+                      <a:pPr algn="ctr">
+                        <a:buNone/>
+                      </a:pPr>
+                      <a:endParaRPr lang="es-ES_tradnl" sz="900" dirty="0">
+                        <a:effectLst/>
+                        <a:latin typeface="Times New Roman" panose="02020603050405020304" pitchFamily="18" charset="0"/>
+                        <a:ea typeface="Times New Roman" panose="02020603050405020304" pitchFamily="18" charset="0"/>
+                        <a:cs typeface="Times New Roman" panose="02020603050405020304" pitchFamily="18" charset="0"/>
+                      </a:endParaRPr>
+                    </a:p>
+                  </a:txBody>
+                  <a:tcPr marL="68580" marR="68580" marT="0" marB="0" anchor="ctr">
+                    <a:noFill/>
+                  </a:tcPr>
+                </a:tc>
+                <a:tc>
+                  <a:txBody>
+                    <a:bodyPr/>
+                    <a:lstStyle/>
+                    <a:p>
+                      <a:pPr algn="ctr">
+                        <a:buNone/>
+                      </a:pPr>
+                      <a:endParaRPr lang="es-ES_tradnl" sz="900" dirty="0">
+                        <a:effectLst/>
+                        <a:latin typeface="Times New Roman" panose="02020603050405020304" pitchFamily="18" charset="0"/>
+                        <a:ea typeface="Times New Roman" panose="02020603050405020304" pitchFamily="18" charset="0"/>
+                        <a:cs typeface="Times New Roman" panose="02020603050405020304" pitchFamily="18" charset="0"/>
+                      </a:endParaRPr>
+                    </a:p>
+                  </a:txBody>
+                  <a:tcPr marL="68580" marR="68580" marT="0" marB="0" anchor="ctr">
+                    <a:noFill/>
+                  </a:tcPr>
+                </a:tc>
+                <a:tc>
+                  <a:txBody>
+                    <a:bodyPr/>
+                    <a:lstStyle/>
+                    <a:p>
+                      <a:pPr algn="ctr">
+                        <a:buNone/>
+                      </a:pPr>
+                      <a:endParaRPr lang="es-ES_tradnl" sz="900" dirty="0">
+                        <a:effectLst/>
+                        <a:latin typeface="Times New Roman" panose="02020603050405020304" pitchFamily="18" charset="0"/>
+                        <a:ea typeface="Times New Roman" panose="02020603050405020304" pitchFamily="18" charset="0"/>
+                        <a:cs typeface="Times New Roman" panose="02020603050405020304" pitchFamily="18" charset="0"/>
+                      </a:endParaRPr>
+                    </a:p>
+                  </a:txBody>
+                  <a:tcPr marL="68580" marR="68580" marT="0" marB="0" anchor="ctr">
+                    <a:noFill/>
+                  </a:tcPr>
+                </a:tc>
+                <a:tc>
+                  <a:txBody>
+                    <a:bodyPr/>
+                    <a:lstStyle/>
+                    <a:p>
+                      <a:pPr algn="ctr">
+                        <a:buNone/>
+                      </a:pPr>
+                      <a:endParaRPr lang="es-ES_tradnl" sz="900" dirty="0">
+                        <a:effectLst/>
+                        <a:latin typeface="Times New Roman" panose="02020603050405020304" pitchFamily="18" charset="0"/>
+                        <a:ea typeface="Times New Roman" panose="02020603050405020304" pitchFamily="18" charset="0"/>
+                        <a:cs typeface="Times New Roman" panose="02020603050405020304" pitchFamily="18" charset="0"/>
+                      </a:endParaRPr>
+                    </a:p>
+                  </a:txBody>
+                  <a:tcPr marL="68580" marR="68580" marT="0" marB="0" anchor="ctr">
+                    <a:noFill/>
+                  </a:tcPr>
+                </a:tc>
+                <a:tc>
+                  <a:txBody>
+                    <a:bodyPr/>
+                    <a:lstStyle/>
+                    <a:p>
+                      <a:pPr algn="ctr">
+                        <a:buNone/>
+                      </a:pPr>
+                      <a:endParaRPr lang="es-ES_tradnl" sz="900" dirty="0">
                         <a:effectLst/>
                         <a:latin typeface="Times New Roman" panose="02020603050405020304" pitchFamily="18" charset="0"/>
                         <a:ea typeface="Times New Roman" panose="02020603050405020304" pitchFamily="18" charset="0"/>
@@ -7494,7 +7589,7 @@
                       <a:pPr algn="ctr">
                         <a:buNone/>
                       </a:pPr>
-                      <a:endParaRPr lang="es-ES_tradnl" sz="1000" b="0" noProof="1">
+                      <a:endParaRPr lang="es-ES_tradnl" sz="900" b="0" noProof="1">
                         <a:solidFill>
                           <a:schemeClr val="tx1"/>
                         </a:solidFill>
@@ -7526,7 +7621,7 @@
                       <a:pPr algn="ctr">
                         <a:buNone/>
                       </a:pPr>
-                      <a:endParaRPr lang="es-ES_tradnl" sz="1000" dirty="0">
+                      <a:endParaRPr lang="es-ES_tradnl" sz="900" dirty="0">
                         <a:effectLst/>
                         <a:latin typeface="Times New Roman" panose="02020603050405020304" pitchFamily="18" charset="0"/>
                         <a:ea typeface="Times New Roman" panose="02020603050405020304" pitchFamily="18" charset="0"/>
@@ -7555,7 +7650,7 @@
                       <a:pPr algn="ctr">
                         <a:buNone/>
                       </a:pPr>
-                      <a:endParaRPr lang="es-ES_tradnl" sz="1000" dirty="0">
+                      <a:endParaRPr lang="es-ES_tradnl" sz="900" dirty="0">
                         <a:effectLst/>
                         <a:latin typeface="Times New Roman" panose="02020603050405020304" pitchFamily="18" charset="0"/>
                         <a:ea typeface="Times New Roman" panose="02020603050405020304" pitchFamily="18" charset="0"/>
@@ -7584,7 +7679,7 @@
                       <a:pPr algn="ctr">
                         <a:buNone/>
                       </a:pPr>
-                      <a:endParaRPr lang="es-ES_tradnl" sz="1000" dirty="0">
+                      <a:endParaRPr lang="es-ES_tradnl" sz="900" dirty="0">
                         <a:effectLst/>
                         <a:latin typeface="Times New Roman" panose="02020603050405020304" pitchFamily="18" charset="0"/>
                         <a:ea typeface="Times New Roman" panose="02020603050405020304" pitchFamily="18" charset="0"/>
@@ -7613,7 +7708,7 @@
                       <a:pPr algn="ctr">
                         <a:buNone/>
                       </a:pPr>
-                      <a:endParaRPr lang="es-ES_tradnl" sz="1000" dirty="0">
+                      <a:endParaRPr lang="es-ES_tradnl" sz="900" dirty="0">
                         <a:effectLst/>
                         <a:latin typeface="Times New Roman" panose="02020603050405020304" pitchFamily="18" charset="0"/>
                         <a:ea typeface="Times New Roman" panose="02020603050405020304" pitchFamily="18" charset="0"/>
@@ -7642,7 +7737,7 @@
                       <a:pPr algn="ctr">
                         <a:buNone/>
                       </a:pPr>
-                      <a:endParaRPr lang="es-ES_tradnl" sz="1000" dirty="0">
+                      <a:endParaRPr lang="es-ES_tradnl" sz="900" dirty="0">
                         <a:effectLst/>
                         <a:latin typeface="Times New Roman" panose="02020603050405020304" pitchFamily="18" charset="0"/>
                         <a:ea typeface="Times New Roman" panose="02020603050405020304" pitchFamily="18" charset="0"/>
@@ -7671,7 +7766,7 @@
                       <a:pPr algn="ctr">
                         <a:buNone/>
                       </a:pPr>
-                      <a:endParaRPr lang="es-ES_tradnl" sz="1000" dirty="0">
+                      <a:endParaRPr lang="es-ES_tradnl" sz="900" dirty="0">
                         <a:effectLst/>
                         <a:latin typeface="Times New Roman" panose="02020603050405020304" pitchFamily="18" charset="0"/>
                         <a:ea typeface="Times New Roman" panose="02020603050405020304" pitchFamily="18" charset="0"/>
@@ -7700,7 +7795,7 @@
                       <a:pPr algn="ctr">
                         <a:buNone/>
                       </a:pPr>
-                      <a:endParaRPr lang="es-ES_tradnl" sz="1000" dirty="0">
+                      <a:endParaRPr lang="es-ES_tradnl" sz="900" dirty="0">
                         <a:effectLst/>
                         <a:latin typeface="Times New Roman" panose="02020603050405020304" pitchFamily="18" charset="0"/>
                         <a:ea typeface="Times New Roman" panose="02020603050405020304" pitchFamily="18" charset="0"/>
@@ -7729,7 +7824,7 @@
                       <a:pPr algn="ctr">
                         <a:buNone/>
                       </a:pPr>
-                      <a:endParaRPr lang="es-ES_tradnl" sz="1000" dirty="0">
+                      <a:endParaRPr lang="es-ES_tradnl" sz="900" dirty="0">
                         <a:effectLst/>
                         <a:latin typeface="Times New Roman" panose="02020603050405020304" pitchFamily="18" charset="0"/>
                         <a:ea typeface="Times New Roman" panose="02020603050405020304" pitchFamily="18" charset="0"/>
@@ -7758,7 +7853,7 @@
                       <a:pPr algn="ctr">
                         <a:buNone/>
                       </a:pPr>
-                      <a:endParaRPr lang="es-ES_tradnl" sz="1000" dirty="0">
+                      <a:endParaRPr lang="es-ES_tradnl" sz="900" dirty="0">
                         <a:effectLst/>
                         <a:latin typeface="Times New Roman" panose="02020603050405020304" pitchFamily="18" charset="0"/>
                         <a:ea typeface="Times New Roman" panose="02020603050405020304" pitchFamily="18" charset="0"/>
@@ -7787,7 +7882,7 @@
                       <a:pPr algn="ctr">
                         <a:buNone/>
                       </a:pPr>
-                      <a:endParaRPr lang="es-ES_tradnl" sz="1000" dirty="0">
+                      <a:endParaRPr lang="es-ES_tradnl" sz="900" dirty="0">
                         <a:effectLst/>
                         <a:latin typeface="Times New Roman" panose="02020603050405020304" pitchFamily="18" charset="0"/>
                         <a:ea typeface="Times New Roman" panose="02020603050405020304" pitchFamily="18" charset="0"/>
@@ -7816,7 +7911,7 @@
                       <a:pPr algn="ctr">
                         <a:buNone/>
                       </a:pPr>
-                      <a:endParaRPr lang="es-ES_tradnl" sz="1000" dirty="0">
+                      <a:endParaRPr lang="es-ES_tradnl" sz="900" dirty="0">
                         <a:effectLst/>
                         <a:latin typeface="Times New Roman" panose="02020603050405020304" pitchFamily="18" charset="0"/>
                         <a:ea typeface="Times New Roman" panose="02020603050405020304" pitchFamily="18" charset="0"/>
@@ -7845,7 +7940,7 @@
                       <a:pPr algn="ctr">
                         <a:buNone/>
                       </a:pPr>
-                      <a:endParaRPr lang="es-ES_tradnl" sz="1000" dirty="0">
+                      <a:endParaRPr lang="es-ES_tradnl" sz="900" dirty="0">
                         <a:effectLst/>
                         <a:latin typeface="Times New Roman" panose="02020603050405020304" pitchFamily="18" charset="0"/>
                         <a:ea typeface="Times New Roman" panose="02020603050405020304" pitchFamily="18" charset="0"/>
@@ -7874,7 +7969,7 @@
                       <a:pPr algn="ctr">
                         <a:buNone/>
                       </a:pPr>
-                      <a:endParaRPr lang="es-ES_tradnl" sz="1000" dirty="0">
+                      <a:endParaRPr lang="es-ES_tradnl" sz="900" dirty="0">
                         <a:effectLst/>
                         <a:latin typeface="Times New Roman" panose="02020603050405020304" pitchFamily="18" charset="0"/>
                         <a:ea typeface="Times New Roman" panose="02020603050405020304" pitchFamily="18" charset="0"/>
@@ -7903,7 +7998,7 @@
                       <a:pPr algn="ctr">
                         <a:buNone/>
                       </a:pPr>
-                      <a:endParaRPr lang="es-ES_tradnl" sz="1000" dirty="0">
+                      <a:endParaRPr lang="es-ES_tradnl" sz="900" dirty="0">
                         <a:effectLst/>
                         <a:latin typeface="Times New Roman" panose="02020603050405020304" pitchFamily="18" charset="0"/>
                         <a:ea typeface="Times New Roman" panose="02020603050405020304" pitchFamily="18" charset="0"/>
@@ -7932,7 +8027,7 @@
                       <a:pPr algn="ctr">
                         <a:buNone/>
                       </a:pPr>
-                      <a:endParaRPr lang="es-ES_tradnl" sz="1000" dirty="0">
+                      <a:endParaRPr lang="es-ES_tradnl" sz="900" dirty="0">
                         <a:effectLst/>
                         <a:latin typeface="Times New Roman" panose="02020603050405020304" pitchFamily="18" charset="0"/>
                         <a:ea typeface="Times New Roman" panose="02020603050405020304" pitchFamily="18" charset="0"/>
@@ -8335,38 +8430,6 @@
           </a:p>
         </p:txBody>
       </p:sp>
-      <p:pic>
-        <p:nvPicPr>
-          <p:cNvPr id="15" name="Onlinebild-Platzhalter 14">
-            <a:extLst>
-              <a:ext uri="{FF2B5EF4-FFF2-40B4-BE49-F238E27FC236}">
-                <a16:creationId xmlns:a16="http://schemas.microsoft.com/office/drawing/2014/main" id="{63F916CC-EDA4-05CC-1013-FFAF8562C0EA}"/>
-              </a:ext>
-            </a:extLst>
-          </p:cNvPr>
-          <p:cNvPicPr>
-            <a:picLocks noGrp="1" noChangeAspect="1"/>
-          </p:cNvPicPr>
-          <p:nvPr>
-            <p:ph type="clipArt" sz="quarter" idx="15"/>
-          </p:nvPr>
-        </p:nvPicPr>
-        <p:blipFill>
-          <a:blip r:embed="rId2"/>
-          <a:stretch>
-            <a:fillRect/>
-          </a:stretch>
-        </p:blipFill>
-        <p:spPr>
-          <a:xfrm>
-            <a:off x="520700" y="2394976"/>
-            <a:ext cx="5365750" cy="3520610"/>
-          </a:xfrm>
-          <a:prstGeom prst="rect">
-            <a:avLst/>
-          </a:prstGeom>
-        </p:spPr>
-      </p:pic>
       <p:sp>
         <p:nvSpPr>
           <p:cNvPr id="2" name="Fußzeilenplatzhalter 2">
@@ -8496,6 +8559,38 @@
           </a:p>
         </p:txBody>
       </p:sp>
+      <p:pic>
+        <p:nvPicPr>
+          <p:cNvPr id="6" name="Onlinebild-Platzhalter 5">
+            <a:extLst>
+              <a:ext uri="{FF2B5EF4-FFF2-40B4-BE49-F238E27FC236}">
+                <a16:creationId xmlns:a16="http://schemas.microsoft.com/office/drawing/2014/main" id="{B886FADF-E1AC-7BDB-DB26-087E620279E2}"/>
+              </a:ext>
+            </a:extLst>
+          </p:cNvPr>
+          <p:cNvPicPr>
+            <a:picLocks noGrp="1" noChangeAspect="1"/>
+          </p:cNvPicPr>
+          <p:nvPr>
+            <p:ph type="clipArt" sz="quarter" idx="15"/>
+          </p:nvPr>
+        </p:nvPicPr>
+        <p:blipFill>
+          <a:blip r:embed="rId2"/>
+          <a:stretch>
+            <a:fillRect/>
+          </a:stretch>
+        </p:blipFill>
+        <p:spPr>
+          <a:xfrm>
+            <a:off x="639591" y="2151063"/>
+            <a:ext cx="5127968" cy="4008437"/>
+          </a:xfrm>
+          <a:prstGeom prst="rect">
+            <a:avLst/>
+          </a:prstGeom>
+        </p:spPr>
+      </p:pic>
     </p:spTree>
     <p:extLst>
       <p:ext uri="{BB962C8B-B14F-4D97-AF65-F5344CB8AC3E}">
@@ -8586,14 +8681,14 @@
             <p:ph sz="quarter" idx="14"/>
             <p:extLst>
               <p:ext uri="{D42A27DB-BD31-4B8C-83A1-F6EECF244321}">
-                <p14:modId xmlns:p14="http://schemas.microsoft.com/office/powerpoint/2010/main" val="972052187"/>
+                <p14:modId xmlns:p14="http://schemas.microsoft.com/office/powerpoint/2010/main" val="3571296461"/>
               </p:ext>
             </p:extLst>
           </p:nvPr>
         </p:nvGraphicFramePr>
         <p:xfrm>
           <a:off x="561487" y="4734401"/>
-          <a:ext cx="10532960" cy="1470660"/>
+          <a:ext cx="10532960" cy="1210945"/>
         </p:xfrm>
         <a:graphic>
           <a:graphicData uri="http://schemas.openxmlformats.org/drawingml/2006/table">
@@ -8725,7 +8820,7 @@
                         <a:buNone/>
                       </a:pPr>
                       <a:r>
-                        <a:rPr lang="es-ES_tradnl" sz="1000" noProof="1">
+                        <a:rPr lang="es-ES_tradnl" sz="900" noProof="1">
                           <a:solidFill>
                             <a:schemeClr val="tx1"/>
                           </a:solidFill>
@@ -8735,7 +8830,7 @@
                         </a:rPr>
                         <a:t>Rank</a:t>
                       </a:r>
-                      <a:endParaRPr lang="es-ES_tradnl" sz="1000" noProof="1">
+                      <a:endParaRPr lang="es-ES_tradnl" sz="900" noProof="1">
                         <a:solidFill>
                           <a:schemeClr val="tx1"/>
                         </a:solidFill>
@@ -8777,7 +8872,7 @@
                         <a:buNone/>
                       </a:pPr>
                       <a:r>
-                        <a:rPr lang="es-ES_tradnl" sz="1000" noProof="1">
+                        <a:rPr lang="es-ES_tradnl" sz="900" noProof="1">
                           <a:solidFill>
                             <a:schemeClr val="tx1"/>
                           </a:solidFill>
@@ -8787,7 +8882,7 @@
                         </a:rPr>
                         <a:t>Sweep Val</a:t>
                       </a:r>
-                      <a:endParaRPr lang="es-ES_tradnl" sz="1000" noProof="1">
+                      <a:endParaRPr lang="es-ES_tradnl" sz="900" noProof="1">
                         <a:solidFill>
                           <a:schemeClr val="tx1"/>
                         </a:solidFill>
@@ -8829,7 +8924,7 @@
                         <a:buNone/>
                       </a:pPr>
                       <a:r>
-                        <a:rPr lang="es-ES_tradnl" sz="1000" noProof="1">
+                        <a:rPr lang="es-ES_tradnl" sz="900" noProof="1">
                           <a:solidFill>
                             <a:schemeClr val="tx1"/>
                           </a:solidFill>
@@ -8839,7 +8934,7 @@
                         </a:rPr>
                         <a:t>O1_final</a:t>
                       </a:r>
-                      <a:endParaRPr lang="es-ES_tradnl" sz="1000" noProof="1">
+                      <a:endParaRPr lang="es-ES_tradnl" sz="900" noProof="1">
                         <a:solidFill>
                           <a:schemeClr val="tx1"/>
                         </a:solidFill>
@@ -8884,7 +8979,7 @@
                         <a:buNone/>
                       </a:pPr>
                       <a:r>
-                        <a:rPr lang="es-ES_tradnl" sz="1000" noProof="1">
+                        <a:rPr lang="es-ES_tradnl" sz="900" noProof="1">
                           <a:solidFill>
                             <a:schemeClr val="tx1"/>
                           </a:solidFill>
@@ -8894,7 +8989,7 @@
                         </a:rPr>
                         <a:t>Mp [°]</a:t>
                       </a:r>
-                      <a:endParaRPr lang="es-ES_tradnl" sz="1000" noProof="1">
+                      <a:endParaRPr lang="es-ES_tradnl" sz="900" noProof="1">
                         <a:solidFill>
                           <a:schemeClr val="tx1"/>
                         </a:solidFill>
@@ -8936,7 +9031,7 @@
                         <a:buNone/>
                       </a:pPr>
                       <a:r>
-                        <a:rPr lang="es-ES_tradnl" sz="1000" noProof="1">
+                        <a:rPr lang="es-ES_tradnl" sz="900" noProof="1">
                           <a:solidFill>
                             <a:schemeClr val="tx1"/>
                           </a:solidFill>
@@ -8946,7 +9041,7 @@
                         </a:rPr>
                         <a:t>Mp[%]</a:t>
                       </a:r>
-                      <a:endParaRPr lang="es-ES_tradnl" sz="1000" noProof="1">
+                      <a:endParaRPr lang="es-ES_tradnl" sz="900" noProof="1">
                         <a:solidFill>
                           <a:schemeClr val="tx1"/>
                         </a:solidFill>
@@ -8991,7 +9086,7 @@
                         <a:buNone/>
                       </a:pPr>
                       <a:r>
-                        <a:rPr lang="es-ES_tradnl" sz="1000" noProof="1">
+                        <a:rPr lang="es-ES_tradnl" sz="900" noProof="1">
                           <a:solidFill>
                             <a:schemeClr val="tx1"/>
                           </a:solidFill>
@@ -9001,7 +9096,7 @@
                         </a:rPr>
                         <a:t>T[s]</a:t>
                       </a:r>
-                      <a:endParaRPr lang="es-ES_tradnl" sz="1000" noProof="1">
+                      <a:endParaRPr lang="es-ES_tradnl" sz="900" noProof="1">
                         <a:solidFill>
                           <a:schemeClr val="tx1"/>
                         </a:solidFill>
@@ -9046,7 +9141,7 @@
                         <a:buNone/>
                       </a:pPr>
                       <a:r>
-                        <a:rPr lang="es-ES_tradnl" sz="1000" noProof="1">
+                        <a:rPr lang="es-ES_tradnl" sz="900" noProof="1">
                           <a:solidFill>
                             <a:schemeClr val="tx1"/>
                           </a:solidFill>
@@ -9056,7 +9151,7 @@
                         </a:rPr>
                         <a:t>e_ss_abs[°]</a:t>
                       </a:r>
-                      <a:endParaRPr lang="es-ES_tradnl" sz="1000" noProof="1">
+                      <a:endParaRPr lang="es-ES_tradnl" sz="900" noProof="1">
                         <a:solidFill>
                           <a:schemeClr val="tx1"/>
                         </a:solidFill>
@@ -9098,7 +9193,7 @@
                         <a:buNone/>
                       </a:pPr>
                       <a:r>
-                        <a:rPr lang="es-ES_tradnl" sz="1000" noProof="1">
+                        <a:rPr lang="es-ES_tradnl" sz="900" noProof="1">
                           <a:solidFill>
                             <a:schemeClr val="tx1"/>
                           </a:solidFill>
@@ -9108,7 +9203,7 @@
                         </a:rPr>
                         <a:t>RMSE[°]</a:t>
                       </a:r>
-                      <a:endParaRPr lang="es-ES_tradnl" sz="1000" noProof="1">
+                      <a:endParaRPr lang="es-ES_tradnl" sz="900" noProof="1">
                         <a:solidFill>
                           <a:schemeClr val="tx1"/>
                         </a:solidFill>
@@ -9150,7 +9245,7 @@
                         <a:buNone/>
                       </a:pPr>
                       <a:r>
-                        <a:rPr lang="es-ES_tradnl" sz="1000" noProof="1">
+                        <a:rPr lang="es-ES_tradnl" sz="900" noProof="1">
                           <a:solidFill>
                             <a:schemeClr val="tx1"/>
                           </a:solidFill>
@@ -9160,7 +9255,7 @@
                         </a:rPr>
                         <a:t>ITAE[°s]</a:t>
                       </a:r>
-                      <a:endParaRPr lang="es-ES_tradnl" sz="1000" noProof="1">
+                      <a:endParaRPr lang="es-ES_tradnl" sz="900" noProof="1">
                         <a:solidFill>
                           <a:schemeClr val="tx1"/>
                         </a:solidFill>
@@ -9202,7 +9297,7 @@
                         <a:buNone/>
                       </a:pPr>
                       <a:r>
-                        <a:rPr lang="es-ES_tradnl" sz="1000" noProof="1">
+                        <a:rPr lang="es-ES_tradnl" sz="900" noProof="1">
                           <a:solidFill>
                             <a:schemeClr val="tx1"/>
                           </a:solidFill>
@@ -9212,7 +9307,7 @@
                         </a:rPr>
                         <a:t>Tr[s]</a:t>
                       </a:r>
-                      <a:endParaRPr lang="es-ES_tradnl" sz="1000" noProof="1">
+                      <a:endParaRPr lang="es-ES_tradnl" sz="900" noProof="1">
                         <a:solidFill>
                           <a:schemeClr val="tx1"/>
                         </a:solidFill>
@@ -9254,7 +9349,7 @@
                         <a:buNone/>
                       </a:pPr>
                       <a:r>
-                        <a:rPr lang="es-ES_tradnl" sz="1000" noProof="1">
+                        <a:rPr lang="es-ES_tradnl" sz="900" noProof="1">
                           <a:solidFill>
                             <a:schemeClr val="tx1"/>
                           </a:solidFill>
@@ -9264,7 +9359,7 @@
                         </a:rPr>
                         <a:t>Iosc</a:t>
                       </a:r>
-                      <a:endParaRPr lang="es-ES_tradnl" sz="1000" noProof="1">
+                      <a:endParaRPr lang="es-ES_tradnl" sz="900" noProof="1">
                         <a:solidFill>
                           <a:schemeClr val="tx1"/>
                         </a:solidFill>
@@ -9306,7 +9401,7 @@
                         <a:buNone/>
                       </a:pPr>
                       <a:r>
-                        <a:rPr lang="es-ES_tradnl" sz="1000" noProof="1">
+                        <a:rPr lang="es-ES_tradnl" sz="900" noProof="1">
                           <a:solidFill>
                             <a:schemeClr val="tx1"/>
                           </a:solidFill>
@@ -9316,7 +9411,7 @@
                         </a:rPr>
                         <a:t>U_peak</a:t>
                       </a:r>
-                      <a:endParaRPr lang="es-ES_tradnl" sz="1000" noProof="1">
+                      <a:endParaRPr lang="es-ES_tradnl" sz="900" noProof="1">
                         <a:solidFill>
                           <a:schemeClr val="tx1"/>
                         </a:solidFill>
@@ -9358,7 +9453,7 @@
                         <a:buNone/>
                       </a:pPr>
                       <a:r>
-                        <a:rPr lang="es-ES_tradnl" sz="1000" noProof="1">
+                        <a:rPr lang="es-ES_tradnl" sz="900" noProof="1">
                           <a:solidFill>
                             <a:schemeClr val="tx1"/>
                           </a:solidFill>
@@ -9368,7 +9463,7 @@
                         </a:rPr>
                         <a:t>U_rms</a:t>
                       </a:r>
-                      <a:endParaRPr lang="es-ES_tradnl" sz="1000" noProof="1">
+                      <a:endParaRPr lang="es-ES_tradnl" sz="900" noProof="1">
                         <a:solidFill>
                           <a:schemeClr val="tx1"/>
                         </a:solidFill>
@@ -9410,7 +9505,7 @@
                         <a:buNone/>
                       </a:pPr>
                       <a:r>
-                        <a:rPr lang="es-ES_tradnl" sz="1000" noProof="1">
+                        <a:rPr lang="es-ES_tradnl" sz="900" noProof="1">
                           <a:solidFill>
                             <a:schemeClr val="tx1"/>
                           </a:solidFill>
@@ -9420,7 +9515,7 @@
                         </a:rPr>
                         <a:t>U_energy</a:t>
                       </a:r>
-                      <a:endParaRPr lang="es-ES_tradnl" sz="1000" noProof="1">
+                      <a:endParaRPr lang="es-ES_tradnl" sz="900" noProof="1">
                         <a:solidFill>
                           <a:schemeClr val="tx1"/>
                         </a:solidFill>
@@ -9462,7 +9557,7 @@
                         <a:buNone/>
                       </a:pPr>
                       <a:r>
-                        <a:rPr lang="es-ES_tradnl" sz="1000" noProof="1">
+                        <a:rPr lang="es-ES_tradnl" sz="900" noProof="1">
                           <a:solidFill>
                             <a:schemeClr val="tx1"/>
                           </a:solidFill>
@@ -9472,7 +9567,7 @@
                         </a:rPr>
                         <a:t>U_abs</a:t>
                       </a:r>
-                      <a:endParaRPr lang="es-ES_tradnl" sz="1000" noProof="1">
+                      <a:endParaRPr lang="es-ES_tradnl" sz="900" noProof="1">
                         <a:solidFill>
                           <a:schemeClr val="tx1"/>
                         </a:solidFill>
@@ -9514,7 +9609,7 @@
                         <a:buNone/>
                       </a:pPr>
                       <a:r>
-                        <a:rPr lang="es-ES_tradnl" sz="1000" noProof="1">
+                        <a:rPr lang="es-ES_tradnl" sz="900" noProof="1">
                           <a:solidFill>
                             <a:schemeClr val="tx1"/>
                           </a:solidFill>
@@ -9524,7 +9619,7 @@
                         </a:rPr>
                         <a:t>U_TV</a:t>
                       </a:r>
-                      <a:endParaRPr lang="es-ES_tradnl" sz="1000" noProof="1">
+                      <a:endParaRPr lang="es-ES_tradnl" sz="900" noProof="1">
                         <a:solidFill>
                           <a:schemeClr val="tx1"/>
                         </a:solidFill>
@@ -9573,7 +9668,7 @@
                         <a:buNone/>
                       </a:pPr>
                       <a:r>
-                        <a:rPr lang="es-ES_tradnl" sz="1000" b="0" noProof="1">
+                        <a:rPr lang="es-ES_tradnl" sz="900" b="0" noProof="1">
                           <a:solidFill>
                             <a:schemeClr val="tx1"/>
                           </a:solidFill>
@@ -9583,7 +9678,7 @@
                         </a:rPr>
                         <a:t>1</a:t>
                       </a:r>
-                      <a:endParaRPr lang="es-ES_tradnl" sz="1000" b="0" noProof="1">
+                      <a:endParaRPr lang="es-ES_tradnl" sz="900" b="0" noProof="1">
                         <a:solidFill>
                           <a:schemeClr val="tx1"/>
                         </a:solidFill>
@@ -9616,7 +9711,7 @@
                         <a:buNone/>
                       </a:pPr>
                       <a:r>
-                        <a:rPr lang="es-ES_tradnl" sz="1000" dirty="0">
+                        <a:rPr lang="es-ES_tradnl" sz="900" dirty="0">
                           <a:effectLst/>
                           <a:latin typeface="Times New Roman" panose="02020603050405020304" pitchFamily="18" charset="0"/>
                           <a:ea typeface="Times New Roman" panose="02020603050405020304" pitchFamily="18" charset="0"/>
@@ -9648,7 +9743,7 @@
                         <a:buNone/>
                       </a:pPr>
                       <a:r>
-                        <a:rPr lang="es-ES_tradnl" sz="1000" dirty="0">
+                        <a:rPr lang="es-ES_tradnl" sz="900" dirty="0">
                           <a:effectLst/>
                           <a:latin typeface="Times New Roman" panose="02020603050405020304" pitchFamily="18" charset="0"/>
                           <a:ea typeface="Times New Roman" panose="02020603050405020304" pitchFamily="18" charset="0"/>
@@ -9680,7 +9775,7 @@
                         <a:buNone/>
                       </a:pPr>
                       <a:r>
-                        <a:rPr lang="es-ES_tradnl" sz="1000" dirty="0">
+                        <a:rPr lang="es-ES_tradnl" sz="900" dirty="0">
                           <a:effectLst/>
                           <a:latin typeface="Times New Roman" panose="02020603050405020304" pitchFamily="18" charset="0"/>
                           <a:ea typeface="Times New Roman" panose="02020603050405020304" pitchFamily="18" charset="0"/>
@@ -9712,7 +9807,7 @@
                         <a:buNone/>
                       </a:pPr>
                       <a:r>
-                        <a:rPr lang="es-ES_tradnl" sz="1000" dirty="0">
+                        <a:rPr lang="es-ES_tradnl" sz="900" dirty="0">
                           <a:effectLst/>
                           <a:latin typeface="Times New Roman" panose="02020603050405020304" pitchFamily="18" charset="0"/>
                           <a:ea typeface="Times New Roman" panose="02020603050405020304" pitchFamily="18" charset="0"/>
@@ -9744,7 +9839,7 @@
                         <a:buNone/>
                       </a:pPr>
                       <a:r>
-                        <a:rPr lang="es-ES_tradnl" sz="1000" dirty="0">
+                        <a:rPr lang="es-ES_tradnl" sz="900" dirty="0">
                           <a:effectLst/>
                           <a:latin typeface="Times New Roman" panose="02020603050405020304" pitchFamily="18" charset="0"/>
                           <a:ea typeface="Times New Roman" panose="02020603050405020304" pitchFamily="18" charset="0"/>
@@ -9776,7 +9871,7 @@
                         <a:buNone/>
                       </a:pPr>
                       <a:r>
-                        <a:rPr lang="es-ES_tradnl" sz="1000" dirty="0">
+                        <a:rPr lang="es-ES_tradnl" sz="900" dirty="0">
                           <a:effectLst/>
                           <a:latin typeface="Times New Roman" panose="02020603050405020304" pitchFamily="18" charset="0"/>
                           <a:ea typeface="Times New Roman" panose="02020603050405020304" pitchFamily="18" charset="0"/>
@@ -9808,7 +9903,7 @@
                         <a:buNone/>
                       </a:pPr>
                       <a:r>
-                        <a:rPr lang="es-ES_tradnl" sz="1000" dirty="0">
+                        <a:rPr lang="es-ES_tradnl" sz="900" dirty="0">
                           <a:effectLst/>
                           <a:latin typeface="Times New Roman" panose="02020603050405020304" pitchFamily="18" charset="0"/>
                           <a:ea typeface="Times New Roman" panose="02020603050405020304" pitchFamily="18" charset="0"/>
@@ -9840,7 +9935,7 @@
                         <a:buNone/>
                       </a:pPr>
                       <a:r>
-                        <a:rPr lang="es-ES_tradnl" sz="1000" dirty="0">
+                        <a:rPr lang="es-ES_tradnl" sz="900" dirty="0">
                           <a:effectLst/>
                           <a:latin typeface="Times New Roman" panose="02020603050405020304" pitchFamily="18" charset="0"/>
                           <a:ea typeface="Times New Roman" panose="02020603050405020304" pitchFamily="18" charset="0"/>
@@ -9872,7 +9967,7 @@
                         <a:buNone/>
                       </a:pPr>
                       <a:r>
-                        <a:rPr lang="es-ES_tradnl" sz="1000" dirty="0">
+                        <a:rPr lang="es-ES_tradnl" sz="900" dirty="0">
                           <a:effectLst/>
                           <a:latin typeface="Times New Roman" panose="02020603050405020304" pitchFamily="18" charset="0"/>
                           <a:ea typeface="Times New Roman" panose="02020603050405020304" pitchFamily="18" charset="0"/>
@@ -9904,7 +9999,7 @@
                         <a:buNone/>
                       </a:pPr>
                       <a:r>
-                        <a:rPr lang="es-ES_tradnl" sz="1000" dirty="0">
+                        <a:rPr lang="es-ES_tradnl" sz="900" dirty="0">
                           <a:effectLst/>
                           <a:latin typeface="Times New Roman" panose="02020603050405020304" pitchFamily="18" charset="0"/>
                           <a:ea typeface="Times New Roman" panose="02020603050405020304" pitchFamily="18" charset="0"/>
@@ -9936,17 +10031,23 @@
                         <a:buNone/>
                       </a:pPr>
                       <a:r>
-                        <a:rPr lang="es-ES_tradnl" sz="1000" dirty="0">
+                        <a:rPr lang="es-ES" sz="900">
                           <a:effectLst/>
                           <a:latin typeface="Times New Roman" panose="02020603050405020304" pitchFamily="18" charset="0"/>
                           <a:ea typeface="Times New Roman" panose="02020603050405020304" pitchFamily="18" charset="0"/>
                           <a:cs typeface="Times New Roman" panose="02020603050405020304" pitchFamily="18" charset="0"/>
                         </a:rPr>
-                        <a:t>9.92</a:t>
-                      </a:r>
-                    </a:p>
-                  </a:txBody>
-                  <a:tcPr marL="68580" marR="68580" marT="0" marB="0" anchor="ctr">
+                        <a:t>6.00</a:t>
+                      </a:r>
+                      <a:endParaRPr lang="de-DE" sz="900">
+                        <a:effectLst/>
+                        <a:latin typeface="Times New Roman" panose="02020603050405020304" pitchFamily="18" charset="0"/>
+                        <a:ea typeface="Times New Roman" panose="02020603050405020304" pitchFamily="18" charset="0"/>
+                        <a:cs typeface="Times New Roman" panose="02020603050405020304" pitchFamily="18" charset="0"/>
+                      </a:endParaRPr>
+                    </a:p>
+                  </a:txBody>
+                  <a:tcPr marL="68580" marR="68580" marT="0" marB="0">
                     <a:lnT w="12700" cap="flat" cmpd="sng" algn="ctr">
                       <a:solidFill>
                         <a:schemeClr val="tx1"/>
@@ -9968,17 +10069,23 @@
                         <a:buNone/>
                       </a:pPr>
                       <a:r>
-                        <a:rPr lang="es-ES_tradnl" sz="1000" dirty="0">
+                        <a:rPr lang="es-ES" sz="900">
                           <a:effectLst/>
                           <a:latin typeface="Times New Roman" panose="02020603050405020304" pitchFamily="18" charset="0"/>
                           <a:ea typeface="Times New Roman" panose="02020603050405020304" pitchFamily="18" charset="0"/>
                           <a:cs typeface="Times New Roman" panose="02020603050405020304" pitchFamily="18" charset="0"/>
                         </a:rPr>
-                        <a:t>2.57</a:t>
-                      </a:r>
-                    </a:p>
-                  </a:txBody>
-                  <a:tcPr marL="68580" marR="68580" marT="0" marB="0" anchor="ctr">
+                        <a:t>2.07</a:t>
+                      </a:r>
+                      <a:endParaRPr lang="de-DE" sz="900">
+                        <a:effectLst/>
+                        <a:latin typeface="Times New Roman" panose="02020603050405020304" pitchFamily="18" charset="0"/>
+                        <a:ea typeface="Times New Roman" panose="02020603050405020304" pitchFamily="18" charset="0"/>
+                        <a:cs typeface="Times New Roman" panose="02020603050405020304" pitchFamily="18" charset="0"/>
+                      </a:endParaRPr>
+                    </a:p>
+                  </a:txBody>
+                  <a:tcPr marL="68580" marR="68580" marT="0" marB="0">
                     <a:lnT w="12700" cap="flat" cmpd="sng" algn="ctr">
                       <a:solidFill>
                         <a:schemeClr val="tx1"/>
@@ -10000,17 +10107,23 @@
                         <a:buNone/>
                       </a:pPr>
                       <a:r>
-                        <a:rPr lang="es-ES_tradnl" sz="1000" dirty="0">
+                        <a:rPr lang="es-ES" sz="900">
                           <a:effectLst/>
                           <a:latin typeface="Times New Roman" panose="02020603050405020304" pitchFamily="18" charset="0"/>
                           <a:ea typeface="Times New Roman" panose="02020603050405020304" pitchFamily="18" charset="0"/>
                           <a:cs typeface="Times New Roman" panose="02020603050405020304" pitchFamily="18" charset="0"/>
                         </a:rPr>
-                        <a:t>33.25</a:t>
-                      </a:r>
-                    </a:p>
-                  </a:txBody>
-                  <a:tcPr marL="68580" marR="68580" marT="0" marB="0" anchor="ctr">
+                        <a:t>25.11</a:t>
+                      </a:r>
+                      <a:endParaRPr lang="de-DE" sz="900">
+                        <a:effectLst/>
+                        <a:latin typeface="Times New Roman" panose="02020603050405020304" pitchFamily="18" charset="0"/>
+                        <a:ea typeface="Times New Roman" panose="02020603050405020304" pitchFamily="18" charset="0"/>
+                        <a:cs typeface="Times New Roman" panose="02020603050405020304" pitchFamily="18" charset="0"/>
+                      </a:endParaRPr>
+                    </a:p>
+                  </a:txBody>
+                  <a:tcPr marL="68580" marR="68580" marT="0" marB="0">
                     <a:lnT w="12700" cap="flat" cmpd="sng" algn="ctr">
                       <a:solidFill>
                         <a:schemeClr val="tx1"/>
@@ -10032,17 +10145,23 @@
                         <a:buNone/>
                       </a:pPr>
                       <a:r>
-                        <a:rPr lang="es-ES_tradnl" sz="1000" dirty="0">
+                        <a:rPr lang="es-ES" sz="900">
                           <a:effectLst/>
                           <a:latin typeface="Times New Roman" panose="02020603050405020304" pitchFamily="18" charset="0"/>
                           <a:ea typeface="Times New Roman" panose="02020603050405020304" pitchFamily="18" charset="0"/>
                           <a:cs typeface="Times New Roman" panose="02020603050405020304" pitchFamily="18" charset="0"/>
                         </a:rPr>
-                        <a:t>5.21</a:t>
-                      </a:r>
-                    </a:p>
-                  </a:txBody>
-                  <a:tcPr marL="68580" marR="68580" marT="0" marB="0" anchor="ctr">
+                        <a:t>4.75</a:t>
+                      </a:r>
+                      <a:endParaRPr lang="de-DE" sz="900">
+                        <a:effectLst/>
+                        <a:latin typeface="Times New Roman" panose="02020603050405020304" pitchFamily="18" charset="0"/>
+                        <a:ea typeface="Times New Roman" panose="02020603050405020304" pitchFamily="18" charset="0"/>
+                        <a:cs typeface="Times New Roman" panose="02020603050405020304" pitchFamily="18" charset="0"/>
+                      </a:endParaRPr>
+                    </a:p>
+                  </a:txBody>
+                  <a:tcPr marL="68580" marR="68580" marT="0" marB="0">
                     <a:lnT w="12700" cap="flat" cmpd="sng" algn="ctr">
                       <a:solidFill>
                         <a:schemeClr val="tx1"/>
@@ -10064,17 +10183,23 @@
                         <a:buNone/>
                       </a:pPr>
                       <a:r>
-                        <a:rPr lang="es-ES_tradnl" sz="1000" dirty="0">
+                        <a:rPr lang="es-ES" sz="900">
                           <a:effectLst/>
                           <a:latin typeface="Times New Roman" panose="02020603050405020304" pitchFamily="18" charset="0"/>
                           <a:ea typeface="Times New Roman" panose="02020603050405020304" pitchFamily="18" charset="0"/>
                           <a:cs typeface="Times New Roman" panose="02020603050405020304" pitchFamily="18" charset="0"/>
                         </a:rPr>
-                        <a:t>42.86</a:t>
-                      </a:r>
-                    </a:p>
-                  </a:txBody>
-                  <a:tcPr marL="68580" marR="68580" marT="0" marB="0" anchor="ctr">
+                        <a:t>18.56</a:t>
+                      </a:r>
+                      <a:endParaRPr lang="de-DE" sz="900">
+                        <a:effectLst/>
+                        <a:latin typeface="Times New Roman" panose="02020603050405020304" pitchFamily="18" charset="0"/>
+                        <a:ea typeface="Times New Roman" panose="02020603050405020304" pitchFamily="18" charset="0"/>
+                        <a:cs typeface="Times New Roman" panose="02020603050405020304" pitchFamily="18" charset="0"/>
+                      </a:endParaRPr>
+                    </a:p>
+                  </a:txBody>
+                  <a:tcPr marL="68580" marR="68580" marT="0" marB="0">
                     <a:lnT w="12700" cap="flat" cmpd="sng" algn="ctr">
                       <a:solidFill>
                         <a:schemeClr val="tx1"/>
@@ -10103,7 +10228,7 @@
                         <a:buNone/>
                       </a:pPr>
                       <a:r>
-                        <a:rPr lang="es-ES_tradnl" sz="1000" b="0" noProof="1">
+                        <a:rPr lang="es-ES_tradnl" sz="900" b="0" noProof="1">
                           <a:solidFill>
                             <a:schemeClr val="tx1"/>
                           </a:solidFill>
@@ -10129,7 +10254,7 @@
                         <a:buNone/>
                       </a:pPr>
                       <a:r>
-                        <a:rPr lang="es-ES_tradnl" sz="1000" dirty="0">
+                        <a:rPr lang="es-ES_tradnl" sz="900" dirty="0">
                           <a:effectLst/>
                           <a:latin typeface="Times New Roman" panose="02020603050405020304" pitchFamily="18" charset="0"/>
                           <a:ea typeface="Times New Roman" panose="02020603050405020304" pitchFamily="18" charset="0"/>
@@ -10152,7 +10277,7 @@
                         <a:buNone/>
                       </a:pPr>
                       <a:r>
-                        <a:rPr lang="es-ES_tradnl" sz="1000" dirty="0">
+                        <a:rPr lang="es-ES_tradnl" sz="900" dirty="0">
                           <a:effectLst/>
                           <a:latin typeface="Times New Roman" panose="02020603050405020304" pitchFamily="18" charset="0"/>
                           <a:ea typeface="Times New Roman" panose="02020603050405020304" pitchFamily="18" charset="0"/>
@@ -10175,7 +10300,7 @@
                         <a:buNone/>
                       </a:pPr>
                       <a:r>
-                        <a:rPr lang="es-ES_tradnl" sz="1000" dirty="0">
+                        <a:rPr lang="es-ES_tradnl" sz="900" dirty="0">
                           <a:effectLst/>
                           <a:latin typeface="Times New Roman" panose="02020603050405020304" pitchFamily="18" charset="0"/>
                           <a:ea typeface="Times New Roman" panose="02020603050405020304" pitchFamily="18" charset="0"/>
@@ -10198,7 +10323,7 @@
                         <a:buNone/>
                       </a:pPr>
                       <a:r>
-                        <a:rPr lang="es-ES_tradnl" sz="1000" dirty="0">
+                        <a:rPr lang="es-ES_tradnl" sz="900" dirty="0">
                           <a:effectLst/>
                           <a:latin typeface="Times New Roman" panose="02020603050405020304" pitchFamily="18" charset="0"/>
                           <a:ea typeface="Times New Roman" panose="02020603050405020304" pitchFamily="18" charset="0"/>
@@ -10221,7 +10346,7 @@
                         <a:buNone/>
                       </a:pPr>
                       <a:r>
-                        <a:rPr lang="es-ES_tradnl" sz="1000" dirty="0">
+                        <a:rPr lang="es-ES_tradnl" sz="900" dirty="0">
                           <a:effectLst/>
                           <a:latin typeface="Times New Roman" panose="02020603050405020304" pitchFamily="18" charset="0"/>
                           <a:ea typeface="Times New Roman" panose="02020603050405020304" pitchFamily="18" charset="0"/>
@@ -10244,7 +10369,7 @@
                         <a:buNone/>
                       </a:pPr>
                       <a:r>
-                        <a:rPr lang="es-ES_tradnl" sz="1000" dirty="0">
+                        <a:rPr lang="es-ES_tradnl" sz="900" dirty="0">
                           <a:effectLst/>
                           <a:latin typeface="Times New Roman" panose="02020603050405020304" pitchFamily="18" charset="0"/>
                           <a:ea typeface="Times New Roman" panose="02020603050405020304" pitchFamily="18" charset="0"/>
@@ -10267,7 +10392,7 @@
                         <a:buNone/>
                       </a:pPr>
                       <a:r>
-                        <a:rPr lang="es-ES_tradnl" sz="1000" dirty="0">
+                        <a:rPr lang="es-ES_tradnl" sz="900" dirty="0">
                           <a:effectLst/>
                           <a:latin typeface="Times New Roman" panose="02020603050405020304" pitchFamily="18" charset="0"/>
                           <a:ea typeface="Times New Roman" panose="02020603050405020304" pitchFamily="18" charset="0"/>
@@ -10290,7 +10415,7 @@
                         <a:buNone/>
                       </a:pPr>
                       <a:r>
-                        <a:rPr lang="es-ES_tradnl" sz="1000" dirty="0">
+                        <a:rPr lang="es-ES_tradnl" sz="900" dirty="0">
                           <a:effectLst/>
                           <a:latin typeface="Times New Roman" panose="02020603050405020304" pitchFamily="18" charset="0"/>
                           <a:ea typeface="Times New Roman" panose="02020603050405020304" pitchFamily="18" charset="0"/>
@@ -10313,7 +10438,7 @@
                         <a:buNone/>
                       </a:pPr>
                       <a:r>
-                        <a:rPr lang="es-ES_tradnl" sz="1000" dirty="0">
+                        <a:rPr lang="es-ES_tradnl" sz="900" dirty="0">
                           <a:effectLst/>
                           <a:latin typeface="Times New Roman" panose="02020603050405020304" pitchFamily="18" charset="0"/>
                           <a:ea typeface="Times New Roman" panose="02020603050405020304" pitchFamily="18" charset="0"/>
@@ -10336,7 +10461,7 @@
                         <a:buNone/>
                       </a:pPr>
                       <a:r>
-                        <a:rPr lang="es-ES_tradnl" sz="1000" dirty="0">
+                        <a:rPr lang="es-ES_tradnl" sz="900" dirty="0">
                           <a:effectLst/>
                           <a:latin typeface="Times New Roman" panose="02020603050405020304" pitchFamily="18" charset="0"/>
                           <a:ea typeface="Times New Roman" panose="02020603050405020304" pitchFamily="18" charset="0"/>
@@ -10359,109 +10484,139 @@
                         <a:buNone/>
                       </a:pPr>
                       <a:r>
-                        <a:rPr lang="es-ES_tradnl" sz="1000" dirty="0">
+                        <a:rPr lang="es-ES" sz="900">
                           <a:effectLst/>
                           <a:latin typeface="Times New Roman" panose="02020603050405020304" pitchFamily="18" charset="0"/>
                           <a:ea typeface="Times New Roman" panose="02020603050405020304" pitchFamily="18" charset="0"/>
                           <a:cs typeface="Times New Roman" panose="02020603050405020304" pitchFamily="18" charset="0"/>
                         </a:rPr>
-                        <a:t>9.92</a:t>
-                      </a:r>
-                    </a:p>
-                  </a:txBody>
-                  <a:tcPr marL="68580" marR="68580" marT="0" marB="0" anchor="ctr">
-                    <a:noFill/>
-                  </a:tcPr>
-                </a:tc>
-                <a:tc>
-                  <a:txBody>
-                    <a:bodyPr/>
-                    <a:lstStyle/>
-                    <a:p>
-                      <a:pPr algn="ctr">
-                        <a:buNone/>
-                      </a:pPr>
-                      <a:r>
-                        <a:rPr lang="es-ES_tradnl" sz="1000" dirty="0">
+                        <a:t>6.00</a:t>
+                      </a:r>
+                      <a:endParaRPr lang="de-DE" sz="900">
+                        <a:effectLst/>
+                        <a:latin typeface="Times New Roman" panose="02020603050405020304" pitchFamily="18" charset="0"/>
+                        <a:ea typeface="Times New Roman" panose="02020603050405020304" pitchFamily="18" charset="0"/>
+                        <a:cs typeface="Times New Roman" panose="02020603050405020304" pitchFamily="18" charset="0"/>
+                      </a:endParaRPr>
+                    </a:p>
+                  </a:txBody>
+                  <a:tcPr marL="68580" marR="68580" marT="0" marB="0">
+                    <a:noFill/>
+                  </a:tcPr>
+                </a:tc>
+                <a:tc>
+                  <a:txBody>
+                    <a:bodyPr/>
+                    <a:lstStyle/>
+                    <a:p>
+                      <a:pPr algn="ctr">
+                        <a:buNone/>
+                      </a:pPr>
+                      <a:r>
+                        <a:rPr lang="es-ES" sz="900">
                           <a:effectLst/>
                           <a:latin typeface="Times New Roman" panose="02020603050405020304" pitchFamily="18" charset="0"/>
                           <a:ea typeface="Times New Roman" panose="02020603050405020304" pitchFamily="18" charset="0"/>
                           <a:cs typeface="Times New Roman" panose="02020603050405020304" pitchFamily="18" charset="0"/>
                         </a:rPr>
-                        <a:t>2.65</a:t>
-                      </a:r>
-                    </a:p>
-                  </a:txBody>
-                  <a:tcPr marL="68580" marR="68580" marT="0" marB="0" anchor="ctr">
-                    <a:noFill/>
-                  </a:tcPr>
-                </a:tc>
-                <a:tc>
-                  <a:txBody>
-                    <a:bodyPr/>
-                    <a:lstStyle/>
-                    <a:p>
-                      <a:pPr algn="ctr">
-                        <a:buNone/>
-                      </a:pPr>
-                      <a:r>
-                        <a:rPr lang="es-ES_tradnl" sz="1000" dirty="0">
+                        <a:t>2.08</a:t>
+                      </a:r>
+                      <a:endParaRPr lang="de-DE" sz="900">
+                        <a:effectLst/>
+                        <a:latin typeface="Times New Roman" panose="02020603050405020304" pitchFamily="18" charset="0"/>
+                        <a:ea typeface="Times New Roman" panose="02020603050405020304" pitchFamily="18" charset="0"/>
+                        <a:cs typeface="Times New Roman" panose="02020603050405020304" pitchFamily="18" charset="0"/>
+                      </a:endParaRPr>
+                    </a:p>
+                  </a:txBody>
+                  <a:tcPr marL="68580" marR="68580" marT="0" marB="0">
+                    <a:noFill/>
+                  </a:tcPr>
+                </a:tc>
+                <a:tc>
+                  <a:txBody>
+                    <a:bodyPr/>
+                    <a:lstStyle/>
+                    <a:p>
+                      <a:pPr algn="ctr">
+                        <a:buNone/>
+                      </a:pPr>
+                      <a:r>
+                        <a:rPr lang="es-ES" sz="900">
                           <a:effectLst/>
                           <a:latin typeface="Times New Roman" panose="02020603050405020304" pitchFamily="18" charset="0"/>
                           <a:ea typeface="Times New Roman" panose="02020603050405020304" pitchFamily="18" charset="0"/>
                           <a:cs typeface="Times New Roman" panose="02020603050405020304" pitchFamily="18" charset="0"/>
                         </a:rPr>
-                        <a:t>35.84</a:t>
-                      </a:r>
-                    </a:p>
-                  </a:txBody>
-                  <a:tcPr marL="68580" marR="68580" marT="0" marB="0" anchor="ctr">
-                    <a:noFill/>
-                  </a:tcPr>
-                </a:tc>
-                <a:tc>
-                  <a:txBody>
-                    <a:bodyPr/>
-                    <a:lstStyle/>
-                    <a:p>
-                      <a:pPr algn="ctr">
-                        <a:buNone/>
-                      </a:pPr>
-                      <a:r>
-                        <a:rPr lang="es-ES_tradnl" sz="1000" dirty="0">
+                        <a:t>25.40</a:t>
+                      </a:r>
+                      <a:endParaRPr lang="de-DE" sz="900">
+                        <a:effectLst/>
+                        <a:latin typeface="Times New Roman" panose="02020603050405020304" pitchFamily="18" charset="0"/>
+                        <a:ea typeface="Times New Roman" panose="02020603050405020304" pitchFamily="18" charset="0"/>
+                        <a:cs typeface="Times New Roman" panose="02020603050405020304" pitchFamily="18" charset="0"/>
+                      </a:endParaRPr>
+                    </a:p>
+                  </a:txBody>
+                  <a:tcPr marL="68580" marR="68580" marT="0" marB="0">
+                    <a:noFill/>
+                  </a:tcPr>
+                </a:tc>
+                <a:tc>
+                  <a:txBody>
+                    <a:bodyPr/>
+                    <a:lstStyle/>
+                    <a:p>
+                      <a:pPr algn="ctr">
+                        <a:buNone/>
+                      </a:pPr>
+                      <a:r>
+                        <a:rPr lang="es-ES" sz="900">
                           <a:effectLst/>
                           <a:latin typeface="Times New Roman" panose="02020603050405020304" pitchFamily="18" charset="0"/>
                           <a:ea typeface="Times New Roman" panose="02020603050405020304" pitchFamily="18" charset="0"/>
                           <a:cs typeface="Times New Roman" panose="02020603050405020304" pitchFamily="18" charset="0"/>
                         </a:rPr>
-                        <a:t>6.10</a:t>
-                      </a:r>
-                    </a:p>
-                  </a:txBody>
-                  <a:tcPr marL="68580" marR="68580" marT="0" marB="0" anchor="ctr">
-                    <a:noFill/>
-                  </a:tcPr>
-                </a:tc>
-                <a:tc>
-                  <a:txBody>
-                    <a:bodyPr/>
-                    <a:lstStyle/>
-                    <a:p>
-                      <a:pPr algn="ctr">
-                        <a:buNone/>
-                      </a:pPr>
-                      <a:r>
-                        <a:rPr lang="es-ES_tradnl" sz="1000" dirty="0">
+                        <a:t>4.92</a:t>
+                      </a:r>
+                      <a:endParaRPr lang="de-DE" sz="900">
+                        <a:effectLst/>
+                        <a:latin typeface="Times New Roman" panose="02020603050405020304" pitchFamily="18" charset="0"/>
+                        <a:ea typeface="Times New Roman" panose="02020603050405020304" pitchFamily="18" charset="0"/>
+                        <a:cs typeface="Times New Roman" panose="02020603050405020304" pitchFamily="18" charset="0"/>
+                      </a:endParaRPr>
+                    </a:p>
+                  </a:txBody>
+                  <a:tcPr marL="68580" marR="68580" marT="0" marB="0">
+                    <a:noFill/>
+                  </a:tcPr>
+                </a:tc>
+                <a:tc>
+                  <a:txBody>
+                    <a:bodyPr/>
+                    <a:lstStyle/>
+                    <a:p>
+                      <a:pPr algn="ctr">
+                        <a:buNone/>
+                      </a:pPr>
+                      <a:r>
+                        <a:rPr lang="es-ES" sz="900">
                           <a:effectLst/>
                           <a:latin typeface="Times New Roman" panose="02020603050405020304" pitchFamily="18" charset="0"/>
                           <a:ea typeface="Times New Roman" panose="02020603050405020304" pitchFamily="18" charset="0"/>
                           <a:cs typeface="Times New Roman" panose="02020603050405020304" pitchFamily="18" charset="0"/>
                         </a:rPr>
-                        <a:t>45.93</a:t>
-                      </a:r>
-                    </a:p>
-                  </a:txBody>
-                  <a:tcPr marL="68580" marR="68580" marT="0" marB="0" anchor="ctr">
+                        <a:t>19.05</a:t>
+                      </a:r>
+                      <a:endParaRPr lang="de-DE" sz="900">
+                        <a:effectLst/>
+                        <a:latin typeface="Times New Roman" panose="02020603050405020304" pitchFamily="18" charset="0"/>
+                        <a:ea typeface="Times New Roman" panose="02020603050405020304" pitchFamily="18" charset="0"/>
+                        <a:cs typeface="Times New Roman" panose="02020603050405020304" pitchFamily="18" charset="0"/>
+                      </a:endParaRPr>
+                    </a:p>
+                  </a:txBody>
+                  <a:tcPr marL="68580" marR="68580" marT="0" marB="0">
                     <a:noFill/>
                   </a:tcPr>
                 </a:tc>
@@ -10481,7 +10636,7 @@
                         <a:buNone/>
                       </a:pPr>
                       <a:r>
-                        <a:rPr lang="es-ES_tradnl" sz="1000" b="0" noProof="1">
+                        <a:rPr lang="es-ES_tradnl" sz="900" b="0" noProof="1">
                           <a:solidFill>
                             <a:schemeClr val="tx1"/>
                           </a:solidFill>
@@ -10507,7 +10662,7 @@
                         <a:buNone/>
                       </a:pPr>
                       <a:r>
-                        <a:rPr lang="es-ES_tradnl" sz="1000" dirty="0">
+                        <a:rPr lang="es-ES_tradnl" sz="900" dirty="0">
                           <a:effectLst/>
                           <a:latin typeface="Times New Roman" panose="02020603050405020304" pitchFamily="18" charset="0"/>
                           <a:ea typeface="Times New Roman" panose="02020603050405020304" pitchFamily="18" charset="0"/>
@@ -10530,7 +10685,7 @@
                         <a:buNone/>
                       </a:pPr>
                       <a:r>
-                        <a:rPr lang="es-ES_tradnl" sz="1000" dirty="0">
+                        <a:rPr lang="es-ES_tradnl" sz="900" dirty="0">
                           <a:effectLst/>
                           <a:latin typeface="Times New Roman" panose="02020603050405020304" pitchFamily="18" charset="0"/>
                           <a:ea typeface="Times New Roman" panose="02020603050405020304" pitchFamily="18" charset="0"/>
@@ -10553,7 +10708,7 @@
                         <a:buNone/>
                       </a:pPr>
                       <a:r>
-                        <a:rPr lang="es-ES_tradnl" sz="1000" dirty="0">
+                        <a:rPr lang="es-ES_tradnl" sz="900" dirty="0">
                           <a:effectLst/>
                           <a:latin typeface="Times New Roman" panose="02020603050405020304" pitchFamily="18" charset="0"/>
                           <a:ea typeface="Times New Roman" panose="02020603050405020304" pitchFamily="18" charset="0"/>
@@ -10576,7 +10731,7 @@
                         <a:buNone/>
                       </a:pPr>
                       <a:r>
-                        <a:rPr lang="es-ES_tradnl" sz="1000" dirty="0">
+                        <a:rPr lang="es-ES_tradnl" sz="900" dirty="0">
                           <a:effectLst/>
                           <a:latin typeface="Times New Roman" panose="02020603050405020304" pitchFamily="18" charset="0"/>
                           <a:ea typeface="Times New Roman" panose="02020603050405020304" pitchFamily="18" charset="0"/>
@@ -10599,7 +10754,7 @@
                         <a:buNone/>
                       </a:pPr>
                       <a:r>
-                        <a:rPr lang="es-ES_tradnl" sz="1000" dirty="0">
+                        <a:rPr lang="es-ES_tradnl" sz="900" dirty="0">
                           <a:effectLst/>
                           <a:latin typeface="Times New Roman" panose="02020603050405020304" pitchFamily="18" charset="0"/>
                           <a:ea typeface="Times New Roman" panose="02020603050405020304" pitchFamily="18" charset="0"/>
@@ -10622,7 +10777,7 @@
                         <a:buNone/>
                       </a:pPr>
                       <a:r>
-                        <a:rPr lang="es-ES_tradnl" sz="1000" dirty="0">
+                        <a:rPr lang="es-ES_tradnl" sz="900" dirty="0">
                           <a:effectLst/>
                           <a:latin typeface="Times New Roman" panose="02020603050405020304" pitchFamily="18" charset="0"/>
                           <a:ea typeface="Times New Roman" panose="02020603050405020304" pitchFamily="18" charset="0"/>
@@ -10645,7 +10800,7 @@
                         <a:buNone/>
                       </a:pPr>
                       <a:r>
-                        <a:rPr lang="es-ES_tradnl" sz="1000" dirty="0">
+                        <a:rPr lang="es-ES_tradnl" sz="900" dirty="0">
                           <a:effectLst/>
                           <a:latin typeface="Times New Roman" panose="02020603050405020304" pitchFamily="18" charset="0"/>
                           <a:ea typeface="Times New Roman" panose="02020603050405020304" pitchFamily="18" charset="0"/>
@@ -10668,7 +10823,7 @@
                         <a:buNone/>
                       </a:pPr>
                       <a:r>
-                        <a:rPr lang="es-ES_tradnl" sz="1000" dirty="0">
+                        <a:rPr lang="es-ES_tradnl" sz="900" dirty="0">
                           <a:effectLst/>
                           <a:latin typeface="Times New Roman" panose="02020603050405020304" pitchFamily="18" charset="0"/>
                           <a:ea typeface="Times New Roman" panose="02020603050405020304" pitchFamily="18" charset="0"/>
@@ -10691,7 +10846,7 @@
                         <a:buNone/>
                       </a:pPr>
                       <a:r>
-                        <a:rPr lang="es-ES_tradnl" sz="1000" dirty="0">
+                        <a:rPr lang="es-ES_tradnl" sz="900" dirty="0">
                           <a:effectLst/>
                           <a:latin typeface="Times New Roman" panose="02020603050405020304" pitchFamily="18" charset="0"/>
                           <a:ea typeface="Times New Roman" panose="02020603050405020304" pitchFamily="18" charset="0"/>
@@ -10714,7 +10869,7 @@
                         <a:buNone/>
                       </a:pPr>
                       <a:r>
-                        <a:rPr lang="es-ES_tradnl" sz="1000" dirty="0">
+                        <a:rPr lang="es-ES_tradnl" sz="900" dirty="0">
                           <a:effectLst/>
                           <a:latin typeface="Times New Roman" panose="02020603050405020304" pitchFamily="18" charset="0"/>
                           <a:ea typeface="Times New Roman" panose="02020603050405020304" pitchFamily="18" charset="0"/>
@@ -10737,109 +10892,139 @@
                         <a:buNone/>
                       </a:pPr>
                       <a:r>
-                        <a:rPr lang="es-ES_tradnl" sz="1000" dirty="0">
+                        <a:rPr lang="es-ES" sz="900">
                           <a:effectLst/>
                           <a:latin typeface="Times New Roman" panose="02020603050405020304" pitchFamily="18" charset="0"/>
                           <a:ea typeface="Times New Roman" panose="02020603050405020304" pitchFamily="18" charset="0"/>
                           <a:cs typeface="Times New Roman" panose="02020603050405020304" pitchFamily="18" charset="0"/>
                         </a:rPr>
-                        <a:t>9.92</a:t>
-                      </a:r>
-                    </a:p>
-                  </a:txBody>
-                  <a:tcPr marL="68580" marR="68580" marT="0" marB="0" anchor="ctr">
-                    <a:noFill/>
-                  </a:tcPr>
-                </a:tc>
-                <a:tc>
-                  <a:txBody>
-                    <a:bodyPr/>
-                    <a:lstStyle/>
-                    <a:p>
-                      <a:pPr algn="ctr">
-                        <a:buNone/>
-                      </a:pPr>
-                      <a:r>
-                        <a:rPr lang="es-ES_tradnl" sz="1000" dirty="0">
+                        <a:t>6.00</a:t>
+                      </a:r>
+                      <a:endParaRPr lang="de-DE" sz="900">
+                        <a:effectLst/>
+                        <a:latin typeface="Times New Roman" panose="02020603050405020304" pitchFamily="18" charset="0"/>
+                        <a:ea typeface="Times New Roman" panose="02020603050405020304" pitchFamily="18" charset="0"/>
+                        <a:cs typeface="Times New Roman" panose="02020603050405020304" pitchFamily="18" charset="0"/>
+                      </a:endParaRPr>
+                    </a:p>
+                  </a:txBody>
+                  <a:tcPr marL="68580" marR="68580" marT="0" marB="0">
+                    <a:noFill/>
+                  </a:tcPr>
+                </a:tc>
+                <a:tc>
+                  <a:txBody>
+                    <a:bodyPr/>
+                    <a:lstStyle/>
+                    <a:p>
+                      <a:pPr algn="ctr">
+                        <a:buNone/>
+                      </a:pPr>
+                      <a:r>
+                        <a:rPr lang="es-ES" sz="900">
                           <a:effectLst/>
                           <a:latin typeface="Times New Roman" panose="02020603050405020304" pitchFamily="18" charset="0"/>
                           <a:ea typeface="Times New Roman" panose="02020603050405020304" pitchFamily="18" charset="0"/>
                           <a:cs typeface="Times New Roman" panose="02020603050405020304" pitchFamily="18" charset="0"/>
                         </a:rPr>
-                        <a:t>2.75</a:t>
-                      </a:r>
-                    </a:p>
-                  </a:txBody>
-                  <a:tcPr marL="68580" marR="68580" marT="0" marB="0" anchor="ctr">
-                    <a:noFill/>
-                  </a:tcPr>
-                </a:tc>
-                <a:tc>
-                  <a:txBody>
-                    <a:bodyPr/>
-                    <a:lstStyle/>
-                    <a:p>
-                      <a:pPr algn="ctr">
-                        <a:buNone/>
-                      </a:pPr>
-                      <a:r>
-                        <a:rPr lang="es-ES_tradnl" sz="1000" dirty="0">
+                        <a:t>2.09</a:t>
+                      </a:r>
+                      <a:endParaRPr lang="de-DE" sz="900">
+                        <a:effectLst/>
+                        <a:latin typeface="Times New Roman" panose="02020603050405020304" pitchFamily="18" charset="0"/>
+                        <a:ea typeface="Times New Roman" panose="02020603050405020304" pitchFamily="18" charset="0"/>
+                        <a:cs typeface="Times New Roman" panose="02020603050405020304" pitchFamily="18" charset="0"/>
+                      </a:endParaRPr>
+                    </a:p>
+                  </a:txBody>
+                  <a:tcPr marL="68580" marR="68580" marT="0" marB="0">
+                    <a:noFill/>
+                  </a:tcPr>
+                </a:tc>
+                <a:tc>
+                  <a:txBody>
+                    <a:bodyPr/>
+                    <a:lstStyle/>
+                    <a:p>
+                      <a:pPr algn="ctr">
+                        <a:buNone/>
+                      </a:pPr>
+                      <a:r>
+                        <a:rPr lang="es-ES" sz="900">
                           <a:effectLst/>
                           <a:latin typeface="Times New Roman" panose="02020603050405020304" pitchFamily="18" charset="0"/>
                           <a:ea typeface="Times New Roman" panose="02020603050405020304" pitchFamily="18" charset="0"/>
                           <a:cs typeface="Times New Roman" panose="02020603050405020304" pitchFamily="18" charset="0"/>
                         </a:rPr>
-                        <a:t>39.15</a:t>
-                      </a:r>
-                    </a:p>
-                  </a:txBody>
-                  <a:tcPr marL="68580" marR="68580" marT="0" marB="0" anchor="ctr">
-                    <a:noFill/>
-                  </a:tcPr>
-                </a:tc>
-                <a:tc>
-                  <a:txBody>
-                    <a:bodyPr/>
-                    <a:lstStyle/>
-                    <a:p>
-                      <a:pPr algn="ctr">
-                        <a:buNone/>
-                      </a:pPr>
-                      <a:r>
-                        <a:rPr lang="es-ES_tradnl" sz="1000" dirty="0">
+                        <a:t>25.71</a:t>
+                      </a:r>
+                      <a:endParaRPr lang="de-DE" sz="900">
+                        <a:effectLst/>
+                        <a:latin typeface="Times New Roman" panose="02020603050405020304" pitchFamily="18" charset="0"/>
+                        <a:ea typeface="Times New Roman" panose="02020603050405020304" pitchFamily="18" charset="0"/>
+                        <a:cs typeface="Times New Roman" panose="02020603050405020304" pitchFamily="18" charset="0"/>
+                      </a:endParaRPr>
+                    </a:p>
+                  </a:txBody>
+                  <a:tcPr marL="68580" marR="68580" marT="0" marB="0">
+                    <a:noFill/>
+                  </a:tcPr>
+                </a:tc>
+                <a:tc>
+                  <a:txBody>
+                    <a:bodyPr/>
+                    <a:lstStyle/>
+                    <a:p>
+                      <a:pPr algn="ctr">
+                        <a:buNone/>
+                      </a:pPr>
+                      <a:r>
+                        <a:rPr lang="es-ES" sz="900">
                           <a:effectLst/>
                           <a:latin typeface="Times New Roman" panose="02020603050405020304" pitchFamily="18" charset="0"/>
                           <a:ea typeface="Times New Roman" panose="02020603050405020304" pitchFamily="18" charset="0"/>
                           <a:cs typeface="Times New Roman" panose="02020603050405020304" pitchFamily="18" charset="0"/>
                         </a:rPr>
-                        <a:t>6.31</a:t>
-                      </a:r>
-                    </a:p>
-                  </a:txBody>
-                  <a:tcPr marL="68580" marR="68580" marT="0" marB="0" anchor="ctr">
-                    <a:noFill/>
-                  </a:tcPr>
-                </a:tc>
-                <a:tc>
-                  <a:txBody>
-                    <a:bodyPr/>
-                    <a:lstStyle/>
-                    <a:p>
-                      <a:pPr algn="ctr">
-                        <a:buNone/>
-                      </a:pPr>
-                      <a:r>
-                        <a:rPr lang="es-ES_tradnl" sz="1000" dirty="0">
+                        <a:t>4.92</a:t>
+                      </a:r>
+                      <a:endParaRPr lang="de-DE" sz="900">
+                        <a:effectLst/>
+                        <a:latin typeface="Times New Roman" panose="02020603050405020304" pitchFamily="18" charset="0"/>
+                        <a:ea typeface="Times New Roman" panose="02020603050405020304" pitchFamily="18" charset="0"/>
+                        <a:cs typeface="Times New Roman" panose="02020603050405020304" pitchFamily="18" charset="0"/>
+                      </a:endParaRPr>
+                    </a:p>
+                  </a:txBody>
+                  <a:tcPr marL="68580" marR="68580" marT="0" marB="0">
+                    <a:noFill/>
+                  </a:tcPr>
+                </a:tc>
+                <a:tc>
+                  <a:txBody>
+                    <a:bodyPr/>
+                    <a:lstStyle/>
+                    <a:p>
+                      <a:pPr algn="ctr">
+                        <a:buNone/>
+                      </a:pPr>
+                      <a:r>
+                        <a:rPr lang="es-ES" sz="900" dirty="0">
                           <a:effectLst/>
                           <a:latin typeface="Times New Roman" panose="02020603050405020304" pitchFamily="18" charset="0"/>
                           <a:ea typeface="Times New Roman" panose="02020603050405020304" pitchFamily="18" charset="0"/>
                           <a:cs typeface="Times New Roman" panose="02020603050405020304" pitchFamily="18" charset="0"/>
                         </a:rPr>
-                        <a:t>50.55</a:t>
-                      </a:r>
-                    </a:p>
-                  </a:txBody>
-                  <a:tcPr marL="68580" marR="68580" marT="0" marB="0" anchor="ctr">
+                        <a:t>20.12</a:t>
+                      </a:r>
+                      <a:endParaRPr lang="de-DE" sz="900" dirty="0">
+                        <a:effectLst/>
+                        <a:latin typeface="Times New Roman" panose="02020603050405020304" pitchFamily="18" charset="0"/>
+                        <a:ea typeface="Times New Roman" panose="02020603050405020304" pitchFamily="18" charset="0"/>
+                        <a:cs typeface="Times New Roman" panose="02020603050405020304" pitchFamily="18" charset="0"/>
+                      </a:endParaRPr>
+                    </a:p>
+                  </a:txBody>
+                  <a:tcPr marL="68580" marR="68580" marT="0" marB="0">
                     <a:noFill/>
                   </a:tcPr>
                 </a:tc>
@@ -10858,7 +11043,7 @@
                       <a:pPr algn="ctr">
                         <a:buNone/>
                       </a:pPr>
-                      <a:endParaRPr lang="es-ES_tradnl" sz="1000" b="0" noProof="1">
+                      <a:endParaRPr lang="es-ES_tradnl" sz="900" b="0" noProof="1">
                         <a:solidFill>
                           <a:schemeClr val="tx1"/>
                         </a:solidFill>
@@ -10881,7 +11066,7 @@
                       <a:pPr algn="ctr">
                         <a:buNone/>
                       </a:pPr>
-                      <a:endParaRPr lang="es-ES_tradnl" sz="1000" dirty="0">
+                      <a:endParaRPr lang="es-ES_tradnl" sz="900" dirty="0">
                         <a:effectLst/>
                         <a:latin typeface="Times New Roman" panose="02020603050405020304" pitchFamily="18" charset="0"/>
                         <a:ea typeface="Times New Roman" panose="02020603050405020304" pitchFamily="18" charset="0"/>
@@ -10901,7 +11086,7 @@
                       <a:pPr algn="ctr">
                         <a:buNone/>
                       </a:pPr>
-                      <a:endParaRPr lang="es-ES_tradnl" sz="1000" dirty="0">
+                      <a:endParaRPr lang="es-ES_tradnl" sz="900" dirty="0">
                         <a:effectLst/>
                         <a:latin typeface="Times New Roman" panose="02020603050405020304" pitchFamily="18" charset="0"/>
                         <a:ea typeface="Times New Roman" panose="02020603050405020304" pitchFamily="18" charset="0"/>
@@ -10921,7 +11106,7 @@
                       <a:pPr algn="ctr">
                         <a:buNone/>
                       </a:pPr>
-                      <a:endParaRPr lang="es-ES_tradnl" sz="1000" dirty="0">
+                      <a:endParaRPr lang="es-ES_tradnl" sz="900" dirty="0">
                         <a:effectLst/>
                         <a:latin typeface="Times New Roman" panose="02020603050405020304" pitchFamily="18" charset="0"/>
                         <a:ea typeface="Times New Roman" panose="02020603050405020304" pitchFamily="18" charset="0"/>
@@ -10941,7 +11126,7 @@
                       <a:pPr algn="ctr">
                         <a:buNone/>
                       </a:pPr>
-                      <a:endParaRPr lang="es-ES_tradnl" sz="1000" dirty="0">
+                      <a:endParaRPr lang="es-ES_tradnl" sz="900" dirty="0">
                         <a:effectLst/>
                         <a:latin typeface="Times New Roman" panose="02020603050405020304" pitchFamily="18" charset="0"/>
                         <a:ea typeface="Times New Roman" panose="02020603050405020304" pitchFamily="18" charset="0"/>
@@ -10961,7 +11146,7 @@
                       <a:pPr algn="ctr">
                         <a:buNone/>
                       </a:pPr>
-                      <a:endParaRPr lang="es-ES_tradnl" sz="1000" dirty="0">
+                      <a:endParaRPr lang="es-ES_tradnl" sz="900" dirty="0">
                         <a:effectLst/>
                         <a:latin typeface="Times New Roman" panose="02020603050405020304" pitchFamily="18" charset="0"/>
                         <a:ea typeface="Times New Roman" panose="02020603050405020304" pitchFamily="18" charset="0"/>
@@ -10981,7 +11166,7 @@
                       <a:pPr algn="ctr">
                         <a:buNone/>
                       </a:pPr>
-                      <a:endParaRPr lang="es-ES_tradnl" sz="1000" dirty="0">
+                      <a:endParaRPr lang="es-ES_tradnl" sz="900" dirty="0">
                         <a:effectLst/>
                         <a:latin typeface="Times New Roman" panose="02020603050405020304" pitchFamily="18" charset="0"/>
                         <a:ea typeface="Times New Roman" panose="02020603050405020304" pitchFamily="18" charset="0"/>
@@ -11001,7 +11186,7 @@
                       <a:pPr algn="ctr">
                         <a:buNone/>
                       </a:pPr>
-                      <a:endParaRPr lang="es-ES_tradnl" sz="1000" dirty="0">
+                      <a:endParaRPr lang="es-ES_tradnl" sz="900" dirty="0">
                         <a:effectLst/>
                         <a:latin typeface="Times New Roman" panose="02020603050405020304" pitchFamily="18" charset="0"/>
                         <a:ea typeface="Times New Roman" panose="02020603050405020304" pitchFamily="18" charset="0"/>
@@ -11021,7 +11206,7 @@
                       <a:pPr algn="ctr">
                         <a:buNone/>
                       </a:pPr>
-                      <a:endParaRPr lang="es-ES_tradnl" sz="1000" dirty="0">
+                      <a:endParaRPr lang="es-ES_tradnl" sz="900" dirty="0">
                         <a:effectLst/>
                         <a:latin typeface="Times New Roman" panose="02020603050405020304" pitchFamily="18" charset="0"/>
                         <a:ea typeface="Times New Roman" panose="02020603050405020304" pitchFamily="18" charset="0"/>
@@ -11041,7 +11226,7 @@
                       <a:pPr algn="ctr">
                         <a:buNone/>
                       </a:pPr>
-                      <a:endParaRPr lang="es-ES_tradnl" sz="1000" dirty="0">
+                      <a:endParaRPr lang="es-ES_tradnl" sz="900" dirty="0">
                         <a:effectLst/>
                         <a:latin typeface="Times New Roman" panose="02020603050405020304" pitchFamily="18" charset="0"/>
                         <a:ea typeface="Times New Roman" panose="02020603050405020304" pitchFamily="18" charset="0"/>
@@ -11061,7 +11246,7 @@
                       <a:pPr algn="ctr">
                         <a:buNone/>
                       </a:pPr>
-                      <a:endParaRPr lang="es-ES_tradnl" sz="1000" dirty="0">
+                      <a:endParaRPr lang="es-ES_tradnl" sz="900" dirty="0">
                         <a:effectLst/>
                         <a:latin typeface="Times New Roman" panose="02020603050405020304" pitchFamily="18" charset="0"/>
                         <a:ea typeface="Times New Roman" panose="02020603050405020304" pitchFamily="18" charset="0"/>
@@ -11081,7 +11266,7 @@
                       <a:pPr algn="ctr">
                         <a:buNone/>
                       </a:pPr>
-                      <a:endParaRPr lang="es-ES_tradnl" sz="1000" dirty="0">
+                      <a:endParaRPr lang="es-ES_tradnl" sz="900" dirty="0">
                         <a:effectLst/>
                         <a:latin typeface="Times New Roman" panose="02020603050405020304" pitchFamily="18" charset="0"/>
                         <a:ea typeface="Times New Roman" panose="02020603050405020304" pitchFamily="18" charset="0"/>
@@ -11101,7 +11286,7 @@
                       <a:pPr algn="ctr">
                         <a:buNone/>
                       </a:pPr>
-                      <a:endParaRPr lang="es-ES_tradnl" sz="1000" dirty="0">
+                      <a:endParaRPr lang="es-ES_tradnl" sz="900" dirty="0">
                         <a:effectLst/>
                         <a:latin typeface="Times New Roman" panose="02020603050405020304" pitchFamily="18" charset="0"/>
                         <a:ea typeface="Times New Roman" panose="02020603050405020304" pitchFamily="18" charset="0"/>
@@ -11121,7 +11306,7 @@
                       <a:pPr algn="ctr">
                         <a:buNone/>
                       </a:pPr>
-                      <a:endParaRPr lang="es-ES_tradnl" sz="1000" dirty="0">
+                      <a:endParaRPr lang="es-ES_tradnl" sz="900" dirty="0">
                         <a:effectLst/>
                         <a:latin typeface="Times New Roman" panose="02020603050405020304" pitchFamily="18" charset="0"/>
                         <a:ea typeface="Times New Roman" panose="02020603050405020304" pitchFamily="18" charset="0"/>
@@ -11141,7 +11326,7 @@
                       <a:pPr algn="ctr">
                         <a:buNone/>
                       </a:pPr>
-                      <a:endParaRPr lang="es-ES_tradnl" sz="1000" dirty="0">
+                      <a:endParaRPr lang="es-ES_tradnl" sz="900" dirty="0">
                         <a:effectLst/>
                         <a:latin typeface="Times New Roman" panose="02020603050405020304" pitchFamily="18" charset="0"/>
                         <a:ea typeface="Times New Roman" panose="02020603050405020304" pitchFamily="18" charset="0"/>
@@ -11161,7 +11346,7 @@
                       <a:pPr algn="ctr">
                         <a:buNone/>
                       </a:pPr>
-                      <a:endParaRPr lang="es-ES_tradnl" sz="1000" dirty="0">
+                      <a:endParaRPr lang="es-ES_tradnl" sz="900" dirty="0">
                         <a:effectLst/>
                         <a:latin typeface="Times New Roman" panose="02020603050405020304" pitchFamily="18" charset="0"/>
                         <a:ea typeface="Times New Roman" panose="02020603050405020304" pitchFamily="18" charset="0"/>
@@ -11188,7 +11373,7 @@
                       <a:pPr algn="ctr">
                         <a:buNone/>
                       </a:pPr>
-                      <a:endParaRPr lang="es-ES_tradnl" sz="1000" b="0" noProof="1">
+                      <a:endParaRPr lang="es-ES_tradnl" sz="900" b="0" noProof="1">
                         <a:solidFill>
                           <a:schemeClr val="tx1"/>
                         </a:solidFill>
@@ -11220,7 +11405,7 @@
                       <a:pPr algn="ctr">
                         <a:buNone/>
                       </a:pPr>
-                      <a:endParaRPr lang="es-ES_tradnl" sz="1000" dirty="0">
+                      <a:endParaRPr lang="es-ES_tradnl" sz="900" dirty="0">
                         <a:effectLst/>
                         <a:latin typeface="Times New Roman" panose="02020603050405020304" pitchFamily="18" charset="0"/>
                         <a:ea typeface="Times New Roman" panose="02020603050405020304" pitchFamily="18" charset="0"/>
@@ -11249,7 +11434,7 @@
                       <a:pPr algn="ctr">
                         <a:buNone/>
                       </a:pPr>
-                      <a:endParaRPr lang="es-ES_tradnl" sz="1000" dirty="0">
+                      <a:endParaRPr lang="es-ES_tradnl" sz="900" dirty="0">
                         <a:effectLst/>
                         <a:latin typeface="Times New Roman" panose="02020603050405020304" pitchFamily="18" charset="0"/>
                         <a:ea typeface="Times New Roman" panose="02020603050405020304" pitchFamily="18" charset="0"/>
@@ -11278,7 +11463,7 @@
                       <a:pPr algn="ctr">
                         <a:buNone/>
                       </a:pPr>
-                      <a:endParaRPr lang="es-ES_tradnl" sz="1000" dirty="0">
+                      <a:endParaRPr lang="es-ES_tradnl" sz="900" dirty="0">
                         <a:effectLst/>
                         <a:latin typeface="Times New Roman" panose="02020603050405020304" pitchFamily="18" charset="0"/>
                         <a:ea typeface="Times New Roman" panose="02020603050405020304" pitchFamily="18" charset="0"/>
@@ -11307,7 +11492,7 @@
                       <a:pPr algn="ctr">
                         <a:buNone/>
                       </a:pPr>
-                      <a:endParaRPr lang="es-ES_tradnl" sz="1000" dirty="0">
+                      <a:endParaRPr lang="es-ES_tradnl" sz="900" dirty="0">
                         <a:effectLst/>
                         <a:latin typeface="Times New Roman" panose="02020603050405020304" pitchFamily="18" charset="0"/>
                         <a:ea typeface="Times New Roman" panose="02020603050405020304" pitchFamily="18" charset="0"/>
@@ -11336,7 +11521,7 @@
                       <a:pPr algn="ctr">
                         <a:buNone/>
                       </a:pPr>
-                      <a:endParaRPr lang="es-ES_tradnl" sz="1000" dirty="0">
+                      <a:endParaRPr lang="es-ES_tradnl" sz="900" dirty="0">
                         <a:effectLst/>
                         <a:latin typeface="Times New Roman" panose="02020603050405020304" pitchFamily="18" charset="0"/>
                         <a:ea typeface="Times New Roman" panose="02020603050405020304" pitchFamily="18" charset="0"/>
@@ -11365,7 +11550,7 @@
                       <a:pPr algn="ctr">
                         <a:buNone/>
                       </a:pPr>
-                      <a:endParaRPr lang="es-ES_tradnl" sz="1000" dirty="0">
+                      <a:endParaRPr lang="es-ES_tradnl" sz="900" dirty="0">
                         <a:effectLst/>
                         <a:latin typeface="Times New Roman" panose="02020603050405020304" pitchFamily="18" charset="0"/>
                         <a:ea typeface="Times New Roman" panose="02020603050405020304" pitchFamily="18" charset="0"/>
@@ -11394,7 +11579,7 @@
                       <a:pPr algn="ctr">
                         <a:buNone/>
                       </a:pPr>
-                      <a:endParaRPr lang="es-ES_tradnl" sz="1000" dirty="0">
+                      <a:endParaRPr lang="es-ES_tradnl" sz="900" dirty="0">
                         <a:effectLst/>
                         <a:latin typeface="Times New Roman" panose="02020603050405020304" pitchFamily="18" charset="0"/>
                         <a:ea typeface="Times New Roman" panose="02020603050405020304" pitchFamily="18" charset="0"/>
@@ -11423,7 +11608,7 @@
                       <a:pPr algn="ctr">
                         <a:buNone/>
                       </a:pPr>
-                      <a:endParaRPr lang="es-ES_tradnl" sz="1000" dirty="0">
+                      <a:endParaRPr lang="es-ES_tradnl" sz="900" dirty="0">
                         <a:effectLst/>
                         <a:latin typeface="Times New Roman" panose="02020603050405020304" pitchFamily="18" charset="0"/>
                         <a:ea typeface="Times New Roman" panose="02020603050405020304" pitchFamily="18" charset="0"/>
@@ -11452,7 +11637,7 @@
                       <a:pPr algn="ctr">
                         <a:buNone/>
                       </a:pPr>
-                      <a:endParaRPr lang="es-ES_tradnl" sz="1000" dirty="0">
+                      <a:endParaRPr lang="es-ES_tradnl" sz="900" dirty="0">
                         <a:effectLst/>
                         <a:latin typeface="Times New Roman" panose="02020603050405020304" pitchFamily="18" charset="0"/>
                         <a:ea typeface="Times New Roman" panose="02020603050405020304" pitchFamily="18" charset="0"/>
@@ -11481,7 +11666,7 @@
                       <a:pPr algn="ctr">
                         <a:buNone/>
                       </a:pPr>
-                      <a:endParaRPr lang="es-ES_tradnl" sz="1000" dirty="0">
+                      <a:endParaRPr lang="es-ES_tradnl" sz="900" dirty="0">
                         <a:effectLst/>
                         <a:latin typeface="Times New Roman" panose="02020603050405020304" pitchFamily="18" charset="0"/>
                         <a:ea typeface="Times New Roman" panose="02020603050405020304" pitchFamily="18" charset="0"/>
@@ -11510,7 +11695,7 @@
                       <a:pPr algn="ctr">
                         <a:buNone/>
                       </a:pPr>
-                      <a:endParaRPr lang="es-ES_tradnl" sz="1000" dirty="0">
+                      <a:endParaRPr lang="es-ES_tradnl" sz="900" dirty="0">
                         <a:effectLst/>
                         <a:latin typeface="Times New Roman" panose="02020603050405020304" pitchFamily="18" charset="0"/>
                         <a:ea typeface="Times New Roman" panose="02020603050405020304" pitchFamily="18" charset="0"/>
@@ -11539,7 +11724,7 @@
                       <a:pPr algn="ctr">
                         <a:buNone/>
                       </a:pPr>
-                      <a:endParaRPr lang="es-ES_tradnl" sz="1000" dirty="0">
+                      <a:endParaRPr lang="es-ES_tradnl" sz="900" dirty="0">
                         <a:effectLst/>
                         <a:latin typeface="Times New Roman" panose="02020603050405020304" pitchFamily="18" charset="0"/>
                         <a:ea typeface="Times New Roman" panose="02020603050405020304" pitchFamily="18" charset="0"/>
@@ -11568,7 +11753,7 @@
                       <a:pPr algn="ctr">
                         <a:buNone/>
                       </a:pPr>
-                      <a:endParaRPr lang="es-ES_tradnl" sz="1000" dirty="0">
+                      <a:endParaRPr lang="es-ES_tradnl" sz="900" dirty="0">
                         <a:effectLst/>
                         <a:latin typeface="Times New Roman" panose="02020603050405020304" pitchFamily="18" charset="0"/>
                         <a:ea typeface="Times New Roman" panose="02020603050405020304" pitchFamily="18" charset="0"/>
@@ -11597,7 +11782,7 @@
                       <a:pPr algn="ctr">
                         <a:buNone/>
                       </a:pPr>
-                      <a:endParaRPr lang="es-ES_tradnl" sz="1000" dirty="0">
+                      <a:endParaRPr lang="es-ES_tradnl" sz="900" dirty="0">
                         <a:effectLst/>
                         <a:latin typeface="Times New Roman" panose="02020603050405020304" pitchFamily="18" charset="0"/>
                         <a:ea typeface="Times New Roman" panose="02020603050405020304" pitchFamily="18" charset="0"/>
@@ -11626,7 +11811,7 @@
                       <a:pPr algn="ctr">
                         <a:buNone/>
                       </a:pPr>
-                      <a:endParaRPr lang="es-ES_tradnl" sz="1000" dirty="0">
+                      <a:endParaRPr lang="es-ES_tradnl" sz="900" dirty="0">
                         <a:effectLst/>
                         <a:latin typeface="Times New Roman" panose="02020603050405020304" pitchFamily="18" charset="0"/>
                         <a:ea typeface="Times New Roman" panose="02020603050405020304" pitchFamily="18" charset="0"/>
@@ -12035,38 +12220,6 @@
           </a:p>
         </p:txBody>
       </p:sp>
-      <p:pic>
-        <p:nvPicPr>
-          <p:cNvPr id="14" name="Onlinebild-Platzhalter 13">
-            <a:extLst>
-              <a:ext uri="{FF2B5EF4-FFF2-40B4-BE49-F238E27FC236}">
-                <a16:creationId xmlns:a16="http://schemas.microsoft.com/office/drawing/2014/main" id="{DC1AE4F2-5BD8-4AFC-DDBE-E657174FDAA3}"/>
-              </a:ext>
-            </a:extLst>
-          </p:cNvPr>
-          <p:cNvPicPr>
-            <a:picLocks noGrp="1" noChangeAspect="1"/>
-          </p:cNvPicPr>
-          <p:nvPr>
-            <p:ph type="clipArt" sz="quarter" idx="15"/>
-          </p:nvPr>
-        </p:nvPicPr>
-        <p:blipFill>
-          <a:blip r:embed="rId2"/>
-          <a:stretch>
-            <a:fillRect/>
-          </a:stretch>
-        </p:blipFill>
-        <p:spPr>
-          <a:xfrm>
-            <a:off x="583920" y="2151063"/>
-            <a:ext cx="5239310" cy="4008437"/>
-          </a:xfrm>
-          <a:prstGeom prst="rect">
-            <a:avLst/>
-          </a:prstGeom>
-        </p:spPr>
-      </p:pic>
       <p:sp>
         <p:nvSpPr>
           <p:cNvPr id="2" name="Fußzeilenplatzhalter 2">
@@ -12196,6 +12349,38 @@
           </a:p>
         </p:txBody>
       </p:sp>
+      <p:pic>
+        <p:nvPicPr>
+          <p:cNvPr id="7" name="Onlinebild-Platzhalter 6">
+            <a:extLst>
+              <a:ext uri="{FF2B5EF4-FFF2-40B4-BE49-F238E27FC236}">
+                <a16:creationId xmlns:a16="http://schemas.microsoft.com/office/drawing/2014/main" id="{5EA8DBAA-C573-EB10-80B5-A35FE542DAA1}"/>
+              </a:ext>
+            </a:extLst>
+          </p:cNvPr>
+          <p:cNvPicPr>
+            <a:picLocks noGrp="1" noChangeAspect="1"/>
+          </p:cNvPicPr>
+          <p:nvPr>
+            <p:ph type="clipArt" sz="quarter" idx="15"/>
+          </p:nvPr>
+        </p:nvPicPr>
+        <p:blipFill>
+          <a:blip r:embed="rId2"/>
+          <a:stretch>
+            <a:fillRect/>
+          </a:stretch>
+        </p:blipFill>
+        <p:spPr>
+          <a:xfrm>
+            <a:off x="639591" y="2151063"/>
+            <a:ext cx="5127968" cy="4008437"/>
+          </a:xfrm>
+          <a:prstGeom prst="rect">
+            <a:avLst/>
+          </a:prstGeom>
+        </p:spPr>
+      </p:pic>
     </p:spTree>
     <p:extLst>
       <p:ext uri="{BB962C8B-B14F-4D97-AF65-F5344CB8AC3E}">
@@ -12286,14 +12471,14 @@
             <p:ph sz="quarter" idx="14"/>
             <p:extLst>
               <p:ext uri="{D42A27DB-BD31-4B8C-83A1-F6EECF244321}">
-                <p14:modId xmlns:p14="http://schemas.microsoft.com/office/powerpoint/2010/main" val="3566613540"/>
+                <p14:modId xmlns:p14="http://schemas.microsoft.com/office/powerpoint/2010/main" val="152371969"/>
               </p:ext>
             </p:extLst>
           </p:nvPr>
         </p:nvGraphicFramePr>
         <p:xfrm>
           <a:off x="561487" y="4667091"/>
-          <a:ext cx="10532960" cy="1605280"/>
+          <a:ext cx="10532960" cy="1210945"/>
         </p:xfrm>
         <a:graphic>
           <a:graphicData uri="http://schemas.openxmlformats.org/drawingml/2006/table">
@@ -13316,7 +13501,7 @@
                         <a:buNone/>
                       </a:pPr>
                       <a:r>
-                        <a:rPr lang="es-ES_tradnl" sz="1050" dirty="0">
+                        <a:rPr lang="es-ES_tradnl" sz="900" dirty="0">
                           <a:effectLst/>
                           <a:latin typeface="Times New Roman" panose="02020603050405020304" pitchFamily="18" charset="0"/>
                           <a:ea typeface="Times New Roman" panose="02020603050405020304" pitchFamily="18" charset="0"/>
@@ -13348,7 +13533,7 @@
                         <a:buNone/>
                       </a:pPr>
                       <a:r>
-                        <a:rPr lang="es-ES_tradnl" sz="1050" dirty="0">
+                        <a:rPr lang="es-ES_tradnl" sz="900" dirty="0">
                           <a:effectLst/>
                           <a:latin typeface="Times New Roman" panose="02020603050405020304" pitchFamily="18" charset="0"/>
                           <a:ea typeface="Times New Roman" panose="02020603050405020304" pitchFamily="18" charset="0"/>
@@ -13380,7 +13565,7 @@
                         <a:buNone/>
                       </a:pPr>
                       <a:r>
-                        <a:rPr lang="es-ES_tradnl" sz="1050" dirty="0">
+                        <a:rPr lang="es-ES_tradnl" sz="900" dirty="0">
                           <a:effectLst/>
                           <a:latin typeface="Times New Roman" panose="02020603050405020304" pitchFamily="18" charset="0"/>
                           <a:ea typeface="Times New Roman" panose="02020603050405020304" pitchFamily="18" charset="0"/>
@@ -13412,7 +13597,7 @@
                         <a:buNone/>
                       </a:pPr>
                       <a:r>
-                        <a:rPr lang="es-ES_tradnl" sz="1050" dirty="0">
+                        <a:rPr lang="es-ES_tradnl" sz="900" dirty="0">
                           <a:effectLst/>
                           <a:latin typeface="Times New Roman" panose="02020603050405020304" pitchFamily="18" charset="0"/>
                           <a:ea typeface="Times New Roman" panose="02020603050405020304" pitchFamily="18" charset="0"/>
@@ -13444,7 +13629,7 @@
                         <a:buNone/>
                       </a:pPr>
                       <a:r>
-                        <a:rPr lang="es-ES_tradnl" sz="1050" dirty="0">
+                        <a:rPr lang="es-ES_tradnl" sz="900" dirty="0">
                           <a:effectLst/>
                           <a:latin typeface="Times New Roman" panose="02020603050405020304" pitchFamily="18" charset="0"/>
                           <a:ea typeface="Times New Roman" panose="02020603050405020304" pitchFamily="18" charset="0"/>
@@ -13476,7 +13661,7 @@
                         <a:buNone/>
                       </a:pPr>
                       <a:r>
-                        <a:rPr lang="es-ES_tradnl" sz="1050" dirty="0">
+                        <a:rPr lang="es-ES_tradnl" sz="900" dirty="0">
                           <a:effectLst/>
                           <a:latin typeface="Times New Roman" panose="02020603050405020304" pitchFamily="18" charset="0"/>
                           <a:ea typeface="Times New Roman" panose="02020603050405020304" pitchFamily="18" charset="0"/>
@@ -13508,7 +13693,7 @@
                         <a:buNone/>
                       </a:pPr>
                       <a:r>
-                        <a:rPr lang="es-ES_tradnl" sz="1050" dirty="0">
+                        <a:rPr lang="es-ES_tradnl" sz="900" dirty="0">
                           <a:effectLst/>
                           <a:latin typeface="Times New Roman" panose="02020603050405020304" pitchFamily="18" charset="0"/>
                           <a:ea typeface="Times New Roman" panose="02020603050405020304" pitchFamily="18" charset="0"/>
@@ -13540,7 +13725,7 @@
                         <a:buNone/>
                       </a:pPr>
                       <a:r>
-                        <a:rPr lang="es-ES_tradnl" sz="1050" dirty="0">
+                        <a:rPr lang="es-ES_tradnl" sz="900" dirty="0">
                           <a:effectLst/>
                           <a:latin typeface="Times New Roman" panose="02020603050405020304" pitchFamily="18" charset="0"/>
                           <a:ea typeface="Times New Roman" panose="02020603050405020304" pitchFamily="18" charset="0"/>
@@ -13572,7 +13757,7 @@
                         <a:buNone/>
                       </a:pPr>
                       <a:r>
-                        <a:rPr lang="es-ES_tradnl" sz="1050" dirty="0">
+                        <a:rPr lang="es-ES_tradnl" sz="900" dirty="0">
                           <a:effectLst/>
                           <a:latin typeface="Times New Roman" panose="02020603050405020304" pitchFamily="18" charset="0"/>
                           <a:ea typeface="Times New Roman" panose="02020603050405020304" pitchFamily="18" charset="0"/>
@@ -13604,7 +13789,7 @@
                         <a:buNone/>
                       </a:pPr>
                       <a:r>
-                        <a:rPr lang="es-ES_tradnl" sz="1050" dirty="0">
+                        <a:rPr lang="es-ES_tradnl" sz="900" dirty="0">
                           <a:effectLst/>
                           <a:latin typeface="Times New Roman" panose="02020603050405020304" pitchFamily="18" charset="0"/>
                           <a:ea typeface="Times New Roman" panose="02020603050405020304" pitchFamily="18" charset="0"/>
@@ -13636,17 +13821,23 @@
                         <a:buNone/>
                       </a:pPr>
                       <a:r>
-                        <a:rPr lang="es-ES_tradnl" sz="1050" dirty="0">
+                        <a:rPr lang="es-ES" sz="900" dirty="0">
                           <a:effectLst/>
                           <a:latin typeface="Times New Roman" panose="02020603050405020304" pitchFamily="18" charset="0"/>
                           <a:ea typeface="Times New Roman" panose="02020603050405020304" pitchFamily="18" charset="0"/>
                           <a:cs typeface="Times New Roman" panose="02020603050405020304" pitchFamily="18" charset="0"/>
                         </a:rPr>
-                        <a:t>9.92</a:t>
-                      </a:r>
-                    </a:p>
-                  </a:txBody>
-                  <a:tcPr marL="68580" marR="68580" marT="0" marB="0" anchor="ctr">
+                        <a:t>6.00</a:t>
+                      </a:r>
+                      <a:endParaRPr lang="de-DE" sz="900" dirty="0">
+                        <a:effectLst/>
+                        <a:latin typeface="Times New Roman" panose="02020603050405020304" pitchFamily="18" charset="0"/>
+                        <a:ea typeface="Times New Roman" panose="02020603050405020304" pitchFamily="18" charset="0"/>
+                        <a:cs typeface="Times New Roman" panose="02020603050405020304" pitchFamily="18" charset="0"/>
+                      </a:endParaRPr>
+                    </a:p>
+                  </a:txBody>
+                  <a:tcPr marL="68580" marR="68580" marT="0" marB="0">
                     <a:lnT w="12700" cap="flat" cmpd="sng" algn="ctr">
                       <a:solidFill>
                         <a:schemeClr val="tx1"/>
@@ -13668,17 +13859,23 @@
                         <a:buNone/>
                       </a:pPr>
                       <a:r>
-                        <a:rPr lang="es-ES_tradnl" sz="1050" dirty="0">
+                        <a:rPr lang="es-ES" sz="900" dirty="0">
                           <a:effectLst/>
                           <a:latin typeface="Times New Roman" panose="02020603050405020304" pitchFamily="18" charset="0"/>
                           <a:ea typeface="Times New Roman" panose="02020603050405020304" pitchFamily="18" charset="0"/>
                           <a:cs typeface="Times New Roman" panose="02020603050405020304" pitchFamily="18" charset="0"/>
                         </a:rPr>
-                        <a:t>2.00</a:t>
-                      </a:r>
-                    </a:p>
-                  </a:txBody>
-                  <a:tcPr marL="68580" marR="68580" marT="0" marB="0" anchor="ctr">
+                        <a:t>1.73</a:t>
+                      </a:r>
+                      <a:endParaRPr lang="de-DE" sz="900" dirty="0">
+                        <a:effectLst/>
+                        <a:latin typeface="Times New Roman" panose="02020603050405020304" pitchFamily="18" charset="0"/>
+                        <a:ea typeface="Times New Roman" panose="02020603050405020304" pitchFamily="18" charset="0"/>
+                        <a:cs typeface="Times New Roman" panose="02020603050405020304" pitchFamily="18" charset="0"/>
+                      </a:endParaRPr>
+                    </a:p>
+                  </a:txBody>
+                  <a:tcPr marL="68580" marR="68580" marT="0" marB="0">
                     <a:lnT w="12700" cap="flat" cmpd="sng" algn="ctr">
                       <a:solidFill>
                         <a:schemeClr val="tx1"/>
@@ -13700,17 +13897,23 @@
                         <a:buNone/>
                       </a:pPr>
                       <a:r>
-                        <a:rPr lang="es-ES_tradnl" sz="1050" dirty="0">
+                        <a:rPr lang="es-ES" sz="900">
                           <a:effectLst/>
                           <a:latin typeface="Times New Roman" panose="02020603050405020304" pitchFamily="18" charset="0"/>
                           <a:ea typeface="Times New Roman" panose="02020603050405020304" pitchFamily="18" charset="0"/>
                           <a:cs typeface="Times New Roman" panose="02020603050405020304" pitchFamily="18" charset="0"/>
                         </a:rPr>
-                        <a:t>18.98</a:t>
-                      </a:r>
-                    </a:p>
-                  </a:txBody>
-                  <a:tcPr marL="68580" marR="68580" marT="0" marB="0" anchor="ctr">
+                        <a:t>17.47</a:t>
+                      </a:r>
+                      <a:endParaRPr lang="de-DE" sz="900">
+                        <a:effectLst/>
+                        <a:latin typeface="Times New Roman" panose="02020603050405020304" pitchFamily="18" charset="0"/>
+                        <a:ea typeface="Times New Roman" panose="02020603050405020304" pitchFamily="18" charset="0"/>
+                        <a:cs typeface="Times New Roman" panose="02020603050405020304" pitchFamily="18" charset="0"/>
+                      </a:endParaRPr>
+                    </a:p>
+                  </a:txBody>
+                  <a:tcPr marL="68580" marR="68580" marT="0" marB="0">
                     <a:lnT w="12700" cap="flat" cmpd="sng" algn="ctr">
                       <a:solidFill>
                         <a:schemeClr val="tx1"/>
@@ -13732,17 +13935,23 @@
                         <a:buNone/>
                       </a:pPr>
                       <a:r>
-                        <a:rPr lang="es-ES_tradnl" sz="1050" dirty="0">
+                        <a:rPr lang="es-ES" sz="900">
                           <a:effectLst/>
                           <a:latin typeface="Times New Roman" panose="02020603050405020304" pitchFamily="18" charset="0"/>
                           <a:ea typeface="Times New Roman" panose="02020603050405020304" pitchFamily="18" charset="0"/>
                           <a:cs typeface="Times New Roman" panose="02020603050405020304" pitchFamily="18" charset="0"/>
                         </a:rPr>
-                        <a:t>3.57</a:t>
-                      </a:r>
-                    </a:p>
-                  </a:txBody>
-                  <a:tcPr marL="68580" marR="68580" marT="0" marB="0" anchor="ctr">
+                        <a:t>3.51</a:t>
+                      </a:r>
+                      <a:endParaRPr lang="de-DE" sz="900">
+                        <a:effectLst/>
+                        <a:latin typeface="Times New Roman" panose="02020603050405020304" pitchFamily="18" charset="0"/>
+                        <a:ea typeface="Times New Roman" panose="02020603050405020304" pitchFamily="18" charset="0"/>
+                        <a:cs typeface="Times New Roman" panose="02020603050405020304" pitchFamily="18" charset="0"/>
+                      </a:endParaRPr>
+                    </a:p>
+                  </a:txBody>
+                  <a:tcPr marL="68580" marR="68580" marT="0" marB="0">
                     <a:lnT w="12700" cap="flat" cmpd="sng" algn="ctr">
                       <a:solidFill>
                         <a:schemeClr val="tx1"/>
@@ -13764,17 +13973,23 @@
                         <a:buNone/>
                       </a:pPr>
                       <a:r>
-                        <a:rPr lang="es-ES_tradnl" sz="1050" dirty="0">
+                        <a:rPr lang="es-ES" sz="900">
                           <a:effectLst/>
                           <a:latin typeface="Times New Roman" panose="02020603050405020304" pitchFamily="18" charset="0"/>
                           <a:ea typeface="Times New Roman" panose="02020603050405020304" pitchFamily="18" charset="0"/>
                           <a:cs typeface="Times New Roman" panose="02020603050405020304" pitchFamily="18" charset="0"/>
                         </a:rPr>
-                        <a:t>45.70</a:t>
-                      </a:r>
-                    </a:p>
-                  </a:txBody>
-                  <a:tcPr marL="68580" marR="68580" marT="0" marB="0" anchor="ctr">
+                        <a:t>18.55</a:t>
+                      </a:r>
+                      <a:endParaRPr lang="de-DE" sz="900">
+                        <a:effectLst/>
+                        <a:latin typeface="Times New Roman" panose="02020603050405020304" pitchFamily="18" charset="0"/>
+                        <a:ea typeface="Times New Roman" panose="02020603050405020304" pitchFamily="18" charset="0"/>
+                        <a:cs typeface="Times New Roman" panose="02020603050405020304" pitchFamily="18" charset="0"/>
+                      </a:endParaRPr>
+                    </a:p>
+                  </a:txBody>
+                  <a:tcPr marL="68580" marR="68580" marT="0" marB="0">
                     <a:lnT w="12700" cap="flat" cmpd="sng" algn="ctr">
                       <a:solidFill>
                         <a:schemeClr val="tx1"/>
@@ -13829,7 +14044,7 @@
                         <a:buNone/>
                       </a:pPr>
                       <a:r>
-                        <a:rPr lang="es-ES_tradnl" sz="1050" dirty="0">
+                        <a:rPr lang="es-ES_tradnl" sz="900" dirty="0">
                           <a:effectLst/>
                           <a:latin typeface="Times New Roman" panose="02020603050405020304" pitchFamily="18" charset="0"/>
                           <a:ea typeface="Times New Roman" panose="02020603050405020304" pitchFamily="18" charset="0"/>
@@ -13852,7 +14067,7 @@
                         <a:buNone/>
                       </a:pPr>
                       <a:r>
-                        <a:rPr lang="es-ES_tradnl" sz="1050" dirty="0">
+                        <a:rPr lang="es-ES_tradnl" sz="900" dirty="0">
                           <a:effectLst/>
                           <a:latin typeface="Times New Roman" panose="02020603050405020304" pitchFamily="18" charset="0"/>
                           <a:ea typeface="Times New Roman" panose="02020603050405020304" pitchFamily="18" charset="0"/>
@@ -13875,7 +14090,7 @@
                         <a:buNone/>
                       </a:pPr>
                       <a:r>
-                        <a:rPr lang="es-ES_tradnl" sz="1050" dirty="0">
+                        <a:rPr lang="es-ES_tradnl" sz="900" dirty="0">
                           <a:effectLst/>
                           <a:latin typeface="Times New Roman" panose="02020603050405020304" pitchFamily="18" charset="0"/>
                           <a:ea typeface="Times New Roman" panose="02020603050405020304" pitchFamily="18" charset="0"/>
@@ -13898,7 +14113,7 @@
                         <a:buNone/>
                       </a:pPr>
                       <a:r>
-                        <a:rPr lang="es-ES_tradnl" sz="1050" dirty="0">
+                        <a:rPr lang="es-ES_tradnl" sz="900" dirty="0">
                           <a:effectLst/>
                           <a:latin typeface="Times New Roman" panose="02020603050405020304" pitchFamily="18" charset="0"/>
                           <a:ea typeface="Times New Roman" panose="02020603050405020304" pitchFamily="18" charset="0"/>
@@ -13921,7 +14136,7 @@
                         <a:buNone/>
                       </a:pPr>
                       <a:r>
-                        <a:rPr lang="es-ES_tradnl" sz="1050" dirty="0">
+                        <a:rPr lang="es-ES_tradnl" sz="900" dirty="0">
                           <a:effectLst/>
                           <a:latin typeface="Times New Roman" panose="02020603050405020304" pitchFamily="18" charset="0"/>
                           <a:ea typeface="Times New Roman" panose="02020603050405020304" pitchFamily="18" charset="0"/>
@@ -13944,7 +14159,7 @@
                         <a:buNone/>
                       </a:pPr>
                       <a:r>
-                        <a:rPr lang="es-ES_tradnl" sz="1050" dirty="0">
+                        <a:rPr lang="es-ES_tradnl" sz="900" dirty="0">
                           <a:effectLst/>
                           <a:latin typeface="Times New Roman" panose="02020603050405020304" pitchFamily="18" charset="0"/>
                           <a:ea typeface="Times New Roman" panose="02020603050405020304" pitchFamily="18" charset="0"/>
@@ -13967,7 +14182,7 @@
                         <a:buNone/>
                       </a:pPr>
                       <a:r>
-                        <a:rPr lang="es-ES_tradnl" sz="1050" dirty="0">
+                        <a:rPr lang="es-ES_tradnl" sz="900" dirty="0">
                           <a:effectLst/>
                           <a:latin typeface="Times New Roman" panose="02020603050405020304" pitchFamily="18" charset="0"/>
                           <a:ea typeface="Times New Roman" panose="02020603050405020304" pitchFamily="18" charset="0"/>
@@ -13990,7 +14205,7 @@
                         <a:buNone/>
                       </a:pPr>
                       <a:r>
-                        <a:rPr lang="es-ES_tradnl" sz="1050" dirty="0">
+                        <a:rPr lang="es-ES_tradnl" sz="900" dirty="0">
                           <a:effectLst/>
                           <a:latin typeface="Times New Roman" panose="02020603050405020304" pitchFamily="18" charset="0"/>
                           <a:ea typeface="Times New Roman" panose="02020603050405020304" pitchFamily="18" charset="0"/>
@@ -14013,7 +14228,7 @@
                         <a:buNone/>
                       </a:pPr>
                       <a:r>
-                        <a:rPr lang="es-ES_tradnl" sz="1050" dirty="0">
+                        <a:rPr lang="es-ES_tradnl" sz="900" dirty="0">
                           <a:effectLst/>
                           <a:latin typeface="Times New Roman" panose="02020603050405020304" pitchFamily="18" charset="0"/>
                           <a:ea typeface="Times New Roman" panose="02020603050405020304" pitchFamily="18" charset="0"/>
@@ -14036,7 +14251,7 @@
                         <a:buNone/>
                       </a:pPr>
                       <a:r>
-                        <a:rPr lang="es-ES_tradnl" sz="1050" dirty="0">
+                        <a:rPr lang="es-ES_tradnl" sz="900" dirty="0">
                           <a:effectLst/>
                           <a:latin typeface="Times New Roman" panose="02020603050405020304" pitchFamily="18" charset="0"/>
                           <a:ea typeface="Times New Roman" panose="02020603050405020304" pitchFamily="18" charset="0"/>
@@ -14059,109 +14274,139 @@
                         <a:buNone/>
                       </a:pPr>
                       <a:r>
-                        <a:rPr lang="es-ES_tradnl" sz="1050" dirty="0">
+                        <a:rPr lang="es-ES" sz="900">
                           <a:effectLst/>
                           <a:latin typeface="Times New Roman" panose="02020603050405020304" pitchFamily="18" charset="0"/>
                           <a:ea typeface="Times New Roman" panose="02020603050405020304" pitchFamily="18" charset="0"/>
                           <a:cs typeface="Times New Roman" panose="02020603050405020304" pitchFamily="18" charset="0"/>
                         </a:rPr>
-                        <a:t>9.92</a:t>
-                      </a:r>
-                    </a:p>
-                  </a:txBody>
-                  <a:tcPr marL="68580" marR="68580" marT="0" marB="0" anchor="ctr">
-                    <a:noFill/>
-                  </a:tcPr>
-                </a:tc>
-                <a:tc>
-                  <a:txBody>
-                    <a:bodyPr/>
-                    <a:lstStyle/>
-                    <a:p>
-                      <a:pPr algn="ctr">
-                        <a:buNone/>
-                      </a:pPr>
-                      <a:r>
-                        <a:rPr lang="es-ES_tradnl" sz="1050" dirty="0">
+                        <a:t>6.00</a:t>
+                      </a:r>
+                      <a:endParaRPr lang="de-DE" sz="900">
+                        <a:effectLst/>
+                        <a:latin typeface="Times New Roman" panose="02020603050405020304" pitchFamily="18" charset="0"/>
+                        <a:ea typeface="Times New Roman" panose="02020603050405020304" pitchFamily="18" charset="0"/>
+                        <a:cs typeface="Times New Roman" panose="02020603050405020304" pitchFamily="18" charset="0"/>
+                      </a:endParaRPr>
+                    </a:p>
+                  </a:txBody>
+                  <a:tcPr marL="68580" marR="68580" marT="0" marB="0">
+                    <a:noFill/>
+                  </a:tcPr>
+                </a:tc>
+                <a:tc>
+                  <a:txBody>
+                    <a:bodyPr/>
+                    <a:lstStyle/>
+                    <a:p>
+                      <a:pPr algn="ctr">
+                        <a:buNone/>
+                      </a:pPr>
+                      <a:r>
+                        <a:rPr lang="es-ES" sz="900">
                           <a:effectLst/>
                           <a:latin typeface="Times New Roman" panose="02020603050405020304" pitchFamily="18" charset="0"/>
                           <a:ea typeface="Times New Roman" panose="02020603050405020304" pitchFamily="18" charset="0"/>
                           <a:cs typeface="Times New Roman" panose="02020603050405020304" pitchFamily="18" charset="0"/>
                         </a:rPr>
-                        <a:t>2.57</a:t>
-                      </a:r>
-                    </a:p>
-                  </a:txBody>
-                  <a:tcPr marL="68580" marR="68580" marT="0" marB="0" anchor="ctr">
-                    <a:noFill/>
-                  </a:tcPr>
-                </a:tc>
-                <a:tc>
-                  <a:txBody>
-                    <a:bodyPr/>
-                    <a:lstStyle/>
-                    <a:p>
-                      <a:pPr algn="ctr">
-                        <a:buNone/>
-                      </a:pPr>
-                      <a:r>
-                        <a:rPr lang="es-ES_tradnl" sz="1050" dirty="0">
+                        <a:t>2.07</a:t>
+                      </a:r>
+                      <a:endParaRPr lang="de-DE" sz="900">
+                        <a:effectLst/>
+                        <a:latin typeface="Times New Roman" panose="02020603050405020304" pitchFamily="18" charset="0"/>
+                        <a:ea typeface="Times New Roman" panose="02020603050405020304" pitchFamily="18" charset="0"/>
+                        <a:cs typeface="Times New Roman" panose="02020603050405020304" pitchFamily="18" charset="0"/>
+                      </a:endParaRPr>
+                    </a:p>
+                  </a:txBody>
+                  <a:tcPr marL="68580" marR="68580" marT="0" marB="0">
+                    <a:noFill/>
+                  </a:tcPr>
+                </a:tc>
+                <a:tc>
+                  <a:txBody>
+                    <a:bodyPr/>
+                    <a:lstStyle/>
+                    <a:p>
+                      <a:pPr algn="ctr">
+                        <a:buNone/>
+                      </a:pPr>
+                      <a:r>
+                        <a:rPr lang="es-ES" sz="900" dirty="0">
                           <a:effectLst/>
                           <a:latin typeface="Times New Roman" panose="02020603050405020304" pitchFamily="18" charset="0"/>
                           <a:ea typeface="Times New Roman" panose="02020603050405020304" pitchFamily="18" charset="0"/>
                           <a:cs typeface="Times New Roman" panose="02020603050405020304" pitchFamily="18" charset="0"/>
                         </a:rPr>
-                        <a:t>33.25</a:t>
-                      </a:r>
-                    </a:p>
-                  </a:txBody>
-                  <a:tcPr marL="68580" marR="68580" marT="0" marB="0" anchor="ctr">
-                    <a:noFill/>
-                  </a:tcPr>
-                </a:tc>
-                <a:tc>
-                  <a:txBody>
-                    <a:bodyPr/>
-                    <a:lstStyle/>
-                    <a:p>
-                      <a:pPr algn="ctr">
-                        <a:buNone/>
-                      </a:pPr>
-                      <a:r>
-                        <a:rPr lang="es-ES_tradnl" sz="1050" dirty="0">
+                        <a:t>25.11</a:t>
+                      </a:r>
+                      <a:endParaRPr lang="de-DE" sz="900" dirty="0">
+                        <a:effectLst/>
+                        <a:latin typeface="Times New Roman" panose="02020603050405020304" pitchFamily="18" charset="0"/>
+                        <a:ea typeface="Times New Roman" panose="02020603050405020304" pitchFamily="18" charset="0"/>
+                        <a:cs typeface="Times New Roman" panose="02020603050405020304" pitchFamily="18" charset="0"/>
+                      </a:endParaRPr>
+                    </a:p>
+                  </a:txBody>
+                  <a:tcPr marL="68580" marR="68580" marT="0" marB="0">
+                    <a:noFill/>
+                  </a:tcPr>
+                </a:tc>
+                <a:tc>
+                  <a:txBody>
+                    <a:bodyPr/>
+                    <a:lstStyle/>
+                    <a:p>
+                      <a:pPr algn="ctr">
+                        <a:buNone/>
+                      </a:pPr>
+                      <a:r>
+                        <a:rPr lang="es-ES" sz="900" dirty="0">
                           <a:effectLst/>
                           <a:latin typeface="Times New Roman" panose="02020603050405020304" pitchFamily="18" charset="0"/>
                           <a:ea typeface="Times New Roman" panose="02020603050405020304" pitchFamily="18" charset="0"/>
                           <a:cs typeface="Times New Roman" panose="02020603050405020304" pitchFamily="18" charset="0"/>
                         </a:rPr>
-                        <a:t>5.21</a:t>
-                      </a:r>
-                    </a:p>
-                  </a:txBody>
-                  <a:tcPr marL="68580" marR="68580" marT="0" marB="0" anchor="ctr">
-                    <a:noFill/>
-                  </a:tcPr>
-                </a:tc>
-                <a:tc>
-                  <a:txBody>
-                    <a:bodyPr/>
-                    <a:lstStyle/>
-                    <a:p>
-                      <a:pPr algn="ctr">
-                        <a:buNone/>
-                      </a:pPr>
-                      <a:r>
-                        <a:rPr lang="es-ES_tradnl" sz="1050" dirty="0">
+                        <a:t>4.75</a:t>
+                      </a:r>
+                      <a:endParaRPr lang="de-DE" sz="900" dirty="0">
+                        <a:effectLst/>
+                        <a:latin typeface="Times New Roman" panose="02020603050405020304" pitchFamily="18" charset="0"/>
+                        <a:ea typeface="Times New Roman" panose="02020603050405020304" pitchFamily="18" charset="0"/>
+                        <a:cs typeface="Times New Roman" panose="02020603050405020304" pitchFamily="18" charset="0"/>
+                      </a:endParaRPr>
+                    </a:p>
+                  </a:txBody>
+                  <a:tcPr marL="68580" marR="68580" marT="0" marB="0">
+                    <a:noFill/>
+                  </a:tcPr>
+                </a:tc>
+                <a:tc>
+                  <a:txBody>
+                    <a:bodyPr/>
+                    <a:lstStyle/>
+                    <a:p>
+                      <a:pPr algn="ctr">
+                        <a:buNone/>
+                      </a:pPr>
+                      <a:r>
+                        <a:rPr lang="es-ES" sz="900">
                           <a:effectLst/>
                           <a:latin typeface="Times New Roman" panose="02020603050405020304" pitchFamily="18" charset="0"/>
                           <a:ea typeface="Times New Roman" panose="02020603050405020304" pitchFamily="18" charset="0"/>
                           <a:cs typeface="Times New Roman" panose="02020603050405020304" pitchFamily="18" charset="0"/>
                         </a:rPr>
-                        <a:t>42.86</a:t>
-                      </a:r>
-                    </a:p>
-                  </a:txBody>
-                  <a:tcPr marL="68580" marR="68580" marT="0" marB="0" anchor="ctr">
+                        <a:t>18.56</a:t>
+                      </a:r>
+                      <a:endParaRPr lang="de-DE" sz="900">
+                        <a:effectLst/>
+                        <a:latin typeface="Times New Roman" panose="02020603050405020304" pitchFamily="18" charset="0"/>
+                        <a:ea typeface="Times New Roman" panose="02020603050405020304" pitchFamily="18" charset="0"/>
+                        <a:cs typeface="Times New Roman" panose="02020603050405020304" pitchFamily="18" charset="0"/>
+                      </a:endParaRPr>
+                    </a:p>
+                  </a:txBody>
+                  <a:tcPr marL="68580" marR="68580" marT="0" marB="0">
                     <a:noFill/>
                   </a:tcPr>
                 </a:tc>
@@ -14207,7 +14452,7 @@
                         <a:buNone/>
                       </a:pPr>
                       <a:r>
-                        <a:rPr lang="es-ES_tradnl" sz="1050" dirty="0">
+                        <a:rPr lang="es-ES_tradnl" sz="900" dirty="0">
                           <a:effectLst/>
                           <a:latin typeface="Times New Roman" panose="02020603050405020304" pitchFamily="18" charset="0"/>
                           <a:ea typeface="Times New Roman" panose="02020603050405020304" pitchFamily="18" charset="0"/>
@@ -14230,7 +14475,7 @@
                         <a:buNone/>
                       </a:pPr>
                       <a:r>
-                        <a:rPr lang="es-ES_tradnl" sz="1050" dirty="0">
+                        <a:rPr lang="es-ES_tradnl" sz="900" dirty="0">
                           <a:effectLst/>
                           <a:latin typeface="Times New Roman" panose="02020603050405020304" pitchFamily="18" charset="0"/>
                           <a:ea typeface="Times New Roman" panose="02020603050405020304" pitchFamily="18" charset="0"/>
@@ -14253,7 +14498,7 @@
                         <a:buNone/>
                       </a:pPr>
                       <a:r>
-                        <a:rPr lang="es-ES_tradnl" sz="1050" dirty="0">
+                        <a:rPr lang="es-ES_tradnl" sz="900" dirty="0">
                           <a:effectLst/>
                           <a:latin typeface="Times New Roman" panose="02020603050405020304" pitchFamily="18" charset="0"/>
                           <a:ea typeface="Times New Roman" panose="02020603050405020304" pitchFamily="18" charset="0"/>
@@ -14276,7 +14521,7 @@
                         <a:buNone/>
                       </a:pPr>
                       <a:r>
-                        <a:rPr lang="es-ES_tradnl" sz="1050" dirty="0">
+                        <a:rPr lang="es-ES_tradnl" sz="900" dirty="0">
                           <a:effectLst/>
                           <a:latin typeface="Times New Roman" panose="02020603050405020304" pitchFamily="18" charset="0"/>
                           <a:ea typeface="Times New Roman" panose="02020603050405020304" pitchFamily="18" charset="0"/>
@@ -14299,7 +14544,7 @@
                         <a:buNone/>
                       </a:pPr>
                       <a:r>
-                        <a:rPr lang="es-ES_tradnl" sz="1050" dirty="0">
+                        <a:rPr lang="es-ES_tradnl" sz="900" dirty="0">
                           <a:effectLst/>
                           <a:latin typeface="Times New Roman" panose="02020603050405020304" pitchFamily="18" charset="0"/>
                           <a:ea typeface="Times New Roman" panose="02020603050405020304" pitchFamily="18" charset="0"/>
@@ -14322,7 +14567,7 @@
                         <a:buNone/>
                       </a:pPr>
                       <a:r>
-                        <a:rPr lang="es-ES_tradnl" sz="1050" dirty="0">
+                        <a:rPr lang="es-ES_tradnl" sz="900" dirty="0">
                           <a:effectLst/>
                           <a:latin typeface="Times New Roman" panose="02020603050405020304" pitchFamily="18" charset="0"/>
                           <a:ea typeface="Times New Roman" panose="02020603050405020304" pitchFamily="18" charset="0"/>
@@ -14345,7 +14590,7 @@
                         <a:buNone/>
                       </a:pPr>
                       <a:r>
-                        <a:rPr lang="es-ES_tradnl" sz="1050" dirty="0">
+                        <a:rPr lang="es-ES_tradnl" sz="900" dirty="0">
                           <a:effectLst/>
                           <a:latin typeface="Times New Roman" panose="02020603050405020304" pitchFamily="18" charset="0"/>
                           <a:ea typeface="Times New Roman" panose="02020603050405020304" pitchFamily="18" charset="0"/>
@@ -14368,7 +14613,7 @@
                         <a:buNone/>
                       </a:pPr>
                       <a:r>
-                        <a:rPr lang="es-ES_tradnl" sz="1050" dirty="0">
+                        <a:rPr lang="es-ES_tradnl" sz="900" dirty="0">
                           <a:effectLst/>
                           <a:latin typeface="Times New Roman" panose="02020603050405020304" pitchFamily="18" charset="0"/>
                           <a:ea typeface="Times New Roman" panose="02020603050405020304" pitchFamily="18" charset="0"/>
@@ -14391,7 +14636,7 @@
                         <a:buNone/>
                       </a:pPr>
                       <a:r>
-                        <a:rPr lang="es-ES_tradnl" sz="1050" dirty="0">
+                        <a:rPr lang="es-ES_tradnl" sz="900" dirty="0">
                           <a:effectLst/>
                           <a:latin typeface="Times New Roman" panose="02020603050405020304" pitchFamily="18" charset="0"/>
                           <a:ea typeface="Times New Roman" panose="02020603050405020304" pitchFamily="18" charset="0"/>
@@ -14414,7 +14659,7 @@
                         <a:buNone/>
                       </a:pPr>
                       <a:r>
-                        <a:rPr lang="es-ES_tradnl" sz="1050" dirty="0">
+                        <a:rPr lang="es-ES_tradnl" sz="900" dirty="0">
                           <a:effectLst/>
                           <a:latin typeface="Times New Roman" panose="02020603050405020304" pitchFamily="18" charset="0"/>
                           <a:ea typeface="Times New Roman" panose="02020603050405020304" pitchFamily="18" charset="0"/>
@@ -14437,109 +14682,139 @@
                         <a:buNone/>
                       </a:pPr>
                       <a:r>
-                        <a:rPr lang="es-ES_tradnl" sz="1050" dirty="0">
+                        <a:rPr lang="es-ES" sz="900">
                           <a:effectLst/>
                           <a:latin typeface="Times New Roman" panose="02020603050405020304" pitchFamily="18" charset="0"/>
                           <a:ea typeface="Times New Roman" panose="02020603050405020304" pitchFamily="18" charset="0"/>
                           <a:cs typeface="Times New Roman" panose="02020603050405020304" pitchFamily="18" charset="0"/>
                         </a:rPr>
-                        <a:t>9.92</a:t>
-                      </a:r>
-                    </a:p>
-                  </a:txBody>
-                  <a:tcPr marL="68580" marR="68580" marT="0" marB="0" anchor="ctr">
-                    <a:noFill/>
-                  </a:tcPr>
-                </a:tc>
-                <a:tc>
-                  <a:txBody>
-                    <a:bodyPr/>
-                    <a:lstStyle/>
-                    <a:p>
-                      <a:pPr algn="ctr">
-                        <a:buNone/>
-                      </a:pPr>
-                      <a:r>
-                        <a:rPr lang="es-ES_tradnl" sz="1050" dirty="0">
+                        <a:t>6.00</a:t>
+                      </a:r>
+                      <a:endParaRPr lang="de-DE" sz="900">
+                        <a:effectLst/>
+                        <a:latin typeface="Times New Roman" panose="02020603050405020304" pitchFamily="18" charset="0"/>
+                        <a:ea typeface="Times New Roman" panose="02020603050405020304" pitchFamily="18" charset="0"/>
+                        <a:cs typeface="Times New Roman" panose="02020603050405020304" pitchFamily="18" charset="0"/>
+                      </a:endParaRPr>
+                    </a:p>
+                  </a:txBody>
+                  <a:tcPr marL="68580" marR="68580" marT="0" marB="0">
+                    <a:noFill/>
+                  </a:tcPr>
+                </a:tc>
+                <a:tc>
+                  <a:txBody>
+                    <a:bodyPr/>
+                    <a:lstStyle/>
+                    <a:p>
+                      <a:pPr algn="ctr">
+                        <a:buNone/>
+                      </a:pPr>
+                      <a:r>
+                        <a:rPr lang="es-ES" sz="900">
                           <a:effectLst/>
                           <a:latin typeface="Times New Roman" panose="02020603050405020304" pitchFamily="18" charset="0"/>
                           <a:ea typeface="Times New Roman" panose="02020603050405020304" pitchFamily="18" charset="0"/>
                           <a:cs typeface="Times New Roman" panose="02020603050405020304" pitchFamily="18" charset="0"/>
                         </a:rPr>
-                        <a:t>3.06</a:t>
-                      </a:r>
-                    </a:p>
-                  </a:txBody>
-                  <a:tcPr marL="68580" marR="68580" marT="0" marB="0" anchor="ctr">
-                    <a:noFill/>
-                  </a:tcPr>
-                </a:tc>
-                <a:tc>
-                  <a:txBody>
-                    <a:bodyPr/>
-                    <a:lstStyle/>
-                    <a:p>
-                      <a:pPr algn="ctr">
-                        <a:buNone/>
-                      </a:pPr>
-                      <a:r>
-                        <a:rPr lang="es-ES_tradnl" sz="1050" dirty="0">
+                        <a:t>2.31</a:t>
+                      </a:r>
+                      <a:endParaRPr lang="de-DE" sz="900">
+                        <a:effectLst/>
+                        <a:latin typeface="Times New Roman" panose="02020603050405020304" pitchFamily="18" charset="0"/>
+                        <a:ea typeface="Times New Roman" panose="02020603050405020304" pitchFamily="18" charset="0"/>
+                        <a:cs typeface="Times New Roman" panose="02020603050405020304" pitchFamily="18" charset="0"/>
+                      </a:endParaRPr>
+                    </a:p>
+                  </a:txBody>
+                  <a:tcPr marL="68580" marR="68580" marT="0" marB="0">
+                    <a:noFill/>
+                  </a:tcPr>
+                </a:tc>
+                <a:tc>
+                  <a:txBody>
+                    <a:bodyPr/>
+                    <a:lstStyle/>
+                    <a:p>
+                      <a:pPr algn="ctr">
+                        <a:buNone/>
+                      </a:pPr>
+                      <a:r>
+                        <a:rPr lang="es-ES" sz="900">
                           <a:effectLst/>
                           <a:latin typeface="Times New Roman" panose="02020603050405020304" pitchFamily="18" charset="0"/>
                           <a:ea typeface="Times New Roman" panose="02020603050405020304" pitchFamily="18" charset="0"/>
                           <a:cs typeface="Times New Roman" panose="02020603050405020304" pitchFamily="18" charset="0"/>
                         </a:rPr>
-                        <a:t>49.64</a:t>
-                      </a:r>
-                    </a:p>
-                  </a:txBody>
-                  <a:tcPr marL="68580" marR="68580" marT="0" marB="0" anchor="ctr">
-                    <a:noFill/>
-                  </a:tcPr>
-                </a:tc>
-                <a:tc>
-                  <a:txBody>
-                    <a:bodyPr/>
-                    <a:lstStyle/>
-                    <a:p>
-                      <a:pPr algn="ctr">
-                        <a:buNone/>
-                      </a:pPr>
-                      <a:r>
-                        <a:rPr lang="es-ES_tradnl" sz="1050" dirty="0">
+                        <a:t>31.17</a:t>
+                      </a:r>
+                      <a:endParaRPr lang="de-DE" sz="900">
+                        <a:effectLst/>
+                        <a:latin typeface="Times New Roman" panose="02020603050405020304" pitchFamily="18" charset="0"/>
+                        <a:ea typeface="Times New Roman" panose="02020603050405020304" pitchFamily="18" charset="0"/>
+                        <a:cs typeface="Times New Roman" panose="02020603050405020304" pitchFamily="18" charset="0"/>
+                      </a:endParaRPr>
+                    </a:p>
+                  </a:txBody>
+                  <a:tcPr marL="68580" marR="68580" marT="0" marB="0">
+                    <a:noFill/>
+                  </a:tcPr>
+                </a:tc>
+                <a:tc>
+                  <a:txBody>
+                    <a:bodyPr/>
+                    <a:lstStyle/>
+                    <a:p>
+                      <a:pPr algn="ctr">
+                        <a:buNone/>
+                      </a:pPr>
+                      <a:r>
+                        <a:rPr lang="es-ES" sz="900" dirty="0">
                           <a:effectLst/>
                           <a:latin typeface="Times New Roman" panose="02020603050405020304" pitchFamily="18" charset="0"/>
                           <a:ea typeface="Times New Roman" panose="02020603050405020304" pitchFamily="18" charset="0"/>
                           <a:cs typeface="Times New Roman" panose="02020603050405020304" pitchFamily="18" charset="0"/>
                         </a:rPr>
-                        <a:t>7.35</a:t>
-                      </a:r>
-                    </a:p>
-                  </a:txBody>
-                  <a:tcPr marL="68580" marR="68580" marT="0" marB="0" anchor="ctr">
-                    <a:noFill/>
-                  </a:tcPr>
-                </a:tc>
-                <a:tc>
-                  <a:txBody>
-                    <a:bodyPr/>
-                    <a:lstStyle/>
-                    <a:p>
-                      <a:pPr algn="ctr">
-                        <a:buNone/>
-                      </a:pPr>
-                      <a:r>
-                        <a:rPr lang="es-ES_tradnl" sz="1050" dirty="0">
+                        <a:t>5.85</a:t>
+                      </a:r>
+                      <a:endParaRPr lang="de-DE" sz="900" dirty="0">
+                        <a:effectLst/>
+                        <a:latin typeface="Times New Roman" panose="02020603050405020304" pitchFamily="18" charset="0"/>
+                        <a:ea typeface="Times New Roman" panose="02020603050405020304" pitchFamily="18" charset="0"/>
+                        <a:cs typeface="Times New Roman" panose="02020603050405020304" pitchFamily="18" charset="0"/>
+                      </a:endParaRPr>
+                    </a:p>
+                  </a:txBody>
+                  <a:tcPr marL="68580" marR="68580" marT="0" marB="0">
+                    <a:noFill/>
+                  </a:tcPr>
+                </a:tc>
+                <a:tc>
+                  <a:txBody>
+                    <a:bodyPr/>
+                    <a:lstStyle/>
+                    <a:p>
+                      <a:pPr algn="ctr">
+                        <a:buNone/>
+                      </a:pPr>
+                      <a:r>
+                        <a:rPr lang="es-ES" sz="900" dirty="0">
                           <a:effectLst/>
                           <a:latin typeface="Times New Roman" panose="02020603050405020304" pitchFamily="18" charset="0"/>
                           <a:ea typeface="Times New Roman" panose="02020603050405020304" pitchFamily="18" charset="0"/>
                           <a:cs typeface="Times New Roman" panose="02020603050405020304" pitchFamily="18" charset="0"/>
                         </a:rPr>
-                        <a:t>45.46</a:t>
-                      </a:r>
-                    </a:p>
-                  </a:txBody>
-                  <a:tcPr marL="68580" marR="68580" marT="0" marB="0" anchor="ctr">
+                        <a:t>43.99</a:t>
+                      </a:r>
+                      <a:endParaRPr lang="de-DE" sz="900" dirty="0">
+                        <a:effectLst/>
+                        <a:latin typeface="Times New Roman" panose="02020603050405020304" pitchFamily="18" charset="0"/>
+                        <a:ea typeface="Times New Roman" panose="02020603050405020304" pitchFamily="18" charset="0"/>
+                        <a:cs typeface="Times New Roman" panose="02020603050405020304" pitchFamily="18" charset="0"/>
+                      </a:endParaRPr>
+                    </a:p>
+                  </a:txBody>
+                  <a:tcPr marL="68580" marR="68580" marT="0" marB="0">
                     <a:noFill/>
                   </a:tcPr>
                 </a:tc>
@@ -15749,96 +16024,6 @@
           </a:p>
         </p:txBody>
       </p:sp>
-      <p:pic>
-        <p:nvPicPr>
-          <p:cNvPr id="15" name="Onlinebild-Platzhalter 4">
-            <a:extLst>
-              <a:ext uri="{FF2B5EF4-FFF2-40B4-BE49-F238E27FC236}">
-                <a16:creationId xmlns:a16="http://schemas.microsoft.com/office/drawing/2014/main" id="{021AB7CB-E377-6AB0-FA89-85931644109C}"/>
-              </a:ext>
-            </a:extLst>
-          </p:cNvPr>
-          <p:cNvPicPr>
-            <a:picLocks noChangeAspect="1"/>
-          </p:cNvPicPr>
-          <p:nvPr/>
-        </p:nvPicPr>
-        <p:blipFill>
-          <a:blip r:embed="rId2"/>
-          <a:stretch>
-            <a:fillRect/>
-          </a:stretch>
-        </p:blipFill>
-        <p:spPr>
-          <a:xfrm>
-            <a:off x="309894" y="2246250"/>
-            <a:ext cx="3566076" cy="2728297"/>
-          </a:xfrm>
-          <a:prstGeom prst="rect">
-            <a:avLst/>
-          </a:prstGeom>
-        </p:spPr>
-      </p:pic>
-      <p:pic>
-        <p:nvPicPr>
-          <p:cNvPr id="16" name="Onlinebild-Platzhalter 14">
-            <a:extLst>
-              <a:ext uri="{FF2B5EF4-FFF2-40B4-BE49-F238E27FC236}">
-                <a16:creationId xmlns:a16="http://schemas.microsoft.com/office/drawing/2014/main" id="{166DDBBA-56CB-09FE-0E22-A71DE1F00EE1}"/>
-              </a:ext>
-            </a:extLst>
-          </p:cNvPr>
-          <p:cNvPicPr>
-            <a:picLocks noChangeAspect="1"/>
-          </p:cNvPicPr>
-          <p:nvPr/>
-        </p:nvPicPr>
-        <p:blipFill>
-          <a:blip r:embed="rId3"/>
-          <a:stretch>
-            <a:fillRect/>
-          </a:stretch>
-        </p:blipFill>
-        <p:spPr>
-          <a:xfrm>
-            <a:off x="3875970" y="2303395"/>
-            <a:ext cx="4067228" cy="2668615"/>
-          </a:xfrm>
-          <a:prstGeom prst="rect">
-            <a:avLst/>
-          </a:prstGeom>
-        </p:spPr>
-      </p:pic>
-      <p:pic>
-        <p:nvPicPr>
-          <p:cNvPr id="17" name="Onlinebild-Platzhalter 13">
-            <a:extLst>
-              <a:ext uri="{FF2B5EF4-FFF2-40B4-BE49-F238E27FC236}">
-                <a16:creationId xmlns:a16="http://schemas.microsoft.com/office/drawing/2014/main" id="{DE55C4FF-C2F8-2F2A-4EE2-E8A672A33E91}"/>
-              </a:ext>
-            </a:extLst>
-          </p:cNvPr>
-          <p:cNvPicPr>
-            <a:picLocks noChangeAspect="1"/>
-          </p:cNvPicPr>
-          <p:nvPr/>
-        </p:nvPicPr>
-        <p:blipFill>
-          <a:blip r:embed="rId4"/>
-          <a:stretch>
-            <a:fillRect/>
-          </a:stretch>
-        </p:blipFill>
-        <p:spPr>
-          <a:xfrm>
-            <a:off x="8011199" y="2299118"/>
-            <a:ext cx="3496973" cy="2675428"/>
-          </a:xfrm>
-          <a:prstGeom prst="rect">
-            <a:avLst/>
-          </a:prstGeom>
-        </p:spPr>
-      </p:pic>
       <p:sp>
         <p:nvSpPr>
           <p:cNvPr id="18" name="Textfeld 17">
@@ -16014,6 +16199,98 @@
           </a:p>
         </p:txBody>
       </p:sp>
+      <p:pic>
+        <p:nvPicPr>
+          <p:cNvPr id="4" name="Onlinebild-Platzhalter 7">
+            <a:extLst>
+              <a:ext uri="{FF2B5EF4-FFF2-40B4-BE49-F238E27FC236}">
+                <a16:creationId xmlns:a16="http://schemas.microsoft.com/office/drawing/2014/main" id="{FEE5A37F-5517-EB6C-4872-C02772E1459E}"/>
+              </a:ext>
+            </a:extLst>
+          </p:cNvPr>
+          <p:cNvPicPr>
+            <a:picLocks noGrp="1" noChangeAspect="1"/>
+          </p:cNvPicPr>
+          <p:nvPr>
+            <p:ph type="clipArt" sz="quarter" idx="15"/>
+          </p:nvPr>
+        </p:nvPicPr>
+        <p:blipFill>
+          <a:blip r:embed="rId2"/>
+          <a:stretch>
+            <a:fillRect/>
+          </a:stretch>
+        </p:blipFill>
+        <p:spPr>
+          <a:xfrm>
+            <a:off x="520862" y="2292531"/>
+            <a:ext cx="3431085" cy="2682015"/>
+          </a:xfrm>
+          <a:prstGeom prst="rect">
+            <a:avLst/>
+          </a:prstGeom>
+        </p:spPr>
+      </p:pic>
+      <p:pic>
+        <p:nvPicPr>
+          <p:cNvPr id="5" name="Onlinebild-Platzhalter 5">
+            <a:extLst>
+              <a:ext uri="{FF2B5EF4-FFF2-40B4-BE49-F238E27FC236}">
+                <a16:creationId xmlns:a16="http://schemas.microsoft.com/office/drawing/2014/main" id="{8BF0E64C-75DE-1960-9DB6-BCC33683B26E}"/>
+              </a:ext>
+            </a:extLst>
+          </p:cNvPr>
+          <p:cNvPicPr>
+            <a:picLocks noChangeAspect="1"/>
+          </p:cNvPicPr>
+          <p:nvPr/>
+        </p:nvPicPr>
+        <p:blipFill>
+          <a:blip r:embed="rId3"/>
+          <a:stretch>
+            <a:fillRect/>
+          </a:stretch>
+        </p:blipFill>
+        <p:spPr>
+          <a:xfrm>
+            <a:off x="4033284" y="2299119"/>
+            <a:ext cx="4001157" cy="2682014"/>
+          </a:xfrm>
+          <a:prstGeom prst="rect">
+            <a:avLst/>
+          </a:prstGeom>
+        </p:spPr>
+      </p:pic>
+      <p:pic>
+        <p:nvPicPr>
+          <p:cNvPr id="6" name="Onlinebild-Platzhalter 6">
+            <a:extLst>
+              <a:ext uri="{FF2B5EF4-FFF2-40B4-BE49-F238E27FC236}">
+                <a16:creationId xmlns:a16="http://schemas.microsoft.com/office/drawing/2014/main" id="{1D1CC5A7-AD08-FFA1-E49A-B0820737C831}"/>
+              </a:ext>
+            </a:extLst>
+          </p:cNvPr>
+          <p:cNvPicPr>
+            <a:picLocks noChangeAspect="1"/>
+          </p:cNvPicPr>
+          <p:nvPr/>
+        </p:nvPicPr>
+        <p:blipFill>
+          <a:blip r:embed="rId4"/>
+          <a:stretch>
+            <a:fillRect/>
+          </a:stretch>
+        </p:blipFill>
+        <p:spPr>
+          <a:xfrm>
+            <a:off x="8115778" y="2315278"/>
+            <a:ext cx="3765923" cy="2659268"/>
+          </a:xfrm>
+          <a:prstGeom prst="rect">
+            <a:avLst/>
+          </a:prstGeom>
+        </p:spPr>
+      </p:pic>
     </p:spTree>
     <p:extLst>
       <p:ext uri="{BB962C8B-B14F-4D97-AF65-F5344CB8AC3E}">
